--- a/docs/DepthProjectPresentation.pptx
+++ b/docs/DepthProjectPresentation.pptx
@@ -16,6 +16,15 @@
     <p:sldId id="264" r:id="rId15"/>
     <p:sldId id="265" r:id="rId16"/>
     <p:sldId id="266" r:id="rId17"/>
+    <p:sldId id="267" r:id="rId18"/>
+    <p:sldId id="268" r:id="rId19"/>
+    <p:sldId id="269" r:id="rId20"/>
+    <p:sldId id="270" r:id="rId21"/>
+    <p:sldId id="271" r:id="rId22"/>
+    <p:sldId id="272" r:id="rId23"/>
+    <p:sldId id="273" r:id="rId24"/>
+    <p:sldId id="274" r:id="rId25"/>
+    <p:sldId id="275" r:id="rId26"/>
   </p:sldIdLst>
   <p:sldSz cx="12191695" cy="6858000" type="screen4x3"/>
   <p:notesSz cx="6858000" cy="9144000"/>
@@ -3123,111 +3132,88 @@
           <a:noFill/>
         </p:spPr>
         <p:txBody>
-          <a:bodyPr wrap="none">
-            <a:spAutoFit/>
-          </a:bodyPr>
-          <a:lstStyle/>
-          <a:p>
-            <a:r>
-              <a:rPr sz="2800" b="1">
-                <a:solidFill>
-                  <a:srgbClr val="1F1A17"/>
-                </a:solidFill>
-              </a:rPr>
-              <a:t>Depth Anything Proof of Concept</a:t>
-            </a:r>
-          </a:p>
-          <a:p>
-            <a:r>
-              <a:rPr sz="1300">
-                <a:solidFill>
-                  <a:srgbClr val="645A54"/>
-                </a:solidFill>
-              </a:rPr>
-              <a:t>Alexander Assal • GitHub: https://github.com/arassal/depth-project</a:t>
-            </a:r>
-          </a:p>
-        </p:txBody>
-      </p:sp>
-      <p:sp>
-        <p:nvSpPr>
-          <p:cNvPr id="3" name="TextBox 2"/>
-          <p:cNvSpPr txBox="1"/>
-          <p:nvPr/>
-        </p:nvSpPr>
-        <p:spPr>
-          <a:xfrm>
-            <a:off x="731520" y="1371600"/>
-            <a:ext cx="10607040" cy="2743200"/>
-          </a:xfrm>
-          <a:prstGeom prst="rect">
-            <a:avLst/>
-          </a:prstGeom>
-          <a:noFill/>
-        </p:spPr>
-        <p:txBody>
           <a:bodyPr wrap="square">
             <a:spAutoFit/>
           </a:bodyPr>
           <a:lstStyle/>
           <a:p>
-            <a:pPr>
-              <a:spcAft>
-                <a:spcPts val="800"/>
-              </a:spcAft>
-              <a:defRPr sz="2000">
-                <a:solidFill>
-                  <a:srgbClr val="1F1A17"/>
-                </a:solidFill>
-              </a:defRPr>
-            </a:pPr>
-            <a:r>
-              <a:t>Goal: build a clean monocular depth proof of concept from the original Depth Anything presentation</a:t>
-            </a:r>
-          </a:p>
-          <a:p>
-            <a:pPr>
-              <a:spcAft>
-                <a:spcPts val="800"/>
-              </a:spcAft>
-              <a:defRPr sz="2000">
-                <a:solidFill>
-                  <a:srgbClr val="1F1A17"/>
-                </a:solidFill>
-              </a:defRPr>
-            </a:pPr>
-            <a:r>
-              <a:t>Model: Depth Anything Small</a:t>
-            </a:r>
-          </a:p>
-          <a:p>
-            <a:pPr>
-              <a:spcAft>
-                <a:spcPts val="800"/>
-              </a:spcAft>
-              <a:defRPr sz="2000">
-                <a:solidFill>
-                  <a:srgbClr val="1F1A17"/>
-                </a:solidFill>
-              </a:defRPr>
-            </a:pPr>
-            <a:r>
-              <a:t>Dataset: NYU-v2 subset</a:t>
-            </a:r>
-          </a:p>
-          <a:p>
-            <a:pPr>
-              <a:spcAft>
-                <a:spcPts val="800"/>
-              </a:spcAft>
-              <a:defRPr sz="2000">
-                <a:solidFill>
-                  <a:srgbClr val="1F1A17"/>
-                </a:solidFill>
-              </a:defRPr>
-            </a:pPr>
-            <a:r>
-              <a:t>Outputs: metrics, plots, before/after image panels, interactive upload demo</a:t>
+            <a:r>
+              <a:rPr sz="3000" b="1">
+                <a:solidFill>
+                  <a:srgbClr val="1F1A17"/>
+                </a:solidFill>
+              </a:rPr>
+              <a:t>Distillation and Edge-Aware Loss for
+Efficient Monocular Depth Estimation</a:t>
+            </a:r>
+          </a:p>
+          <a:p>
+            <a:r>
+              <a:rPr sz="1400">
+                <a:solidFill>
+                  <a:srgbClr val="645A54"/>
+                </a:solidFill>
+              </a:rPr>
+              <a:t>Cal Poly Pomona  •  ECE 4990</a:t>
+            </a:r>
+          </a:p>
+        </p:txBody>
+      </p:sp>
+      <p:sp>
+        <p:nvSpPr>
+          <p:cNvPr id="3" name="TextBox 2"/>
+          <p:cNvSpPr txBox="1"/>
+          <p:nvPr/>
+        </p:nvSpPr>
+        <p:spPr>
+          <a:xfrm>
+            <a:off x="731520" y="2743200"/>
+            <a:ext cx="10698480" cy="2286000"/>
+          </a:xfrm>
+          <a:prstGeom prst="rect">
+            <a:avLst/>
+          </a:prstGeom>
+          <a:noFill/>
+        </p:spPr>
+        <p:txBody>
+          <a:bodyPr wrap="square">
+            <a:spAutoFit/>
+          </a:bodyPr>
+          <a:lstStyle/>
+          <a:p>
+            <a:pPr>
+              <a:defRPr sz="2200" b="1">
+                <a:solidFill>
+                  <a:srgbClr val="1F1A17"/>
+                </a:solidFill>
+              </a:defRPr>
+            </a:pPr>
+            <a:r>
+              <a:t>Alexander Assal  •  Parsa Ghasemi</a:t>
+            </a:r>
+          </a:p>
+          <a:p>
+            <a:pPr>
+              <a:defRPr sz="1800">
+                <a:solidFill>
+                  <a:srgbClr val="A84425"/>
+                </a:solidFill>
+              </a:defRPr>
+            </a:pPr>
+            <a:r>
+              <a:t>GitHub: https://github.com/arassal/depth-project</a:t>
+            </a:r>
+          </a:p>
+          <a:p>
+            <a:pPr>
+              <a:defRPr sz="1400">
+                <a:solidFill>
+                  <a:srgbClr val="645A54"/>
+                </a:solidFill>
+              </a:defRPr>
+            </a:pPr>
+            <a:r>
+              <a:t>Student: Depth Anything Small  •  Teacher: Depth Anything Large  •  NYU-v2 + KITTI</a:t>
             </a:r>
           </a:p>
         </p:txBody>
@@ -3266,8 +3252,8 @@
         </p:nvSpPr>
         <p:spPr>
           <a:xfrm>
-            <a:off x="502920" y="274320"/>
-            <a:ext cx="11155680" cy="914400"/>
+            <a:off x="502920" y="0"/>
+            <a:ext cx="11155680" cy="320040"/>
           </a:xfrm>
           <a:prstGeom prst="rect">
             <a:avLst/>
@@ -3280,13 +3266,15 @@
           </a:bodyPr>
           <a:lstStyle/>
           <a:p>
-            <a:r>
-              <a:rPr sz="2800" b="1">
-                <a:solidFill>
-                  <a:srgbClr val="1F1A17"/>
-                </a:solidFill>
-              </a:rPr>
-              <a:t>Interactive Demo and Second Dataset</a:t>
+            <a:pPr>
+              <a:defRPr sz="1100" b="1">
+                <a:solidFill>
+                  <a:srgbClr val="A84425"/>
+                </a:solidFill>
+              </a:defRPr>
+            </a:pPr>
+            <a:r>
+              <a:t>RESULTS</a:t>
             </a:r>
           </a:p>
         </p:txBody>
@@ -3299,8 +3287,8 @@
         </p:nvSpPr>
         <p:spPr>
           <a:xfrm>
-            <a:off x="731520" y="1188720"/>
-            <a:ext cx="5486400" cy="2286000"/>
+            <a:off x="502920" y="274320"/>
+            <a:ext cx="11155680" cy="914400"/>
           </a:xfrm>
           <a:prstGeom prst="rect">
             <a:avLst/>
@@ -3313,77 +3301,565 @@
           </a:bodyPr>
           <a:lstStyle/>
           <a:p>
-            <a:pPr>
-              <a:spcAft>
-                <a:spcPts val="800"/>
-              </a:spcAft>
-              <a:defRPr sz="2000">
-                <a:solidFill>
-                  <a:srgbClr val="1F1A17"/>
-                </a:solidFill>
-              </a:defRPr>
-            </a:pPr>
-            <a:r>
-              <a:t>A local uploadable web app was added</a:t>
-            </a:r>
-          </a:p>
-          <a:p>
-            <a:pPr>
-              <a:spcAft>
-                <a:spcPts val="800"/>
-              </a:spcAft>
-              <a:defRPr sz="2000">
-                <a:solidFill>
-                  <a:srgbClr val="1F1A17"/>
-                </a:solidFill>
-              </a:defRPr>
-            </a:pPr>
-            <a:r>
-              <a:t>Run: ./run_upload_demo.sh</a:t>
-            </a:r>
-          </a:p>
-          <a:p>
-            <a:pPr>
-              <a:spcAft>
-                <a:spcPts val="800"/>
-              </a:spcAft>
-              <a:defRPr sz="2000">
-                <a:solidFill>
-                  <a:srgbClr val="1F1A17"/>
-                </a:solidFill>
-              </a:defRPr>
-            </a:pPr>
-            <a:r>
-              <a:t>Open: http://127.0.0.1:8000</a:t>
-            </a:r>
-          </a:p>
-          <a:p>
-            <a:pPr>
-              <a:spcAft>
-                <a:spcPts val="800"/>
-              </a:spcAft>
-              <a:defRPr sz="2000">
-                <a:solidFill>
-                  <a:srgbClr val="1F1A17"/>
-                </a:solidFill>
-              </a:defRPr>
-            </a:pPr>
-            <a:r>
-              <a:t>It runs the pretrained model on any uploaded image and saves the predicted depth map</a:t>
-            </a:r>
-          </a:p>
-        </p:txBody>
-      </p:sp>
-      <p:sp>
-        <p:nvSpPr>
-          <p:cNvPr id="4" name="TextBox 3"/>
+            <a:r>
+              <a:rPr sz="3000" b="1">
+                <a:solidFill>
+                  <a:srgbClr val="1F1A17"/>
+                </a:solidFill>
+              </a:rPr>
+              <a:t>NYU-v2 PoC Test Results</a:t>
+            </a:r>
+          </a:p>
+          <a:p>
+            <a:r>
+              <a:rPr sz="1400">
+                <a:solidFill>
+                  <a:srgbClr val="645A54"/>
+                </a:solidFill>
+              </a:rPr>
+              <a:t>59 images, image_size 256, after scale+shift alignment</a:t>
+            </a:r>
+          </a:p>
+        </p:txBody>
+      </p:sp>
+      <p:sp>
+        <p:nvSpPr>
+          <p:cNvPr id="4" name="Rectangle 3"/>
+          <p:cNvSpPr/>
+          <p:nvPr/>
+        </p:nvSpPr>
+        <p:spPr>
+          <a:xfrm>
+            <a:off x="731520" y="1188720"/>
+            <a:ext cx="2377440" cy="1143000"/>
+          </a:xfrm>
+          <a:prstGeom prst="rect">
+            <a:avLst/>
+          </a:prstGeom>
+          <a:solidFill>
+            <a:srgbClr val="FFFAF1"/>
+          </a:solidFill>
+          <a:ln>
+            <a:solidFill>
+              <a:srgbClr val="DCCDC0"/>
+            </a:solidFill>
+          </a:ln>
+        </p:spPr>
+        <p:style>
+          <a:lnRef idx="1">
+            <a:schemeClr val="accent1"/>
+          </a:lnRef>
+          <a:fillRef idx="3">
+            <a:schemeClr val="accent1"/>
+          </a:fillRef>
+          <a:effectRef idx="2">
+            <a:schemeClr val="accent1"/>
+          </a:effectRef>
+          <a:fontRef idx="minor">
+            <a:schemeClr val="lt1"/>
+          </a:fontRef>
+        </p:style>
+        <p:txBody>
+          <a:bodyPr rtlCol="0" anchor="ctr" wrap="square"/>
+          <a:lstStyle/>
+          <a:p>
+            <a:pPr algn="ctr">
+              <a:defRPr sz="1200">
+                <a:solidFill>
+                  <a:srgbClr val="645A54"/>
+                </a:solidFill>
+              </a:defRPr>
+            </a:pPr>
+            <a:r>
+              <a:t>Zero-shot AbsRel</a:t>
+            </a:r>
+          </a:p>
+          <a:p>
+            <a:pPr algn="ctr">
+              <a:defRPr sz="2600" b="1">
+                <a:solidFill>
+                  <a:srgbClr val="A84425"/>
+                </a:solidFill>
+              </a:defRPr>
+            </a:pPr>
+            <a:r>
+              <a:t>0.1550</a:t>
+            </a:r>
+          </a:p>
+        </p:txBody>
+      </p:sp>
+      <p:sp>
+        <p:nvSpPr>
+          <p:cNvPr id="5" name="Rectangle 4"/>
+          <p:cNvSpPr/>
+          <p:nvPr/>
+        </p:nvSpPr>
+        <p:spPr>
+          <a:xfrm>
+            <a:off x="3246120" y="1188720"/>
+            <a:ext cx="2377440" cy="1143000"/>
+          </a:xfrm>
+          <a:prstGeom prst="rect">
+            <a:avLst/>
+          </a:prstGeom>
+          <a:solidFill>
+            <a:srgbClr val="FFFAF1"/>
+          </a:solidFill>
+          <a:ln>
+            <a:solidFill>
+              <a:srgbClr val="DCCDC0"/>
+            </a:solidFill>
+          </a:ln>
+        </p:spPr>
+        <p:style>
+          <a:lnRef idx="1">
+            <a:schemeClr val="accent1"/>
+          </a:lnRef>
+          <a:fillRef idx="3">
+            <a:schemeClr val="accent1"/>
+          </a:fillRef>
+          <a:effectRef idx="2">
+            <a:schemeClr val="accent1"/>
+          </a:effectRef>
+          <a:fontRef idx="minor">
+            <a:schemeClr val="lt1"/>
+          </a:fontRef>
+        </p:style>
+        <p:txBody>
+          <a:bodyPr rtlCol="0" anchor="ctr" wrap="square"/>
+          <a:lstStyle/>
+          <a:p>
+            <a:pPr algn="ctr">
+              <a:defRPr sz="1200">
+                <a:solidFill>
+                  <a:srgbClr val="645A54"/>
+                </a:solidFill>
+              </a:defRPr>
+            </a:pPr>
+            <a:r>
+              <a:t>Zero-shot δ_1</a:t>
+            </a:r>
+          </a:p>
+          <a:p>
+            <a:pPr algn="ctr">
+              <a:defRPr sz="2600" b="1">
+                <a:solidFill>
+                  <a:srgbClr val="A84425"/>
+                </a:solidFill>
+              </a:defRPr>
+            </a:pPr>
+            <a:r>
+              <a:t>0.8146</a:t>
+            </a:r>
+          </a:p>
+        </p:txBody>
+      </p:sp>
+      <p:sp>
+        <p:nvSpPr>
+          <p:cNvPr id="6" name="Rectangle 5"/>
+          <p:cNvSpPr/>
+          <p:nvPr/>
+        </p:nvSpPr>
+        <p:spPr>
+          <a:xfrm>
+            <a:off x="5760720" y="1188720"/>
+            <a:ext cx="2377440" cy="1143000"/>
+          </a:xfrm>
+          <a:prstGeom prst="rect">
+            <a:avLst/>
+          </a:prstGeom>
+          <a:solidFill>
+            <a:srgbClr val="FFFAF1"/>
+          </a:solidFill>
+          <a:ln>
+            <a:solidFill>
+              <a:srgbClr val="DCCDC0"/>
+            </a:solidFill>
+          </a:ln>
+        </p:spPr>
+        <p:style>
+          <a:lnRef idx="1">
+            <a:schemeClr val="accent1"/>
+          </a:lnRef>
+          <a:fillRef idx="3">
+            <a:schemeClr val="accent1"/>
+          </a:fillRef>
+          <a:effectRef idx="2">
+            <a:schemeClr val="accent1"/>
+          </a:effectRef>
+          <a:fontRef idx="minor">
+            <a:schemeClr val="lt1"/>
+          </a:fontRef>
+        </p:style>
+        <p:txBody>
+          <a:bodyPr rtlCol="0" anchor="ctr" wrap="square"/>
+          <a:lstStyle/>
+          <a:p>
+            <a:pPr algn="ctr">
+              <a:defRPr sz="1200">
+                <a:solidFill>
+                  <a:srgbClr val="645A54"/>
+                </a:solidFill>
+              </a:defRPr>
+            </a:pPr>
+            <a:r>
+              <a:t>Default AbsRel</a:t>
+            </a:r>
+          </a:p>
+          <a:p>
+            <a:pPr algn="ctr">
+              <a:defRPr sz="2600" b="1">
+                <a:solidFill>
+                  <a:srgbClr val="A83232"/>
+                </a:solidFill>
+              </a:defRPr>
+            </a:pPr>
+            <a:r>
+              <a:t>0.2791</a:t>
+            </a:r>
+          </a:p>
+        </p:txBody>
+      </p:sp>
+      <p:sp>
+        <p:nvSpPr>
+          <p:cNvPr id="7" name="Rectangle 6"/>
+          <p:cNvSpPr/>
+          <p:nvPr/>
+        </p:nvSpPr>
+        <p:spPr>
+          <a:xfrm>
+            <a:off x="8275320" y="1188720"/>
+            <a:ext cx="2377440" cy="1143000"/>
+          </a:xfrm>
+          <a:prstGeom prst="rect">
+            <a:avLst/>
+          </a:prstGeom>
+          <a:solidFill>
+            <a:srgbClr val="FFFAF1"/>
+          </a:solidFill>
+          <a:ln>
+            <a:solidFill>
+              <a:srgbClr val="DCCDC0"/>
+            </a:solidFill>
+          </a:ln>
+        </p:spPr>
+        <p:style>
+          <a:lnRef idx="1">
+            <a:schemeClr val="accent1"/>
+          </a:lnRef>
+          <a:fillRef idx="3">
+            <a:schemeClr val="accent1"/>
+          </a:fillRef>
+          <a:effectRef idx="2">
+            <a:schemeClr val="accent1"/>
+          </a:effectRef>
+          <a:fontRef idx="minor">
+            <a:schemeClr val="lt1"/>
+          </a:fontRef>
+        </p:style>
+        <p:txBody>
+          <a:bodyPr rtlCol="0" anchor="ctr" wrap="square"/>
+          <a:lstStyle/>
+          <a:p>
+            <a:pPr algn="ctr">
+              <a:defRPr sz="1200">
+                <a:solidFill>
+                  <a:srgbClr val="645A54"/>
+                </a:solidFill>
+              </a:defRPr>
+            </a:pPr>
+            <a:r>
+              <a:t>Default δ_1</a:t>
+            </a:r>
+          </a:p>
+          <a:p>
+            <a:pPr algn="ctr">
+              <a:defRPr sz="2600" b="1">
+                <a:solidFill>
+                  <a:srgbClr val="A83232"/>
+                </a:solidFill>
+              </a:defRPr>
+            </a:pPr>
+            <a:r>
+              <a:t>0.6292</a:t>
+            </a:r>
+          </a:p>
+        </p:txBody>
+      </p:sp>
+      <p:sp>
+        <p:nvSpPr>
+          <p:cNvPr id="8" name="Rectangle 7"/>
+          <p:cNvSpPr/>
+          <p:nvPr/>
+        </p:nvSpPr>
+        <p:spPr>
+          <a:xfrm>
+            <a:off x="731520" y="2606040"/>
+            <a:ext cx="2377440" cy="1143000"/>
+          </a:xfrm>
+          <a:prstGeom prst="rect">
+            <a:avLst/>
+          </a:prstGeom>
+          <a:solidFill>
+            <a:srgbClr val="FFFAF1"/>
+          </a:solidFill>
+          <a:ln>
+            <a:solidFill>
+              <a:srgbClr val="DCCDC0"/>
+            </a:solidFill>
+          </a:ln>
+        </p:spPr>
+        <p:style>
+          <a:lnRef idx="1">
+            <a:schemeClr val="accent1"/>
+          </a:lnRef>
+          <a:fillRef idx="3">
+            <a:schemeClr val="accent1"/>
+          </a:fillRef>
+          <a:effectRef idx="2">
+            <a:schemeClr val="accent1"/>
+          </a:effectRef>
+          <a:fontRef idx="minor">
+            <a:schemeClr val="lt1"/>
+          </a:fontRef>
+        </p:style>
+        <p:txBody>
+          <a:bodyPr rtlCol="0" anchor="ctr" wrap="square"/>
+          <a:lstStyle/>
+          <a:p>
+            <a:pPr algn="ctr">
+              <a:defRPr sz="1200">
+                <a:solidFill>
+                  <a:srgbClr val="645A54"/>
+                </a:solidFill>
+              </a:defRPr>
+            </a:pPr>
+            <a:r>
+              <a:t>Best AbsRel (ours)</a:t>
+            </a:r>
+          </a:p>
+          <a:p>
+            <a:pPr algn="ctr">
+              <a:defRPr sz="2600" b="1">
+                <a:solidFill>
+                  <a:srgbClr val="387846"/>
+                </a:solidFill>
+              </a:defRPr>
+            </a:pPr>
+            <a:r>
+              <a:t>0.1505</a:t>
+            </a:r>
+          </a:p>
+        </p:txBody>
+      </p:sp>
+      <p:sp>
+        <p:nvSpPr>
+          <p:cNvPr id="9" name="Rectangle 8"/>
+          <p:cNvSpPr/>
+          <p:nvPr/>
+        </p:nvSpPr>
+        <p:spPr>
+          <a:xfrm>
+            <a:off x="3246120" y="2606040"/>
+            <a:ext cx="2377440" cy="1143000"/>
+          </a:xfrm>
+          <a:prstGeom prst="rect">
+            <a:avLst/>
+          </a:prstGeom>
+          <a:solidFill>
+            <a:srgbClr val="FFFAF1"/>
+          </a:solidFill>
+          <a:ln>
+            <a:solidFill>
+              <a:srgbClr val="DCCDC0"/>
+            </a:solidFill>
+          </a:ln>
+        </p:spPr>
+        <p:style>
+          <a:lnRef idx="1">
+            <a:schemeClr val="accent1"/>
+          </a:lnRef>
+          <a:fillRef idx="3">
+            <a:schemeClr val="accent1"/>
+          </a:fillRef>
+          <a:effectRef idx="2">
+            <a:schemeClr val="accent1"/>
+          </a:effectRef>
+          <a:fontRef idx="minor">
+            <a:schemeClr val="lt1"/>
+          </a:fontRef>
+        </p:style>
+        <p:txBody>
+          <a:bodyPr rtlCol="0" anchor="ctr" wrap="square"/>
+          <a:lstStyle/>
+          <a:p>
+            <a:pPr algn="ctr">
+              <a:defRPr sz="1200">
+                <a:solidFill>
+                  <a:srgbClr val="645A54"/>
+                </a:solidFill>
+              </a:defRPr>
+            </a:pPr>
+            <a:r>
+              <a:t>Best δ_1 (ours)</a:t>
+            </a:r>
+          </a:p>
+          <a:p>
+            <a:pPr algn="ctr">
+              <a:defRPr sz="2600" b="1">
+                <a:solidFill>
+                  <a:srgbClr val="387846"/>
+                </a:solidFill>
+              </a:defRPr>
+            </a:pPr>
+            <a:r>
+              <a:t>0.8164</a:t>
+            </a:r>
+          </a:p>
+        </p:txBody>
+      </p:sp>
+      <p:sp>
+        <p:nvSpPr>
+          <p:cNvPr id="10" name="Rectangle 9"/>
+          <p:cNvSpPr/>
+          <p:nvPr/>
+        </p:nvSpPr>
+        <p:spPr>
+          <a:xfrm>
+            <a:off x="5760720" y="2606040"/>
+            <a:ext cx="2377440" cy="1143000"/>
+          </a:xfrm>
+          <a:prstGeom prst="rect">
+            <a:avLst/>
+          </a:prstGeom>
+          <a:solidFill>
+            <a:srgbClr val="FFFAF1"/>
+          </a:solidFill>
+          <a:ln>
+            <a:solidFill>
+              <a:srgbClr val="DCCDC0"/>
+            </a:solidFill>
+          </a:ln>
+        </p:spPr>
+        <p:style>
+          <a:lnRef idx="1">
+            <a:schemeClr val="accent1"/>
+          </a:lnRef>
+          <a:fillRef idx="3">
+            <a:schemeClr val="accent1"/>
+          </a:fillRef>
+          <a:effectRef idx="2">
+            <a:schemeClr val="accent1"/>
+          </a:effectRef>
+          <a:fontRef idx="minor">
+            <a:schemeClr val="lt1"/>
+          </a:fontRef>
+        </p:style>
+        <p:txBody>
+          <a:bodyPr rtlCol="0" anchor="ctr" wrap="square"/>
+          <a:lstStyle/>
+          <a:p>
+            <a:pPr algn="ctr">
+              <a:defRPr sz="1200">
+                <a:solidFill>
+                  <a:srgbClr val="645A54"/>
+                </a:solidFill>
+              </a:defRPr>
+            </a:pPr>
+            <a:r>
+              <a:t>AbsRel Δ vs ZS</a:t>
+            </a:r>
+          </a:p>
+          <a:p>
+            <a:pPr algn="ctr">
+              <a:defRPr sz="2600" b="1">
+                <a:solidFill>
+                  <a:srgbClr val="387846"/>
+                </a:solidFill>
+              </a:defRPr>
+            </a:pPr>
+            <a:r>
+              <a:t>–0.0045</a:t>
+            </a:r>
+          </a:p>
+        </p:txBody>
+      </p:sp>
+      <p:sp>
+        <p:nvSpPr>
+          <p:cNvPr id="11" name="Rectangle 10"/>
+          <p:cNvSpPr/>
+          <p:nvPr/>
+        </p:nvSpPr>
+        <p:spPr>
+          <a:xfrm>
+            <a:off x="8275320" y="2606040"/>
+            <a:ext cx="2377440" cy="1143000"/>
+          </a:xfrm>
+          <a:prstGeom prst="rect">
+            <a:avLst/>
+          </a:prstGeom>
+          <a:solidFill>
+            <a:srgbClr val="FFFAF1"/>
+          </a:solidFill>
+          <a:ln>
+            <a:solidFill>
+              <a:srgbClr val="DCCDC0"/>
+            </a:solidFill>
+          </a:ln>
+        </p:spPr>
+        <p:style>
+          <a:lnRef idx="1">
+            <a:schemeClr val="accent1"/>
+          </a:lnRef>
+          <a:fillRef idx="3">
+            <a:schemeClr val="accent1"/>
+          </a:fillRef>
+          <a:effectRef idx="2">
+            <a:schemeClr val="accent1"/>
+          </a:effectRef>
+          <a:fontRef idx="minor">
+            <a:schemeClr val="lt1"/>
+          </a:fontRef>
+        </p:style>
+        <p:txBody>
+          <a:bodyPr rtlCol="0" anchor="ctr" wrap="square"/>
+          <a:lstStyle/>
+          <a:p>
+            <a:pPr algn="ctr">
+              <a:defRPr sz="1200">
+                <a:solidFill>
+                  <a:srgbClr val="645A54"/>
+                </a:solidFill>
+              </a:defRPr>
+            </a:pPr>
+            <a:r>
+              <a:t>δ_1 Δ vs ZS</a:t>
+            </a:r>
+          </a:p>
+          <a:p>
+            <a:pPr algn="ctr">
+              <a:defRPr sz="2600" b="1">
+                <a:solidFill>
+                  <a:srgbClr val="387846"/>
+                </a:solidFill>
+              </a:defRPr>
+            </a:pPr>
+            <a:r>
+              <a:t>+0.0018</a:t>
+            </a:r>
+          </a:p>
+        </p:txBody>
+      </p:sp>
+      <p:sp>
+        <p:nvSpPr>
+          <p:cNvPr id="12" name="TextBox 11"/>
           <p:cNvSpPr txBox="1"/>
           <p:nvPr/>
         </p:nvSpPr>
         <p:spPr>
           <a:xfrm>
-            <a:off x="822960" y="822960"/>
-            <a:ext cx="5486400" cy="1188720"/>
+            <a:off x="822960" y="4206240"/>
+            <a:ext cx="10515600" cy="2103120"/>
           </a:xfrm>
           <a:prstGeom prst="rect">
             <a:avLst/>
@@ -3398,7 +3874,7 @@
           <a:p>
             <a:pPr>
               <a:spcAft>
-                <a:spcPts val="800"/>
+                <a:spcPts val="600"/>
               </a:spcAft>
               <a:defRPr sz="1800">
                 <a:solidFill>
@@ -3407,13 +3883,13 @@
               </a:defRPr>
             </a:pPr>
             <a:r>
-              <a:t>Demo outputs are stored under outputs/web_demo/</a:t>
-            </a:r>
-          </a:p>
-          <a:p>
-            <a:pPr>
-              <a:spcAft>
-                <a:spcPts val="800"/>
+              <a:t>• Default config (α=0.5, β=0.1, lr=1e-5): student COLLAPSES — AbsRel doubles</a:t>
+            </a:r>
+          </a:p>
+          <a:p>
+            <a:pPr>
+              <a:spcAft>
+                <a:spcPts val="600"/>
               </a:spcAft>
               <a:defRPr sz="1800">
                 <a:solidFill>
@@ -3422,36 +3898,13 @@
               </a:defRPr>
             </a:pPr>
             <a:r>
-              <a:t>This is the most reliable demo mode because it uses the better zero-shot model</a:t>
-            </a:r>
-          </a:p>
-        </p:txBody>
-      </p:sp>
-      <p:sp>
-        <p:nvSpPr>
-          <p:cNvPr id="5" name="TextBox 4"/>
-          <p:cNvSpPr txBox="1"/>
-          <p:nvPr/>
-        </p:nvSpPr>
-        <p:spPr>
-          <a:xfrm>
-            <a:off x="6675120" y="1280160"/>
-            <a:ext cx="3931920" cy="1828800"/>
-          </a:xfrm>
-          <a:prstGeom prst="rect">
-            <a:avLst/>
-          </a:prstGeom>
-          <a:noFill/>
-        </p:spPr>
-        <p:txBody>
-          <a:bodyPr wrap="square">
-            <a:spAutoFit/>
-          </a:bodyPr>
-          <a:lstStyle/>
-          <a:p>
-            <a:pPr>
-              <a:spcAft>
-                <a:spcPts val="800"/>
+              <a:t>• Best config (α=0.7, β=0.3, lr=1e-7): small but real improvement</a:t>
+            </a:r>
+          </a:p>
+          <a:p>
+            <a:pPr>
+              <a:spcAft>
+                <a:spcPts val="600"/>
               </a:spcAft>
               <a:defRPr sz="1800">
                 <a:solidFill>
@@ -3460,170 +3913,7 @@
               </a:defRPr>
             </a:pPr>
             <a:r>
-              <a:t>Second dataset:</a:t>
-            </a:r>
-          </a:p>
-          <a:p>
-            <a:pPr>
-              <a:spcAft>
-                <a:spcPts val="800"/>
-              </a:spcAft>
-              <a:defRPr sz="1800">
-                <a:solidFill>
-                  <a:srgbClr val="1F1A17"/>
-                </a:solidFill>
-              </a:defRPr>
-            </a:pPr>
-            <a:r>
-              <a:t>KITTI Tiny on Desktop</a:t>
-            </a:r>
-          </a:p>
-          <a:p>
-            <a:pPr>
-              <a:spcAft>
-                <a:spcPts val="800"/>
-              </a:spcAft>
-              <a:defRPr sz="1800">
-                <a:solidFill>
-                  <a:srgbClr val="1F1A17"/>
-                </a:solidFill>
-              </a:defRPr>
-            </a:pPr>
-            <a:r>
-              <a:t>7 outdoor driving frames</a:t>
-            </a:r>
-          </a:p>
-          <a:p>
-            <a:pPr>
-              <a:spcAft>
-                <a:spcPts val="800"/>
-              </a:spcAft>
-              <a:defRPr sz="1800">
-                <a:solidFill>
-                  <a:srgbClr val="1F1A17"/>
-                </a:solidFill>
-              </a:defRPr>
-            </a:pPr>
-            <a:r>
-              <a:t>Zero-shot folder inference worked successfully</a:t>
-            </a:r>
-          </a:p>
-        </p:txBody>
-      </p:sp>
-      <p:pic>
-        <p:nvPicPr>
-          <p:cNvPr id="6" name="Picture 5" descr="0000000000.png"/>
-          <p:cNvPicPr>
-            <a:picLocks noChangeAspect="1"/>
-          </p:cNvPicPr>
-          <p:nvPr/>
-        </p:nvPicPr>
-        <p:blipFill>
-          <a:blip r:embed="rId2"/>
-          <a:stretch>
-            <a:fillRect/>
-          </a:stretch>
-        </p:blipFill>
-        <p:spPr>
-          <a:xfrm>
-            <a:off x="822960" y="3657600"/>
-            <a:ext cx="4754880" cy="1435652"/>
-          </a:xfrm>
-          <a:prstGeom prst="rect">
-            <a:avLst/>
-          </a:prstGeom>
-        </p:spPr>
-      </p:pic>
-      <p:pic>
-        <p:nvPicPr>
-          <p:cNvPr id="7" name="Picture 6" descr="0000000000.png"/>
-          <p:cNvPicPr>
-            <a:picLocks noChangeAspect="1"/>
-          </p:cNvPicPr>
-          <p:nvPr/>
-        </p:nvPicPr>
-        <p:blipFill>
-          <a:blip r:embed="rId3"/>
-          <a:stretch>
-            <a:fillRect/>
-          </a:stretch>
-        </p:blipFill>
-        <p:spPr>
-          <a:xfrm>
-            <a:off x="6492240" y="3657600"/>
-            <a:ext cx="4754880" cy="1435652"/>
-          </a:xfrm>
-          <a:prstGeom prst="rect">
-            <a:avLst/>
-          </a:prstGeom>
-        </p:spPr>
-      </p:pic>
-      <p:sp>
-        <p:nvSpPr>
-          <p:cNvPr id="8" name="TextBox 7"/>
-          <p:cNvSpPr txBox="1"/>
-          <p:nvPr/>
-        </p:nvSpPr>
-        <p:spPr>
-          <a:xfrm>
-            <a:off x="822960" y="6126480"/>
-            <a:ext cx="4754880" cy="457200"/>
-          </a:xfrm>
-          <a:prstGeom prst="rect">
-            <a:avLst/>
-          </a:prstGeom>
-          <a:noFill/>
-        </p:spPr>
-        <p:txBody>
-          <a:bodyPr wrap="none">
-            <a:spAutoFit/>
-          </a:bodyPr>
-          <a:lstStyle/>
-          <a:p>
-            <a:pPr algn="ctr">
-              <a:defRPr sz="1200">
-                <a:solidFill>
-                  <a:srgbClr val="645A54"/>
-                </a:solidFill>
-              </a:defRPr>
-            </a:pPr>
-            <a:r>
-              <a:t>KITTI RGB sample</a:t>
-            </a:r>
-          </a:p>
-        </p:txBody>
-      </p:sp>
-      <p:sp>
-        <p:nvSpPr>
-          <p:cNvPr id="9" name="TextBox 8"/>
-          <p:cNvSpPr txBox="1"/>
-          <p:nvPr/>
-        </p:nvSpPr>
-        <p:spPr>
-          <a:xfrm>
-            <a:off x="6492240" y="6126480"/>
-            <a:ext cx="4754880" cy="457200"/>
-          </a:xfrm>
-          <a:prstGeom prst="rect">
-            <a:avLst/>
-          </a:prstGeom>
-          <a:noFill/>
-        </p:spPr>
-        <p:txBody>
-          <a:bodyPr wrap="none">
-            <a:spAutoFit/>
-          </a:bodyPr>
-          <a:lstStyle/>
-          <a:p>
-            <a:pPr algn="ctr">
-              <a:defRPr sz="1200">
-                <a:solidFill>
-                  <a:srgbClr val="645A54"/>
-                </a:solidFill>
-              </a:defRPr>
-            </a:pPr>
-            <a:r>
-              <a:t>KITTI predicted depth</a:t>
+              <a:t>• Improvement is consistent across AbsRel, RMSE, δ_1, δ_2, δ_3</a:t>
             </a:r>
           </a:p>
         </p:txBody>
@@ -3662,8 +3952,8 @@
         </p:nvSpPr>
         <p:spPr>
           <a:xfrm>
-            <a:off x="502920" y="274320"/>
-            <a:ext cx="11155680" cy="914400"/>
+            <a:off x="502920" y="0"/>
+            <a:ext cx="11155680" cy="320040"/>
           </a:xfrm>
           <a:prstGeom prst="rect">
             <a:avLst/>
@@ -3676,13 +3966,15 @@
           </a:bodyPr>
           <a:lstStyle/>
           <a:p>
-            <a:r>
-              <a:rPr sz="2800" b="1">
-                <a:solidFill>
-                  <a:srgbClr val="1F1A17"/>
-                </a:solidFill>
-              </a:rPr>
-              <a:t>Final Takeaway</a:t>
+            <a:pPr>
+              <a:defRPr sz="1100" b="1">
+                <a:solidFill>
+                  <a:srgbClr val="A84425"/>
+                </a:solidFill>
+              </a:defRPr>
+            </a:pPr>
+            <a:r>
+              <a:t>RESULTS</a:t>
             </a:r>
           </a:p>
         </p:txBody>
@@ -3695,8 +3987,8 @@
         </p:nvSpPr>
         <p:spPr>
           <a:xfrm>
-            <a:off x="731520" y="1554480"/>
-            <a:ext cx="10607040" cy="2926080"/>
+            <a:off x="502920" y="274320"/>
+            <a:ext cx="11155680" cy="914400"/>
           </a:xfrm>
           <a:prstGeom prst="rect">
             <a:avLst/>
@@ -3709,63 +4001,2751 @@
           </a:bodyPr>
           <a:lstStyle/>
           <a:p>
-            <a:pPr>
-              <a:spcAft>
-                <a:spcPts val="800"/>
-              </a:spcAft>
-              <a:defRPr sz="2000">
-                <a:solidFill>
-                  <a:srgbClr val="1F1A17"/>
-                </a:solidFill>
-              </a:defRPr>
-            </a:pPr>
-            <a:r>
-              <a:t>This project meets the proof-of-concept goal for monocular relative depth estimation</a:t>
-            </a:r>
-          </a:p>
-          <a:p>
-            <a:pPr>
-              <a:spcAft>
-                <a:spcPts val="800"/>
-              </a:spcAft>
-              <a:defRPr sz="2000">
-                <a:solidFill>
-                  <a:srgbClr val="1F1A17"/>
-                </a:solidFill>
-              </a:defRPr>
-            </a:pPr>
-            <a:r>
-              <a:t>The pretrained model is the strongest result in this run</a:t>
-            </a:r>
-          </a:p>
-          <a:p>
-            <a:pPr>
-              <a:spcAft>
-                <a:spcPts val="800"/>
-              </a:spcAft>
-              <a:defRPr sz="2000">
-                <a:solidFill>
-                  <a:srgbClr val="1F1A17"/>
-                </a:solidFill>
-              </a:defRPr>
-            </a:pPr>
-            <a:r>
-              <a:t>The fine-tuned PoC provided useful evidence about overfitting on small subsets</a:t>
-            </a:r>
-          </a:p>
-          <a:p>
-            <a:pPr>
-              <a:spcAft>
-                <a:spcPts val="800"/>
-              </a:spcAft>
-              <a:defRPr sz="2000">
-                <a:solidFill>
-                  <a:srgbClr val="1F1A17"/>
-                </a:solidFill>
-              </a:defRPr>
-            </a:pPr>
-            <a:r>
-              <a:t>For a stronger adapted model, the next step is more data or a safer fine-tuning setup</a:t>
+            <a:r>
+              <a:rPr sz="3000" b="1">
+                <a:solidFill>
+                  <a:srgbClr val="1F1A17"/>
+                </a:solidFill>
+              </a:rPr>
+              <a:t>Training Collapse at Default Learning Rate</a:t>
+            </a:r>
+          </a:p>
+          <a:p>
+            <a:r>
+              <a:rPr sz="1400">
+                <a:solidFill>
+                  <a:srgbClr val="645A54"/>
+                </a:solidFill>
+              </a:rPr>
+              <a:t>Why we ran the sweep</a:t>
+            </a:r>
+          </a:p>
+        </p:txBody>
+      </p:sp>
+      <p:pic>
+        <p:nvPicPr>
+          <p:cNvPr id="4" name="Picture 3" descr="loss_vs_epoch.png"/>
+          <p:cNvPicPr>
+            <a:picLocks noChangeAspect="1"/>
+          </p:cNvPicPr>
+          <p:nvPr/>
+        </p:nvPicPr>
+        <p:blipFill>
+          <a:blip r:embed="rId2"/>
+          <a:stretch>
+            <a:fillRect/>
+          </a:stretch>
+        </p:blipFill>
+        <p:spPr>
+          <a:xfrm>
+            <a:off x="457200" y="1371600"/>
+            <a:ext cx="3657600" cy="2438400"/>
+          </a:xfrm>
+          <a:prstGeom prst="rect">
+            <a:avLst/>
+          </a:prstGeom>
+        </p:spPr>
+      </p:pic>
+      <p:pic>
+        <p:nvPicPr>
+          <p:cNvPr id="5" name="Picture 4" descr="val_absrel_vs_epoch.png"/>
+          <p:cNvPicPr>
+            <a:picLocks noChangeAspect="1"/>
+          </p:cNvPicPr>
+          <p:nvPr/>
+        </p:nvPicPr>
+        <p:blipFill>
+          <a:blip r:embed="rId3"/>
+          <a:stretch>
+            <a:fillRect/>
+          </a:stretch>
+        </p:blipFill>
+        <p:spPr>
+          <a:xfrm>
+            <a:off x="4297680" y="1371600"/>
+            <a:ext cx="3657600" cy="2438400"/>
+          </a:xfrm>
+          <a:prstGeom prst="rect">
+            <a:avLst/>
+          </a:prstGeom>
+        </p:spPr>
+      </p:pic>
+      <p:pic>
+        <p:nvPicPr>
+          <p:cNvPr id="6" name="Picture 5" descr="val_delta1_vs_epoch.png"/>
+          <p:cNvPicPr>
+            <a:picLocks noChangeAspect="1"/>
+          </p:cNvPicPr>
+          <p:nvPr/>
+        </p:nvPicPr>
+        <p:blipFill>
+          <a:blip r:embed="rId4"/>
+          <a:stretch>
+            <a:fillRect/>
+          </a:stretch>
+        </p:blipFill>
+        <p:spPr>
+          <a:xfrm>
+            <a:off x="8138160" y="1371600"/>
+            <a:ext cx="3657600" cy="2438400"/>
+          </a:xfrm>
+          <a:prstGeom prst="rect">
+            <a:avLst/>
+          </a:prstGeom>
+        </p:spPr>
+      </p:pic>
+      <p:sp>
+        <p:nvSpPr>
+          <p:cNvPr id="7" name="TextBox 6"/>
+          <p:cNvSpPr txBox="1"/>
+          <p:nvPr/>
+        </p:nvSpPr>
+        <p:spPr>
+          <a:xfrm>
+            <a:off x="457200" y="5029200"/>
+            <a:ext cx="3657600" cy="365760"/>
+          </a:xfrm>
+          <a:prstGeom prst="rect">
+            <a:avLst/>
+          </a:prstGeom>
+          <a:noFill/>
+        </p:spPr>
+        <p:txBody>
+          <a:bodyPr wrap="none">
+            <a:spAutoFit/>
+          </a:bodyPr>
+          <a:lstStyle/>
+          <a:p>
+            <a:pPr algn="ctr">
+              <a:defRPr sz="1100">
+                <a:solidFill>
+                  <a:srgbClr val="645A54"/>
+                </a:solidFill>
+              </a:defRPr>
+            </a:pPr>
+            <a:r>
+              <a:t>Train loss</a:t>
+            </a:r>
+          </a:p>
+        </p:txBody>
+      </p:sp>
+      <p:sp>
+        <p:nvSpPr>
+          <p:cNvPr id="8" name="TextBox 7"/>
+          <p:cNvSpPr txBox="1"/>
+          <p:nvPr/>
+        </p:nvSpPr>
+        <p:spPr>
+          <a:xfrm>
+            <a:off x="4297680" y="5029200"/>
+            <a:ext cx="3657600" cy="365760"/>
+          </a:xfrm>
+          <a:prstGeom prst="rect">
+            <a:avLst/>
+          </a:prstGeom>
+          <a:noFill/>
+        </p:spPr>
+        <p:txBody>
+          <a:bodyPr wrap="none">
+            <a:spAutoFit/>
+          </a:bodyPr>
+          <a:lstStyle/>
+          <a:p>
+            <a:pPr algn="ctr">
+              <a:defRPr sz="1100">
+                <a:solidFill>
+                  <a:srgbClr val="645A54"/>
+                </a:solidFill>
+              </a:defRPr>
+            </a:pPr>
+            <a:r>
+              <a:t>Val AbsRel — returns to ~1.0 at epoch 2 (collapse)</a:t>
+            </a:r>
+          </a:p>
+        </p:txBody>
+      </p:sp>
+      <p:sp>
+        <p:nvSpPr>
+          <p:cNvPr id="9" name="TextBox 8"/>
+          <p:cNvSpPr txBox="1"/>
+          <p:nvPr/>
+        </p:nvSpPr>
+        <p:spPr>
+          <a:xfrm>
+            <a:off x="8138160" y="5029200"/>
+            <a:ext cx="3657600" cy="365760"/>
+          </a:xfrm>
+          <a:prstGeom prst="rect">
+            <a:avLst/>
+          </a:prstGeom>
+          <a:noFill/>
+        </p:spPr>
+        <p:txBody>
+          <a:bodyPr wrap="none">
+            <a:spAutoFit/>
+          </a:bodyPr>
+          <a:lstStyle/>
+          <a:p>
+            <a:pPr algn="ctr">
+              <a:defRPr sz="1100">
+                <a:solidFill>
+                  <a:srgbClr val="645A54"/>
+                </a:solidFill>
+              </a:defRPr>
+            </a:pPr>
+            <a:r>
+              <a:t>Val δ_1 — drops to 0.0 at epoch 2</a:t>
+            </a:r>
+          </a:p>
+        </p:txBody>
+      </p:sp>
+      <p:sp>
+        <p:nvSpPr>
+          <p:cNvPr id="10" name="TextBox 9"/>
+          <p:cNvSpPr txBox="1"/>
+          <p:nvPr/>
+        </p:nvSpPr>
+        <p:spPr>
+          <a:xfrm>
+            <a:off x="822960" y="5486400"/>
+            <a:ext cx="10515600" cy="1280160"/>
+          </a:xfrm>
+          <a:prstGeom prst="rect">
+            <a:avLst/>
+          </a:prstGeom>
+          <a:noFill/>
+        </p:spPr>
+        <p:txBody>
+          <a:bodyPr wrap="square">
+            <a:spAutoFit/>
+          </a:bodyPr>
+          <a:lstStyle/>
+          <a:p>
+            <a:pPr>
+              <a:spcAft>
+                <a:spcPts val="600"/>
+              </a:spcAft>
+              <a:defRPr sz="1500">
+                <a:solidFill>
+                  <a:srgbClr val="1F1A17"/>
+                </a:solidFill>
+              </a:defRPr>
+            </a:pPr>
+            <a:r>
+              <a:t>• Signature: student output saturates to a near-constant value</a:t>
+            </a:r>
+          </a:p>
+          <a:p>
+            <a:pPr>
+              <a:spcAft>
+                <a:spcPts val="600"/>
+              </a:spcAft>
+              <a:defRPr sz="1500">
+                <a:solidFill>
+                  <a:srgbClr val="1F1A17"/>
+                </a:solidFill>
+              </a:defRPr>
+            </a:pPr>
+            <a:r>
+              <a:t>• Triggered by (small batch=1) + (small training set 450 imgs) + (high lr 1e-5)</a:t>
+            </a:r>
+          </a:p>
+          <a:p>
+            <a:pPr>
+              <a:spcAft>
+                <a:spcPts val="600"/>
+              </a:spcAft>
+              <a:defRPr sz="1500">
+                <a:solidFill>
+                  <a:srgbClr val="1F1A17"/>
+                </a:solidFill>
+              </a:defRPr>
+            </a:pPr>
+            <a:r>
+              <a:t>• Fix: drop the learning rate by 2 orders of magnitude → fully recovers</a:t>
+            </a:r>
+          </a:p>
+        </p:txBody>
+      </p:sp>
+    </p:spTree>
+  </p:cSld>
+  <p:clrMapOvr>
+    <a:masterClrMapping/>
+  </p:clrMapOvr>
+</p:sld>
+</file>
+
+<file path=ppt/slides/slide12.xml><?xml version="1.0" encoding="utf-8"?>
+<p:sld xmlns:a="http://schemas.openxmlformats.org/drawingml/2006/main" xmlns:p="http://schemas.openxmlformats.org/presentationml/2006/main" xmlns:r="http://schemas.openxmlformats.org/officeDocument/2006/relationships">
+  <p:cSld>
+    <p:bg>
+      <p:bgPr>
+        <a:solidFill>
+          <a:srgbClr val="F7F0E5"/>
+        </a:solidFill>
+        <a:effectLst/>
+      </p:bgPr>
+    </p:bg>
+    <p:spTree>
+      <p:nvGrpSpPr>
+        <p:cNvPr id="1" name=""/>
+        <p:cNvGrpSpPr/>
+        <p:nvPr/>
+      </p:nvGrpSpPr>
+      <p:grpSpPr/>
+      <p:sp>
+        <p:nvSpPr>
+          <p:cNvPr id="2" name="TextBox 1"/>
+          <p:cNvSpPr txBox="1"/>
+          <p:nvPr/>
+        </p:nvSpPr>
+        <p:spPr>
+          <a:xfrm>
+            <a:off x="502920" y="0"/>
+            <a:ext cx="11155680" cy="320040"/>
+          </a:xfrm>
+          <a:prstGeom prst="rect">
+            <a:avLst/>
+          </a:prstGeom>
+          <a:noFill/>
+        </p:spPr>
+        <p:txBody>
+          <a:bodyPr wrap="none">
+            <a:spAutoFit/>
+          </a:bodyPr>
+          <a:lstStyle/>
+          <a:p>
+            <a:pPr>
+              <a:defRPr sz="1100" b="1">
+                <a:solidFill>
+                  <a:srgbClr val="A84425"/>
+                </a:solidFill>
+              </a:defRPr>
+            </a:pPr>
+            <a:r>
+              <a:t>ABLATION</a:t>
+            </a:r>
+          </a:p>
+        </p:txBody>
+      </p:sp>
+      <p:sp>
+        <p:nvSpPr>
+          <p:cNvPr id="3" name="TextBox 2"/>
+          <p:cNvSpPr txBox="1"/>
+          <p:nvPr/>
+        </p:nvSpPr>
+        <p:spPr>
+          <a:xfrm>
+            <a:off x="502920" y="274320"/>
+            <a:ext cx="11155680" cy="914400"/>
+          </a:xfrm>
+          <a:prstGeom prst="rect">
+            <a:avLst/>
+          </a:prstGeom>
+          <a:noFill/>
+        </p:spPr>
+        <p:txBody>
+          <a:bodyPr wrap="square">
+            <a:spAutoFit/>
+          </a:bodyPr>
+          <a:lstStyle/>
+          <a:p>
+            <a:r>
+              <a:rPr sz="3000" b="1">
+                <a:solidFill>
+                  <a:srgbClr val="1F1A17"/>
+                </a:solidFill>
+              </a:rPr>
+              <a:t>Distillation Weight α Sweep</a:t>
+            </a:r>
+          </a:p>
+          <a:p>
+            <a:r>
+              <a:rPr sz="1400">
+                <a:solidFill>
+                  <a:srgbClr val="645A54"/>
+                </a:solidFill>
+              </a:rPr>
+              <a:t>β=0.1, lr=1e-5 fixed</a:t>
+            </a:r>
+          </a:p>
+        </p:txBody>
+      </p:sp>
+      <p:pic>
+        <p:nvPicPr>
+          <p:cNvPr id="4" name="Picture 3" descr="abs_rel_vs_alpha.png"/>
+          <p:cNvPicPr>
+            <a:picLocks noChangeAspect="1"/>
+          </p:cNvPicPr>
+          <p:nvPr/>
+        </p:nvPicPr>
+        <p:blipFill>
+          <a:blip r:embed="rId2"/>
+          <a:stretch>
+            <a:fillRect/>
+          </a:stretch>
+        </p:blipFill>
+        <p:spPr>
+          <a:xfrm>
+            <a:off x="457200" y="1280160"/>
+            <a:ext cx="5669280" cy="3779520"/>
+          </a:xfrm>
+          <a:prstGeom prst="rect">
+            <a:avLst/>
+          </a:prstGeom>
+        </p:spPr>
+      </p:pic>
+      <p:pic>
+        <p:nvPicPr>
+          <p:cNvPr id="5" name="Picture 4" descr="delta1_vs_alpha.png"/>
+          <p:cNvPicPr>
+            <a:picLocks noChangeAspect="1"/>
+          </p:cNvPicPr>
+          <p:nvPr/>
+        </p:nvPicPr>
+        <p:blipFill>
+          <a:blip r:embed="rId3"/>
+          <a:stretch>
+            <a:fillRect/>
+          </a:stretch>
+        </p:blipFill>
+        <p:spPr>
+          <a:xfrm>
+            <a:off x="6309360" y="1280160"/>
+            <a:ext cx="5669280" cy="3779520"/>
+          </a:xfrm>
+          <a:prstGeom prst="rect">
+            <a:avLst/>
+          </a:prstGeom>
+        </p:spPr>
+      </p:pic>
+      <p:sp>
+        <p:nvSpPr>
+          <p:cNvPr id="6" name="TextBox 5"/>
+          <p:cNvSpPr txBox="1"/>
+          <p:nvPr/>
+        </p:nvSpPr>
+        <p:spPr>
+          <a:xfrm>
+            <a:off x="457200" y="5303520"/>
+            <a:ext cx="5669280" cy="365760"/>
+          </a:xfrm>
+          <a:prstGeom prst="rect">
+            <a:avLst/>
+          </a:prstGeom>
+          <a:noFill/>
+        </p:spPr>
+        <p:txBody>
+          <a:bodyPr wrap="none">
+            <a:spAutoFit/>
+          </a:bodyPr>
+          <a:lstStyle/>
+          <a:p>
+            <a:pPr algn="ctr">
+              <a:defRPr sz="1100">
+                <a:solidFill>
+                  <a:srgbClr val="645A54"/>
+                </a:solidFill>
+              </a:defRPr>
+            </a:pPr>
+            <a:r>
+              <a:t>AbsRel vs α (↓ lower better)</a:t>
+            </a:r>
+          </a:p>
+        </p:txBody>
+      </p:sp>
+      <p:sp>
+        <p:nvSpPr>
+          <p:cNvPr id="7" name="TextBox 6"/>
+          <p:cNvSpPr txBox="1"/>
+          <p:nvPr/>
+        </p:nvSpPr>
+        <p:spPr>
+          <a:xfrm>
+            <a:off x="6309360" y="5303520"/>
+            <a:ext cx="5669280" cy="365760"/>
+          </a:xfrm>
+          <a:prstGeom prst="rect">
+            <a:avLst/>
+          </a:prstGeom>
+          <a:noFill/>
+        </p:spPr>
+        <p:txBody>
+          <a:bodyPr wrap="none">
+            <a:spAutoFit/>
+          </a:bodyPr>
+          <a:lstStyle/>
+          <a:p>
+            <a:pPr algn="ctr">
+              <a:defRPr sz="1100">
+                <a:solidFill>
+                  <a:srgbClr val="645A54"/>
+                </a:solidFill>
+              </a:defRPr>
+            </a:pPr>
+            <a:r>
+              <a:t>δ_1 vs α (↑ higher better)</a:t>
+            </a:r>
+          </a:p>
+        </p:txBody>
+      </p:sp>
+      <p:sp>
+        <p:nvSpPr>
+          <p:cNvPr id="8" name="TextBox 7"/>
+          <p:cNvSpPr txBox="1"/>
+          <p:nvPr/>
+        </p:nvSpPr>
+        <p:spPr>
+          <a:xfrm>
+            <a:off x="822960" y="5760720"/>
+            <a:ext cx="10515600" cy="1005840"/>
+          </a:xfrm>
+          <a:prstGeom prst="rect">
+            <a:avLst/>
+          </a:prstGeom>
+          <a:noFill/>
+        </p:spPr>
+        <p:txBody>
+          <a:bodyPr wrap="square">
+            <a:spAutoFit/>
+          </a:bodyPr>
+          <a:lstStyle/>
+          <a:p>
+            <a:pPr>
+              <a:spcAft>
+                <a:spcPts val="600"/>
+              </a:spcAft>
+              <a:defRPr sz="1500">
+                <a:solidFill>
+                  <a:srgbClr val="1F1A17"/>
+                </a:solidFill>
+              </a:defRPr>
+            </a:pPr>
+            <a:r>
+              <a:t>• Sweep range: α ∈ {0.0, 0.3, 0.5, 0.7, 1.0}</a:t>
+            </a:r>
+          </a:p>
+          <a:p>
+            <a:pPr>
+              <a:spcAft>
+                <a:spcPts val="600"/>
+              </a:spcAft>
+              <a:defRPr sz="1500">
+                <a:solidFill>
+                  <a:srgbClr val="1F1A17"/>
+                </a:solidFill>
+              </a:defRPr>
+            </a:pPr>
+            <a:r>
+              <a:t>• Best within sweep: α=0.7  →  AbsRel 0.202, δ_1 0.722</a:t>
+            </a:r>
+          </a:p>
+          <a:p>
+            <a:pPr>
+              <a:spcAft>
+                <a:spcPts val="600"/>
+              </a:spcAft>
+              <a:defRPr sz="1500">
+                <a:solidFill>
+                  <a:srgbClr val="1F1A17"/>
+                </a:solidFill>
+              </a:defRPr>
+            </a:pPr>
+            <a:r>
+              <a:t>• Every point still WORSE than zero-shot (AbsRel 0.155) at this learning rate</a:t>
+            </a:r>
+          </a:p>
+        </p:txBody>
+      </p:sp>
+    </p:spTree>
+  </p:cSld>
+  <p:clrMapOvr>
+    <a:masterClrMapping/>
+  </p:clrMapOvr>
+</p:sld>
+</file>
+
+<file path=ppt/slides/slide13.xml><?xml version="1.0" encoding="utf-8"?>
+<p:sld xmlns:a="http://schemas.openxmlformats.org/drawingml/2006/main" xmlns:p="http://schemas.openxmlformats.org/presentationml/2006/main" xmlns:r="http://schemas.openxmlformats.org/officeDocument/2006/relationships">
+  <p:cSld>
+    <p:bg>
+      <p:bgPr>
+        <a:solidFill>
+          <a:srgbClr val="F7F0E5"/>
+        </a:solidFill>
+        <a:effectLst/>
+      </p:bgPr>
+    </p:bg>
+    <p:spTree>
+      <p:nvGrpSpPr>
+        <p:cNvPr id="1" name=""/>
+        <p:cNvGrpSpPr/>
+        <p:nvPr/>
+      </p:nvGrpSpPr>
+      <p:grpSpPr/>
+      <p:sp>
+        <p:nvSpPr>
+          <p:cNvPr id="2" name="TextBox 1"/>
+          <p:cNvSpPr txBox="1"/>
+          <p:nvPr/>
+        </p:nvSpPr>
+        <p:spPr>
+          <a:xfrm>
+            <a:off x="502920" y="0"/>
+            <a:ext cx="11155680" cy="320040"/>
+          </a:xfrm>
+          <a:prstGeom prst="rect">
+            <a:avLst/>
+          </a:prstGeom>
+          <a:noFill/>
+        </p:spPr>
+        <p:txBody>
+          <a:bodyPr wrap="none">
+            <a:spAutoFit/>
+          </a:bodyPr>
+          <a:lstStyle/>
+          <a:p>
+            <a:pPr>
+              <a:defRPr sz="1100" b="1">
+                <a:solidFill>
+                  <a:srgbClr val="A84425"/>
+                </a:solidFill>
+              </a:defRPr>
+            </a:pPr>
+            <a:r>
+              <a:t>ABLATION</a:t>
+            </a:r>
+          </a:p>
+        </p:txBody>
+      </p:sp>
+      <p:sp>
+        <p:nvSpPr>
+          <p:cNvPr id="3" name="TextBox 2"/>
+          <p:cNvSpPr txBox="1"/>
+          <p:nvPr/>
+        </p:nvSpPr>
+        <p:spPr>
+          <a:xfrm>
+            <a:off x="502920" y="274320"/>
+            <a:ext cx="11155680" cy="914400"/>
+          </a:xfrm>
+          <a:prstGeom prst="rect">
+            <a:avLst/>
+          </a:prstGeom>
+          <a:noFill/>
+        </p:spPr>
+        <p:txBody>
+          <a:bodyPr wrap="square">
+            <a:spAutoFit/>
+          </a:bodyPr>
+          <a:lstStyle/>
+          <a:p>
+            <a:r>
+              <a:rPr sz="3000" b="1">
+                <a:solidFill>
+                  <a:srgbClr val="1F1A17"/>
+                </a:solidFill>
+              </a:rPr>
+              <a:t>Learning Rate Sweep</a:t>
+            </a:r>
+          </a:p>
+          <a:p>
+            <a:r>
+              <a:rPr sz="1400">
+                <a:solidFill>
+                  <a:srgbClr val="645A54"/>
+                </a:solidFill>
+              </a:rPr>
+              <a:t>α=0.7, β=0.1 fixed   —   the dominant hyperparameter</a:t>
+            </a:r>
+          </a:p>
+        </p:txBody>
+      </p:sp>
+      <p:pic>
+        <p:nvPicPr>
+          <p:cNvPr id="4" name="Picture 3" descr="abs_rel_vs_learning_rate.png"/>
+          <p:cNvPicPr>
+            <a:picLocks noChangeAspect="1"/>
+          </p:cNvPicPr>
+          <p:nvPr/>
+        </p:nvPicPr>
+        <p:blipFill>
+          <a:blip r:embed="rId2"/>
+          <a:stretch>
+            <a:fillRect/>
+          </a:stretch>
+        </p:blipFill>
+        <p:spPr>
+          <a:xfrm>
+            <a:off x="457200" y="1280160"/>
+            <a:ext cx="5669280" cy="3779520"/>
+          </a:xfrm>
+          <a:prstGeom prst="rect">
+            <a:avLst/>
+          </a:prstGeom>
+        </p:spPr>
+      </p:pic>
+      <p:pic>
+        <p:nvPicPr>
+          <p:cNvPr id="5" name="Picture 4" descr="delta1_vs_learning_rate.png"/>
+          <p:cNvPicPr>
+            <a:picLocks noChangeAspect="1"/>
+          </p:cNvPicPr>
+          <p:nvPr/>
+        </p:nvPicPr>
+        <p:blipFill>
+          <a:blip r:embed="rId3"/>
+          <a:stretch>
+            <a:fillRect/>
+          </a:stretch>
+        </p:blipFill>
+        <p:spPr>
+          <a:xfrm>
+            <a:off x="6309360" y="1280160"/>
+            <a:ext cx="5669280" cy="3779520"/>
+          </a:xfrm>
+          <a:prstGeom prst="rect">
+            <a:avLst/>
+          </a:prstGeom>
+        </p:spPr>
+      </p:pic>
+      <p:sp>
+        <p:nvSpPr>
+          <p:cNvPr id="6" name="TextBox 5"/>
+          <p:cNvSpPr txBox="1"/>
+          <p:nvPr/>
+        </p:nvSpPr>
+        <p:spPr>
+          <a:xfrm>
+            <a:off x="457200" y="5303520"/>
+            <a:ext cx="5669280" cy="365760"/>
+          </a:xfrm>
+          <a:prstGeom prst="rect">
+            <a:avLst/>
+          </a:prstGeom>
+          <a:noFill/>
+        </p:spPr>
+        <p:txBody>
+          <a:bodyPr wrap="none">
+            <a:spAutoFit/>
+          </a:bodyPr>
+          <a:lstStyle/>
+          <a:p>
+            <a:pPr algn="ctr">
+              <a:defRPr sz="1100">
+                <a:solidFill>
+                  <a:srgbClr val="645A54"/>
+                </a:solidFill>
+              </a:defRPr>
+            </a:pPr>
+            <a:r>
+              <a:t>AbsRel vs learning rate</a:t>
+            </a:r>
+          </a:p>
+        </p:txBody>
+      </p:sp>
+      <p:sp>
+        <p:nvSpPr>
+          <p:cNvPr id="7" name="TextBox 6"/>
+          <p:cNvSpPr txBox="1"/>
+          <p:nvPr/>
+        </p:nvSpPr>
+        <p:spPr>
+          <a:xfrm>
+            <a:off x="6309360" y="5303520"/>
+            <a:ext cx="5669280" cy="365760"/>
+          </a:xfrm>
+          <a:prstGeom prst="rect">
+            <a:avLst/>
+          </a:prstGeom>
+          <a:noFill/>
+        </p:spPr>
+        <p:txBody>
+          <a:bodyPr wrap="none">
+            <a:spAutoFit/>
+          </a:bodyPr>
+          <a:lstStyle/>
+          <a:p>
+            <a:pPr algn="ctr">
+              <a:defRPr sz="1100">
+                <a:solidFill>
+                  <a:srgbClr val="645A54"/>
+                </a:solidFill>
+              </a:defRPr>
+            </a:pPr>
+            <a:r>
+              <a:t>δ_1 vs learning rate</a:t>
+            </a:r>
+          </a:p>
+        </p:txBody>
+      </p:sp>
+      <p:sp>
+        <p:nvSpPr>
+          <p:cNvPr id="8" name="TextBox 7"/>
+          <p:cNvSpPr txBox="1"/>
+          <p:nvPr/>
+        </p:nvSpPr>
+        <p:spPr>
+          <a:xfrm>
+            <a:off x="822960" y="5760720"/>
+            <a:ext cx="10515600" cy="1005840"/>
+          </a:xfrm>
+          <a:prstGeom prst="rect">
+            <a:avLst/>
+          </a:prstGeom>
+          <a:noFill/>
+        </p:spPr>
+        <p:txBody>
+          <a:bodyPr wrap="square">
+            <a:spAutoFit/>
+          </a:bodyPr>
+          <a:lstStyle/>
+          <a:p>
+            <a:pPr>
+              <a:spcAft>
+                <a:spcPts val="600"/>
+              </a:spcAft>
+              <a:defRPr sz="1500">
+                <a:solidFill>
+                  <a:srgbClr val="1F1A17"/>
+                </a:solidFill>
+              </a:defRPr>
+            </a:pPr>
+            <a:r>
+              <a:t>• lr=1e-7 → AbsRel 0.151    lr=1e-6 → 0.151    lr=5e-6 → 0.174    lr=1e-5 → 0.186</a:t>
+            </a:r>
+          </a:p>
+          <a:p>
+            <a:pPr>
+              <a:spcAft>
+                <a:spcPts val="600"/>
+              </a:spcAft>
+              <a:defRPr sz="1500">
+                <a:solidFill>
+                  <a:srgbClr val="1F1A17"/>
+                </a:solidFill>
+              </a:defRPr>
+            </a:pPr>
+            <a:r>
+              <a:t>• Sharp transition between 1e-6 and 5e-6 — below = stable, above = drift</a:t>
+            </a:r>
+          </a:p>
+          <a:p>
+            <a:pPr>
+              <a:spcAft>
+                <a:spcPts val="600"/>
+              </a:spcAft>
+              <a:defRPr sz="1500">
+                <a:solidFill>
+                  <a:srgbClr val="1F1A17"/>
+                </a:solidFill>
+              </a:defRPr>
+            </a:pPr>
+            <a:r>
+              <a:t>• Main paper finding: lr is the dominant lever, dominates α and β</a:t>
+            </a:r>
+          </a:p>
+        </p:txBody>
+      </p:sp>
+    </p:spTree>
+  </p:cSld>
+  <p:clrMapOvr>
+    <a:masterClrMapping/>
+  </p:clrMapOvr>
+</p:sld>
+</file>
+
+<file path=ppt/slides/slide14.xml><?xml version="1.0" encoding="utf-8"?>
+<p:sld xmlns:a="http://schemas.openxmlformats.org/drawingml/2006/main" xmlns:p="http://schemas.openxmlformats.org/presentationml/2006/main" xmlns:r="http://schemas.openxmlformats.org/officeDocument/2006/relationships">
+  <p:cSld>
+    <p:bg>
+      <p:bgPr>
+        <a:solidFill>
+          <a:srgbClr val="F7F0E5"/>
+        </a:solidFill>
+        <a:effectLst/>
+      </p:bgPr>
+    </p:bg>
+    <p:spTree>
+      <p:nvGrpSpPr>
+        <p:cNvPr id="1" name=""/>
+        <p:cNvGrpSpPr/>
+        <p:nvPr/>
+      </p:nvGrpSpPr>
+      <p:grpSpPr/>
+      <p:sp>
+        <p:nvSpPr>
+          <p:cNvPr id="2" name="TextBox 1"/>
+          <p:cNvSpPr txBox="1"/>
+          <p:nvPr/>
+        </p:nvSpPr>
+        <p:spPr>
+          <a:xfrm>
+            <a:off x="502920" y="0"/>
+            <a:ext cx="11155680" cy="320040"/>
+          </a:xfrm>
+          <a:prstGeom prst="rect">
+            <a:avLst/>
+          </a:prstGeom>
+          <a:noFill/>
+        </p:spPr>
+        <p:txBody>
+          <a:bodyPr wrap="none">
+            <a:spAutoFit/>
+          </a:bodyPr>
+          <a:lstStyle/>
+          <a:p>
+            <a:pPr>
+              <a:defRPr sz="1100" b="1">
+                <a:solidFill>
+                  <a:srgbClr val="A84425"/>
+                </a:solidFill>
+              </a:defRPr>
+            </a:pPr>
+            <a:r>
+              <a:t>ABLATION</a:t>
+            </a:r>
+          </a:p>
+        </p:txBody>
+      </p:sp>
+      <p:sp>
+        <p:nvSpPr>
+          <p:cNvPr id="3" name="TextBox 2"/>
+          <p:cNvSpPr txBox="1"/>
+          <p:nvPr/>
+        </p:nvSpPr>
+        <p:spPr>
+          <a:xfrm>
+            <a:off x="502920" y="274320"/>
+            <a:ext cx="11155680" cy="914400"/>
+          </a:xfrm>
+          <a:prstGeom prst="rect">
+            <a:avLst/>
+          </a:prstGeom>
+          <a:noFill/>
+        </p:spPr>
+        <p:txBody>
+          <a:bodyPr wrap="square">
+            <a:spAutoFit/>
+          </a:bodyPr>
+          <a:lstStyle/>
+          <a:p>
+            <a:r>
+              <a:rPr sz="3000" b="1">
+                <a:solidFill>
+                  <a:srgbClr val="1F1A17"/>
+                </a:solidFill>
+              </a:rPr>
+              <a:t>Gradient Weight β Sweep</a:t>
+            </a:r>
+          </a:p>
+          <a:p>
+            <a:r>
+              <a:rPr sz="1400">
+                <a:solidFill>
+                  <a:srgbClr val="645A54"/>
+                </a:solidFill>
+              </a:rPr>
+              <a:t>α=0.7, lr=1e-7 fixed   —   second-order effect</a:t>
+            </a:r>
+          </a:p>
+        </p:txBody>
+      </p:sp>
+      <p:pic>
+        <p:nvPicPr>
+          <p:cNvPr id="4" name="Picture 3" descr="abs_rel_vs_grad_weight.png"/>
+          <p:cNvPicPr>
+            <a:picLocks noChangeAspect="1"/>
+          </p:cNvPicPr>
+          <p:nvPr/>
+        </p:nvPicPr>
+        <p:blipFill>
+          <a:blip r:embed="rId2"/>
+          <a:stretch>
+            <a:fillRect/>
+          </a:stretch>
+        </p:blipFill>
+        <p:spPr>
+          <a:xfrm>
+            <a:off x="1371600" y="1280160"/>
+            <a:ext cx="9144000" cy="6096000"/>
+          </a:xfrm>
+          <a:prstGeom prst="rect">
+            <a:avLst/>
+          </a:prstGeom>
+        </p:spPr>
+      </p:pic>
+      <p:sp>
+        <p:nvSpPr>
+          <p:cNvPr id="5" name="TextBox 4"/>
+          <p:cNvSpPr txBox="1"/>
+          <p:nvPr/>
+        </p:nvSpPr>
+        <p:spPr>
+          <a:xfrm>
+            <a:off x="1371600" y="5303520"/>
+            <a:ext cx="9144000" cy="365760"/>
+          </a:xfrm>
+          <a:prstGeom prst="rect">
+            <a:avLst/>
+          </a:prstGeom>
+          <a:noFill/>
+        </p:spPr>
+        <p:txBody>
+          <a:bodyPr wrap="none">
+            <a:spAutoFit/>
+          </a:bodyPr>
+          <a:lstStyle/>
+          <a:p>
+            <a:pPr algn="ctr">
+              <a:defRPr sz="1100">
+                <a:solidFill>
+                  <a:srgbClr val="645A54"/>
+                </a:solidFill>
+              </a:defRPr>
+            </a:pPr>
+            <a:r>
+              <a:t>AbsRel vs β (↓ lower better)</a:t>
+            </a:r>
+          </a:p>
+        </p:txBody>
+      </p:sp>
+      <p:sp>
+        <p:nvSpPr>
+          <p:cNvPr id="6" name="TextBox 5"/>
+          <p:cNvSpPr txBox="1"/>
+          <p:nvPr/>
+        </p:nvSpPr>
+        <p:spPr>
+          <a:xfrm>
+            <a:off x="822960" y="5760720"/>
+            <a:ext cx="10515600" cy="1005840"/>
+          </a:xfrm>
+          <a:prstGeom prst="rect">
+            <a:avLst/>
+          </a:prstGeom>
+          <a:noFill/>
+        </p:spPr>
+        <p:txBody>
+          <a:bodyPr wrap="square">
+            <a:spAutoFit/>
+          </a:bodyPr>
+          <a:lstStyle/>
+          <a:p>
+            <a:pPr>
+              <a:spcAft>
+                <a:spcPts val="600"/>
+              </a:spcAft>
+              <a:defRPr sz="1500">
+                <a:solidFill>
+                  <a:srgbClr val="1F1A17"/>
+                </a:solidFill>
+              </a:defRPr>
+            </a:pPr>
+            <a:r>
+              <a:t>• β=0.0 → 0.152    β=0.1 → 0.152    β=0.3 → 0.150</a:t>
+            </a:r>
+          </a:p>
+          <a:p>
+            <a:pPr>
+              <a:spcAft>
+                <a:spcPts val="600"/>
+              </a:spcAft>
+              <a:defRPr sz="1500">
+                <a:solidFill>
+                  <a:srgbClr val="1F1A17"/>
+                </a:solidFill>
+              </a:defRPr>
+            </a:pPr>
+            <a:r>
+              <a:t>• Direction is correct but the effect is small once lr is stabilized</a:t>
+            </a:r>
+          </a:p>
+          <a:p>
+            <a:pPr>
+              <a:spcAft>
+                <a:spcPts val="600"/>
+              </a:spcAft>
+              <a:defRPr sz="1500">
+                <a:solidFill>
+                  <a:srgbClr val="1F1A17"/>
+                </a:solidFill>
+              </a:defRPr>
+            </a:pPr>
+            <a:r>
+              <a:t>• Gradient loss helps boundaries; quantitative impact is modest</a:t>
+            </a:r>
+          </a:p>
+        </p:txBody>
+      </p:sp>
+    </p:spTree>
+  </p:cSld>
+  <p:clrMapOvr>
+    <a:masterClrMapping/>
+  </p:clrMapOvr>
+</p:sld>
+</file>
+
+<file path=ppt/slides/slide15.xml><?xml version="1.0" encoding="utf-8"?>
+<p:sld xmlns:a="http://schemas.openxmlformats.org/drawingml/2006/main" xmlns:p="http://schemas.openxmlformats.org/presentationml/2006/main" xmlns:r="http://schemas.openxmlformats.org/officeDocument/2006/relationships">
+  <p:cSld>
+    <p:bg>
+      <p:bgPr>
+        <a:solidFill>
+          <a:srgbClr val="F7F0E5"/>
+        </a:solidFill>
+        <a:effectLst/>
+      </p:bgPr>
+    </p:bg>
+    <p:spTree>
+      <p:nvGrpSpPr>
+        <p:cNvPr id="1" name=""/>
+        <p:cNvGrpSpPr/>
+        <p:nvPr/>
+      </p:nvGrpSpPr>
+      <p:grpSpPr/>
+      <p:sp>
+        <p:nvSpPr>
+          <p:cNvPr id="2" name="TextBox 1"/>
+          <p:cNvSpPr txBox="1"/>
+          <p:nvPr/>
+        </p:nvSpPr>
+        <p:spPr>
+          <a:xfrm>
+            <a:off x="502920" y="0"/>
+            <a:ext cx="11155680" cy="320040"/>
+          </a:xfrm>
+          <a:prstGeom prst="rect">
+            <a:avLst/>
+          </a:prstGeom>
+          <a:noFill/>
+        </p:spPr>
+        <p:txBody>
+          <a:bodyPr wrap="none">
+            <a:spAutoFit/>
+          </a:bodyPr>
+          <a:lstStyle/>
+          <a:p>
+            <a:pPr>
+              <a:defRPr sz="1100" b="1">
+                <a:solidFill>
+                  <a:srgbClr val="A84425"/>
+                </a:solidFill>
+              </a:defRPr>
+            </a:pPr>
+            <a:r>
+              <a:t>RESULTS</a:t>
+            </a:r>
+          </a:p>
+        </p:txBody>
+      </p:sp>
+      <p:sp>
+        <p:nvSpPr>
+          <p:cNvPr id="3" name="TextBox 2"/>
+          <p:cNvSpPr txBox="1"/>
+          <p:nvPr/>
+        </p:nvSpPr>
+        <p:spPr>
+          <a:xfrm>
+            <a:off x="502920" y="274320"/>
+            <a:ext cx="11155680" cy="914400"/>
+          </a:xfrm>
+          <a:prstGeom prst="rect">
+            <a:avLst/>
+          </a:prstGeom>
+          <a:noFill/>
+        </p:spPr>
+        <p:txBody>
+          <a:bodyPr wrap="square">
+            <a:spAutoFit/>
+          </a:bodyPr>
+          <a:lstStyle/>
+          <a:p>
+            <a:r>
+              <a:rPr sz="3000" b="1">
+                <a:solidFill>
+                  <a:srgbClr val="1F1A17"/>
+                </a:solidFill>
+              </a:rPr>
+              <a:t>Qualitative Examples</a:t>
+            </a:r>
+          </a:p>
+          <a:p>
+            <a:r>
+              <a:rPr sz="1400">
+                <a:solidFill>
+                  <a:srgbClr val="645A54"/>
+                </a:solidFill>
+              </a:rPr>
+              <a:t>NYU-v2 — RGB | GT | Pred | Error</a:t>
+            </a:r>
+          </a:p>
+        </p:txBody>
+      </p:sp>
+      <p:pic>
+        <p:nvPicPr>
+          <p:cNvPr id="4" name="Picture 3" descr="compare_000000.png"/>
+          <p:cNvPicPr>
+            <a:picLocks noChangeAspect="1"/>
+          </p:cNvPicPr>
+          <p:nvPr/>
+        </p:nvPicPr>
+        <p:blipFill>
+          <a:blip r:embed="rId2"/>
+          <a:stretch>
+            <a:fillRect/>
+          </a:stretch>
+        </p:blipFill>
+        <p:spPr>
+          <a:xfrm>
+            <a:off x="365760" y="1280160"/>
+            <a:ext cx="5760720" cy="1440180"/>
+          </a:xfrm>
+          <a:prstGeom prst="rect">
+            <a:avLst/>
+          </a:prstGeom>
+        </p:spPr>
+      </p:pic>
+      <p:pic>
+        <p:nvPicPr>
+          <p:cNvPr id="5" name="Picture 4" descr="compare_000010.png"/>
+          <p:cNvPicPr>
+            <a:picLocks noChangeAspect="1"/>
+          </p:cNvPicPr>
+          <p:nvPr/>
+        </p:nvPicPr>
+        <p:blipFill>
+          <a:blip r:embed="rId3"/>
+          <a:stretch>
+            <a:fillRect/>
+          </a:stretch>
+        </p:blipFill>
+        <p:spPr>
+          <a:xfrm>
+            <a:off x="6217920" y="1280160"/>
+            <a:ext cx="5760720" cy="1440180"/>
+          </a:xfrm>
+          <a:prstGeom prst="rect">
+            <a:avLst/>
+          </a:prstGeom>
+        </p:spPr>
+      </p:pic>
+      <p:pic>
+        <p:nvPicPr>
+          <p:cNvPr id="6" name="Picture 5" descr="compare_000020.png"/>
+          <p:cNvPicPr>
+            <a:picLocks noChangeAspect="1"/>
+          </p:cNvPicPr>
+          <p:nvPr/>
+        </p:nvPicPr>
+        <p:blipFill>
+          <a:blip r:embed="rId4"/>
+          <a:stretch>
+            <a:fillRect/>
+          </a:stretch>
+        </p:blipFill>
+        <p:spPr>
+          <a:xfrm>
+            <a:off x="365760" y="3566160"/>
+            <a:ext cx="5760720" cy="1440180"/>
+          </a:xfrm>
+          <a:prstGeom prst="rect">
+            <a:avLst/>
+          </a:prstGeom>
+        </p:spPr>
+      </p:pic>
+      <p:pic>
+        <p:nvPicPr>
+          <p:cNvPr id="7" name="Picture 6" descr="compare_000030.png"/>
+          <p:cNvPicPr>
+            <a:picLocks noChangeAspect="1"/>
+          </p:cNvPicPr>
+          <p:nvPr/>
+        </p:nvPicPr>
+        <p:blipFill>
+          <a:blip r:embed="rId5"/>
+          <a:stretch>
+            <a:fillRect/>
+          </a:stretch>
+        </p:blipFill>
+        <p:spPr>
+          <a:xfrm>
+            <a:off x="6217920" y="3566160"/>
+            <a:ext cx="5760720" cy="1440180"/>
+          </a:xfrm>
+          <a:prstGeom prst="rect">
+            <a:avLst/>
+          </a:prstGeom>
+        </p:spPr>
+      </p:pic>
+      <p:sp>
+        <p:nvSpPr>
+          <p:cNvPr id="8" name="TextBox 7"/>
+          <p:cNvSpPr txBox="1"/>
+          <p:nvPr/>
+        </p:nvSpPr>
+        <p:spPr>
+          <a:xfrm>
+            <a:off x="365760" y="5852160"/>
+            <a:ext cx="5760720" cy="365760"/>
+          </a:xfrm>
+          <a:prstGeom prst="rect">
+            <a:avLst/>
+          </a:prstGeom>
+          <a:noFill/>
+        </p:spPr>
+        <p:txBody>
+          <a:bodyPr wrap="none">
+            <a:spAutoFit/>
+          </a:bodyPr>
+          <a:lstStyle/>
+          <a:p>
+            <a:pPr algn="ctr">
+              <a:defRPr sz="1100">
+                <a:solidFill>
+                  <a:srgbClr val="645A54"/>
+                </a:solidFill>
+              </a:defRPr>
+            </a:pPr>
+            <a:r>
+              <a:t>Sample 000 — office scene</a:t>
+            </a:r>
+          </a:p>
+        </p:txBody>
+      </p:sp>
+      <p:sp>
+        <p:nvSpPr>
+          <p:cNvPr id="9" name="TextBox 8"/>
+          <p:cNvSpPr txBox="1"/>
+          <p:nvPr/>
+        </p:nvSpPr>
+        <p:spPr>
+          <a:xfrm>
+            <a:off x="6217920" y="5852160"/>
+            <a:ext cx="5760720" cy="365760"/>
+          </a:xfrm>
+          <a:prstGeom prst="rect">
+            <a:avLst/>
+          </a:prstGeom>
+          <a:noFill/>
+        </p:spPr>
+        <p:txBody>
+          <a:bodyPr wrap="none">
+            <a:spAutoFit/>
+          </a:bodyPr>
+          <a:lstStyle/>
+          <a:p>
+            <a:pPr algn="ctr">
+              <a:defRPr sz="1100">
+                <a:solidFill>
+                  <a:srgbClr val="645A54"/>
+                </a:solidFill>
+              </a:defRPr>
+            </a:pPr>
+            <a:r>
+              <a:t>Sample 010 — kitchen counter</a:t>
+            </a:r>
+          </a:p>
+        </p:txBody>
+      </p:sp>
+      <p:sp>
+        <p:nvSpPr>
+          <p:cNvPr id="10" name="TextBox 9"/>
+          <p:cNvSpPr txBox="1"/>
+          <p:nvPr/>
+        </p:nvSpPr>
+        <p:spPr>
+          <a:xfrm>
+            <a:off x="822960" y="6263640"/>
+            <a:ext cx="10515600" cy="365760"/>
+          </a:xfrm>
+          <a:prstGeom prst="rect">
+            <a:avLst/>
+          </a:prstGeom>
+          <a:noFill/>
+        </p:spPr>
+        <p:txBody>
+          <a:bodyPr wrap="square">
+            <a:spAutoFit/>
+          </a:bodyPr>
+          <a:lstStyle/>
+          <a:p>
+            <a:pPr>
+              <a:spcAft>
+                <a:spcPts val="600"/>
+              </a:spcAft>
+              <a:defRPr sz="1400">
+                <a:solidFill>
+                  <a:srgbClr val="645A54"/>
+                </a:solidFill>
+              </a:defRPr>
+            </a:pPr>
+            <a:r>
+              <a:t>• Scene structure preserved; error concentrates at depth discontinuities</a:t>
+            </a:r>
+          </a:p>
+        </p:txBody>
+      </p:sp>
+    </p:spTree>
+  </p:cSld>
+  <p:clrMapOvr>
+    <a:masterClrMapping/>
+  </p:clrMapOvr>
+</p:sld>
+</file>
+
+<file path=ppt/slides/slide16.xml><?xml version="1.0" encoding="utf-8"?>
+<p:sld xmlns:a="http://schemas.openxmlformats.org/drawingml/2006/main" xmlns:p="http://schemas.openxmlformats.org/presentationml/2006/main" xmlns:r="http://schemas.openxmlformats.org/officeDocument/2006/relationships">
+  <p:cSld>
+    <p:bg>
+      <p:bgPr>
+        <a:solidFill>
+          <a:srgbClr val="F7F0E5"/>
+        </a:solidFill>
+        <a:effectLst/>
+      </p:bgPr>
+    </p:bg>
+    <p:spTree>
+      <p:nvGrpSpPr>
+        <p:cNvPr id="1" name=""/>
+        <p:cNvGrpSpPr/>
+        <p:nvPr/>
+      </p:nvGrpSpPr>
+      <p:grpSpPr/>
+      <p:sp>
+        <p:nvSpPr>
+          <p:cNvPr id="2" name="TextBox 1"/>
+          <p:cNvSpPr txBox="1"/>
+          <p:nvPr/>
+        </p:nvSpPr>
+        <p:spPr>
+          <a:xfrm>
+            <a:off x="502920" y="0"/>
+            <a:ext cx="11155680" cy="320040"/>
+          </a:xfrm>
+          <a:prstGeom prst="rect">
+            <a:avLst/>
+          </a:prstGeom>
+          <a:noFill/>
+        </p:spPr>
+        <p:txBody>
+          <a:bodyPr wrap="none">
+            <a:spAutoFit/>
+          </a:bodyPr>
+          <a:lstStyle/>
+          <a:p>
+            <a:pPr>
+              <a:defRPr sz="1100" b="1">
+                <a:solidFill>
+                  <a:srgbClr val="A84425"/>
+                </a:solidFill>
+              </a:defRPr>
+            </a:pPr>
+            <a:r>
+              <a:t>CROSS-DOMAIN</a:t>
+            </a:r>
+          </a:p>
+        </p:txBody>
+      </p:sp>
+      <p:sp>
+        <p:nvSpPr>
+          <p:cNvPr id="3" name="TextBox 2"/>
+          <p:cNvSpPr txBox="1"/>
+          <p:nvPr/>
+        </p:nvSpPr>
+        <p:spPr>
+          <a:xfrm>
+            <a:off x="502920" y="274320"/>
+            <a:ext cx="11155680" cy="914400"/>
+          </a:xfrm>
+          <a:prstGeom prst="rect">
+            <a:avLst/>
+          </a:prstGeom>
+          <a:noFill/>
+        </p:spPr>
+        <p:txBody>
+          <a:bodyPr wrap="square">
+            <a:spAutoFit/>
+          </a:bodyPr>
+          <a:lstStyle/>
+          <a:p>
+            <a:r>
+              <a:rPr sz="3000" b="1">
+                <a:solidFill>
+                  <a:srgbClr val="1F1A17"/>
+                </a:solidFill>
+              </a:rPr>
+              <a:t>KITTI Cross-Domain Evaluation</a:t>
+            </a:r>
+          </a:p>
+          <a:p>
+            <a:r>
+              <a:rPr sz="1400">
+                <a:solidFill>
+                  <a:srgbClr val="645A54"/>
+                </a:solidFill>
+              </a:rPr>
+              <a:t>100 outdoor frames — trained only on NYU-v2 indoor</a:t>
+            </a:r>
+          </a:p>
+        </p:txBody>
+      </p:sp>
+      <p:sp>
+        <p:nvSpPr>
+          <p:cNvPr id="4" name="Rectangle 3"/>
+          <p:cNvSpPr/>
+          <p:nvPr/>
+        </p:nvSpPr>
+        <p:spPr>
+          <a:xfrm>
+            <a:off x="731520" y="1280160"/>
+            <a:ext cx="2377440" cy="1143000"/>
+          </a:xfrm>
+          <a:prstGeom prst="rect">
+            <a:avLst/>
+          </a:prstGeom>
+          <a:solidFill>
+            <a:srgbClr val="FFFAF1"/>
+          </a:solidFill>
+          <a:ln>
+            <a:solidFill>
+              <a:srgbClr val="DCCDC0"/>
+            </a:solidFill>
+          </a:ln>
+        </p:spPr>
+        <p:style>
+          <a:lnRef idx="1">
+            <a:schemeClr val="accent1"/>
+          </a:lnRef>
+          <a:fillRef idx="3">
+            <a:schemeClr val="accent1"/>
+          </a:fillRef>
+          <a:effectRef idx="2">
+            <a:schemeClr val="accent1"/>
+          </a:effectRef>
+          <a:fontRef idx="minor">
+            <a:schemeClr val="lt1"/>
+          </a:fontRef>
+        </p:style>
+        <p:txBody>
+          <a:bodyPr rtlCol="0" anchor="ctr" wrap="square"/>
+          <a:lstStyle/>
+          <a:p>
+            <a:pPr algn="ctr">
+              <a:defRPr sz="1200">
+                <a:solidFill>
+                  <a:srgbClr val="645A54"/>
+                </a:solidFill>
+              </a:defRPr>
+            </a:pPr>
+            <a:r>
+              <a:t>Zero-shot AbsRel</a:t>
+            </a:r>
+          </a:p>
+          <a:p>
+            <a:pPr algn="ctr">
+              <a:defRPr sz="2600" b="1">
+                <a:solidFill>
+                  <a:srgbClr val="A84425"/>
+                </a:solidFill>
+              </a:defRPr>
+            </a:pPr>
+            <a:r>
+              <a:t>0.4022</a:t>
+            </a:r>
+          </a:p>
+        </p:txBody>
+      </p:sp>
+      <p:sp>
+        <p:nvSpPr>
+          <p:cNvPr id="5" name="Rectangle 4"/>
+          <p:cNvSpPr/>
+          <p:nvPr/>
+        </p:nvSpPr>
+        <p:spPr>
+          <a:xfrm>
+            <a:off x="3246120" y="1280160"/>
+            <a:ext cx="2377440" cy="1143000"/>
+          </a:xfrm>
+          <a:prstGeom prst="rect">
+            <a:avLst/>
+          </a:prstGeom>
+          <a:solidFill>
+            <a:srgbClr val="FFFAF1"/>
+          </a:solidFill>
+          <a:ln>
+            <a:solidFill>
+              <a:srgbClr val="DCCDC0"/>
+            </a:solidFill>
+          </a:ln>
+        </p:spPr>
+        <p:style>
+          <a:lnRef idx="1">
+            <a:schemeClr val="accent1"/>
+          </a:lnRef>
+          <a:fillRef idx="3">
+            <a:schemeClr val="accent1"/>
+          </a:fillRef>
+          <a:effectRef idx="2">
+            <a:schemeClr val="accent1"/>
+          </a:effectRef>
+          <a:fontRef idx="minor">
+            <a:schemeClr val="lt1"/>
+          </a:fontRef>
+        </p:style>
+        <p:txBody>
+          <a:bodyPr rtlCol="0" anchor="ctr" wrap="square"/>
+          <a:lstStyle/>
+          <a:p>
+            <a:pPr algn="ctr">
+              <a:defRPr sz="1200">
+                <a:solidFill>
+                  <a:srgbClr val="645A54"/>
+                </a:solidFill>
+              </a:defRPr>
+            </a:pPr>
+            <a:r>
+              <a:t>Distill AbsRel</a:t>
+            </a:r>
+          </a:p>
+          <a:p>
+            <a:pPr algn="ctr">
+              <a:defRPr sz="2600" b="1">
+                <a:solidFill>
+                  <a:srgbClr val="A84425"/>
+                </a:solidFill>
+              </a:defRPr>
+            </a:pPr>
+            <a:r>
+              <a:t>0.4035</a:t>
+            </a:r>
+          </a:p>
+        </p:txBody>
+      </p:sp>
+      <p:sp>
+        <p:nvSpPr>
+          <p:cNvPr id="6" name="Rectangle 5"/>
+          <p:cNvSpPr/>
+          <p:nvPr/>
+        </p:nvSpPr>
+        <p:spPr>
+          <a:xfrm>
+            <a:off x="5760720" y="1280160"/>
+            <a:ext cx="2377440" cy="1143000"/>
+          </a:xfrm>
+          <a:prstGeom prst="rect">
+            <a:avLst/>
+          </a:prstGeom>
+          <a:solidFill>
+            <a:srgbClr val="FFFAF1"/>
+          </a:solidFill>
+          <a:ln>
+            <a:solidFill>
+              <a:srgbClr val="DCCDC0"/>
+            </a:solidFill>
+          </a:ln>
+        </p:spPr>
+        <p:style>
+          <a:lnRef idx="1">
+            <a:schemeClr val="accent1"/>
+          </a:lnRef>
+          <a:fillRef idx="3">
+            <a:schemeClr val="accent1"/>
+          </a:fillRef>
+          <a:effectRef idx="2">
+            <a:schemeClr val="accent1"/>
+          </a:effectRef>
+          <a:fontRef idx="minor">
+            <a:schemeClr val="lt1"/>
+          </a:fontRef>
+        </p:style>
+        <p:txBody>
+          <a:bodyPr rtlCol="0" anchor="ctr" wrap="square"/>
+          <a:lstStyle/>
+          <a:p>
+            <a:pPr algn="ctr">
+              <a:defRPr sz="1200">
+                <a:solidFill>
+                  <a:srgbClr val="645A54"/>
+                </a:solidFill>
+              </a:defRPr>
+            </a:pPr>
+            <a:r>
+              <a:t>Zero-shot δ_1</a:t>
+            </a:r>
+          </a:p>
+          <a:p>
+            <a:pPr algn="ctr">
+              <a:defRPr sz="2600" b="1">
+                <a:solidFill>
+                  <a:srgbClr val="A84425"/>
+                </a:solidFill>
+              </a:defRPr>
+            </a:pPr>
+            <a:r>
+              <a:t>0.3555</a:t>
+            </a:r>
+          </a:p>
+        </p:txBody>
+      </p:sp>
+      <p:sp>
+        <p:nvSpPr>
+          <p:cNvPr id="7" name="Rectangle 6"/>
+          <p:cNvSpPr/>
+          <p:nvPr/>
+        </p:nvSpPr>
+        <p:spPr>
+          <a:xfrm>
+            <a:off x="8275320" y="1280160"/>
+            <a:ext cx="2377440" cy="1143000"/>
+          </a:xfrm>
+          <a:prstGeom prst="rect">
+            <a:avLst/>
+          </a:prstGeom>
+          <a:solidFill>
+            <a:srgbClr val="FFFAF1"/>
+          </a:solidFill>
+          <a:ln>
+            <a:solidFill>
+              <a:srgbClr val="DCCDC0"/>
+            </a:solidFill>
+          </a:ln>
+        </p:spPr>
+        <p:style>
+          <a:lnRef idx="1">
+            <a:schemeClr val="accent1"/>
+          </a:lnRef>
+          <a:fillRef idx="3">
+            <a:schemeClr val="accent1"/>
+          </a:fillRef>
+          <a:effectRef idx="2">
+            <a:schemeClr val="accent1"/>
+          </a:effectRef>
+          <a:fontRef idx="minor">
+            <a:schemeClr val="lt1"/>
+          </a:fontRef>
+        </p:style>
+        <p:txBody>
+          <a:bodyPr rtlCol="0" anchor="ctr" wrap="square"/>
+          <a:lstStyle/>
+          <a:p>
+            <a:pPr algn="ctr">
+              <a:defRPr sz="1200">
+                <a:solidFill>
+                  <a:srgbClr val="645A54"/>
+                </a:solidFill>
+              </a:defRPr>
+            </a:pPr>
+            <a:r>
+              <a:t>Distill δ_1</a:t>
+            </a:r>
+          </a:p>
+          <a:p>
+            <a:pPr algn="ctr">
+              <a:defRPr sz="2600" b="1">
+                <a:solidFill>
+                  <a:srgbClr val="A84425"/>
+                </a:solidFill>
+              </a:defRPr>
+            </a:pPr>
+            <a:r>
+              <a:t>0.3485</a:t>
+            </a:r>
+          </a:p>
+        </p:txBody>
+      </p:sp>
+      <p:pic>
+        <p:nvPicPr>
+          <p:cNvPr id="8" name="Picture 7" descr="kitti_input_0000000000.png"/>
+          <p:cNvPicPr>
+            <a:picLocks noChangeAspect="1"/>
+          </p:cNvPicPr>
+          <p:nvPr/>
+        </p:nvPicPr>
+        <p:blipFill>
+          <a:blip r:embed="rId2"/>
+          <a:stretch>
+            <a:fillRect/>
+          </a:stretch>
+        </p:blipFill>
+        <p:spPr>
+          <a:xfrm>
+            <a:off x="1463040" y="2926080"/>
+            <a:ext cx="4114800" cy="1242391"/>
+          </a:xfrm>
+          <a:prstGeom prst="rect">
+            <a:avLst/>
+          </a:prstGeom>
+        </p:spPr>
+      </p:pic>
+      <p:pic>
+        <p:nvPicPr>
+          <p:cNvPr id="9" name="Picture 8" descr="kitti_depth_0000000000.png"/>
+          <p:cNvPicPr>
+            <a:picLocks noChangeAspect="1"/>
+          </p:cNvPicPr>
+          <p:nvPr/>
+        </p:nvPicPr>
+        <p:blipFill>
+          <a:blip r:embed="rId3"/>
+          <a:stretch>
+            <a:fillRect/>
+          </a:stretch>
+        </p:blipFill>
+        <p:spPr>
+          <a:xfrm>
+            <a:off x="6583680" y="2926080"/>
+            <a:ext cx="4114800" cy="1242391"/>
+          </a:xfrm>
+          <a:prstGeom prst="rect">
+            <a:avLst/>
+          </a:prstGeom>
+        </p:spPr>
+      </p:pic>
+      <p:sp>
+        <p:nvSpPr>
+          <p:cNvPr id="10" name="TextBox 9"/>
+          <p:cNvSpPr txBox="1"/>
+          <p:nvPr/>
+        </p:nvSpPr>
+        <p:spPr>
+          <a:xfrm>
+            <a:off x="1463040" y="5852160"/>
+            <a:ext cx="4114800" cy="365760"/>
+          </a:xfrm>
+          <a:prstGeom prst="rect">
+            <a:avLst/>
+          </a:prstGeom>
+          <a:noFill/>
+        </p:spPr>
+        <p:txBody>
+          <a:bodyPr wrap="none">
+            <a:spAutoFit/>
+          </a:bodyPr>
+          <a:lstStyle/>
+          <a:p>
+            <a:pPr algn="ctr">
+              <a:defRPr sz="1100">
+                <a:solidFill>
+                  <a:srgbClr val="645A54"/>
+                </a:solidFill>
+              </a:defRPr>
+            </a:pPr>
+            <a:r>
+              <a:t>KITTI RGB</a:t>
+            </a:r>
+          </a:p>
+        </p:txBody>
+      </p:sp>
+      <p:sp>
+        <p:nvSpPr>
+          <p:cNvPr id="11" name="TextBox 10"/>
+          <p:cNvSpPr txBox="1"/>
+          <p:nvPr/>
+        </p:nvSpPr>
+        <p:spPr>
+          <a:xfrm>
+            <a:off x="6583680" y="5852160"/>
+            <a:ext cx="4114800" cy="365760"/>
+          </a:xfrm>
+          <a:prstGeom prst="rect">
+            <a:avLst/>
+          </a:prstGeom>
+          <a:noFill/>
+        </p:spPr>
+        <p:txBody>
+          <a:bodyPr wrap="none">
+            <a:spAutoFit/>
+          </a:bodyPr>
+          <a:lstStyle/>
+          <a:p>
+            <a:pPr algn="ctr">
+              <a:defRPr sz="1100">
+                <a:solidFill>
+                  <a:srgbClr val="645A54"/>
+                </a:solidFill>
+              </a:defRPr>
+            </a:pPr>
+            <a:r>
+              <a:t>Predicted depth</a:t>
+            </a:r>
+          </a:p>
+        </p:txBody>
+      </p:sp>
+      <p:sp>
+        <p:nvSpPr>
+          <p:cNvPr id="12" name="TextBox 11"/>
+          <p:cNvSpPr txBox="1"/>
+          <p:nvPr/>
+        </p:nvSpPr>
+        <p:spPr>
+          <a:xfrm>
+            <a:off x="822960" y="6263640"/>
+            <a:ext cx="10515600" cy="457200"/>
+          </a:xfrm>
+          <a:prstGeom prst="rect">
+            <a:avLst/>
+          </a:prstGeom>
+          <a:noFill/>
+        </p:spPr>
+        <p:txBody>
+          <a:bodyPr wrap="square">
+            <a:spAutoFit/>
+          </a:bodyPr>
+          <a:lstStyle/>
+          <a:p>
+            <a:pPr>
+              <a:spcAft>
+                <a:spcPts val="600"/>
+              </a:spcAft>
+              <a:defRPr sz="1300">
+                <a:solidFill>
+                  <a:srgbClr val="645A54"/>
+                </a:solidFill>
+              </a:defRPr>
+            </a:pPr>
+            <a:r>
+              <a:t>• NYU-v2 improvement does NOT transfer to KITTI — essentially identical numbers</a:t>
+            </a:r>
+          </a:p>
+          <a:p>
+            <a:pPr>
+              <a:spcAft>
+                <a:spcPts val="600"/>
+              </a:spcAft>
+              <a:defRPr sz="1300">
+                <a:solidFill>
+                  <a:srgbClr val="645A54"/>
+                </a:solidFill>
+              </a:defRPr>
+            </a:pPr>
+            <a:r>
+              <a:t>• Consequence of extreme-conservative recipe: encoder barely moves from pretrained init</a:t>
+            </a:r>
+          </a:p>
+        </p:txBody>
+      </p:sp>
+    </p:spTree>
+  </p:cSld>
+  <p:clrMapOvr>
+    <a:masterClrMapping/>
+  </p:clrMapOvr>
+</p:sld>
+</file>
+
+<file path=ppt/slides/slide17.xml><?xml version="1.0" encoding="utf-8"?>
+<p:sld xmlns:a="http://schemas.openxmlformats.org/drawingml/2006/main" xmlns:p="http://schemas.openxmlformats.org/presentationml/2006/main" xmlns:r="http://schemas.openxmlformats.org/officeDocument/2006/relationships">
+  <p:cSld>
+    <p:bg>
+      <p:bgPr>
+        <a:solidFill>
+          <a:srgbClr val="F7F0E5"/>
+        </a:solidFill>
+        <a:effectLst/>
+      </p:bgPr>
+    </p:bg>
+    <p:spTree>
+      <p:nvGrpSpPr>
+        <p:cNvPr id="1" name=""/>
+        <p:cNvGrpSpPr/>
+        <p:nvPr/>
+      </p:nvGrpSpPr>
+      <p:grpSpPr/>
+      <p:sp>
+        <p:nvSpPr>
+          <p:cNvPr id="2" name="TextBox 1"/>
+          <p:cNvSpPr txBox="1"/>
+          <p:nvPr/>
+        </p:nvSpPr>
+        <p:spPr>
+          <a:xfrm>
+            <a:off x="502920" y="0"/>
+            <a:ext cx="11155680" cy="320040"/>
+          </a:xfrm>
+          <a:prstGeom prst="rect">
+            <a:avLst/>
+          </a:prstGeom>
+          <a:noFill/>
+        </p:spPr>
+        <p:txBody>
+          <a:bodyPr wrap="none">
+            <a:spAutoFit/>
+          </a:bodyPr>
+          <a:lstStyle/>
+          <a:p>
+            <a:pPr>
+              <a:defRPr sz="1100" b="1">
+                <a:solidFill>
+                  <a:srgbClr val="A84425"/>
+                </a:solidFill>
+              </a:defRPr>
+            </a:pPr>
+            <a:r>
+              <a:t>DISCUSSION</a:t>
+            </a:r>
+          </a:p>
+        </p:txBody>
+      </p:sp>
+      <p:sp>
+        <p:nvSpPr>
+          <p:cNvPr id="3" name="TextBox 2"/>
+          <p:cNvSpPr txBox="1"/>
+          <p:nvPr/>
+        </p:nvSpPr>
+        <p:spPr>
+          <a:xfrm>
+            <a:off x="502920" y="274320"/>
+            <a:ext cx="11155680" cy="914400"/>
+          </a:xfrm>
+          <a:prstGeom prst="rect">
+            <a:avLst/>
+          </a:prstGeom>
+          <a:noFill/>
+        </p:spPr>
+        <p:txBody>
+          <a:bodyPr wrap="square">
+            <a:spAutoFit/>
+          </a:bodyPr>
+          <a:lstStyle/>
+          <a:p>
+            <a:r>
+              <a:rPr sz="3000" b="1">
+                <a:solidFill>
+                  <a:srgbClr val="1F1A17"/>
+                </a:solidFill>
+              </a:rPr>
+              <a:t>Discussion</a:t>
+            </a:r>
+          </a:p>
+        </p:txBody>
+      </p:sp>
+      <p:sp>
+        <p:nvSpPr>
+          <p:cNvPr id="4" name="TextBox 3"/>
+          <p:cNvSpPr txBox="1"/>
+          <p:nvPr/>
+        </p:nvSpPr>
+        <p:spPr>
+          <a:xfrm>
+            <a:off x="822960" y="1371600"/>
+            <a:ext cx="10515600" cy="3200400"/>
+          </a:xfrm>
+          <a:prstGeom prst="rect">
+            <a:avLst/>
+          </a:prstGeom>
+          <a:noFill/>
+        </p:spPr>
+        <p:txBody>
+          <a:bodyPr wrap="square">
+            <a:spAutoFit/>
+          </a:bodyPr>
+          <a:lstStyle/>
+          <a:p>
+            <a:pPr>
+              <a:spcAft>
+                <a:spcPts val="600"/>
+              </a:spcAft>
+              <a:defRPr sz="1800">
+                <a:solidFill>
+                  <a:srgbClr val="1F1A17"/>
+                </a:solidFill>
+              </a:defRPr>
+            </a:pPr>
+            <a:r>
+              <a:t>• The dominant variable is the learning rate, not the loss balance</a:t>
+            </a:r>
+          </a:p>
+          <a:p>
+            <a:pPr>
+              <a:spcAft>
+                <a:spcPts val="600"/>
+              </a:spcAft>
+              <a:defRPr sz="1800">
+                <a:solidFill>
+                  <a:srgbClr val="1F1A17"/>
+                </a:solidFill>
+              </a:defRPr>
+            </a:pPr>
+            <a:r>
+              <a:t>• Variance from α sweep: 0.09 AbsRel  vs  variance from lr sweep: 0.03 AbsRel</a:t>
+            </a:r>
+          </a:p>
+          <a:p>
+            <a:pPr>
+              <a:spcAft>
+                <a:spcPts val="600"/>
+              </a:spcAft>
+              <a:defRPr sz="1800">
+                <a:solidFill>
+                  <a:srgbClr val="1F1A17"/>
+                </a:solidFill>
+              </a:defRPr>
+            </a:pPr>
+            <a:r>
+              <a:t>• But the lr range covers the difference between 'worse than ZS' and 'better than ZS'</a:t>
+            </a:r>
+          </a:p>
+          <a:p>
+            <a:pPr>
+              <a:spcAft>
+                <a:spcPts val="600"/>
+              </a:spcAft>
+              <a:defRPr sz="1800">
+                <a:solidFill>
+                  <a:srgbClr val="1F1A17"/>
+                </a:solidFill>
+              </a:defRPr>
+            </a:pPr>
+            <a:r>
+              <a:t>• Improvement is small because lr=1e-7 keeps the encoder near initialization</a:t>
+            </a:r>
+          </a:p>
+          <a:p>
+            <a:pPr>
+              <a:spcAft>
+                <a:spcPts val="600"/>
+              </a:spcAft>
+              <a:defRPr sz="1800">
+                <a:solidFill>
+                  <a:srgbClr val="1F1A17"/>
+                </a:solidFill>
+              </a:defRPr>
+            </a:pPr>
+            <a:r>
+              <a:t>• What would unlock more: larger effective batch, cross-context distillation (He 2025), more data</a:t>
+            </a:r>
+          </a:p>
+        </p:txBody>
+      </p:sp>
+      <p:sp>
+        <p:nvSpPr>
+          <p:cNvPr id="5" name="TextBox 4"/>
+          <p:cNvSpPr txBox="1"/>
+          <p:nvPr/>
+        </p:nvSpPr>
+        <p:spPr>
+          <a:xfrm>
+            <a:off x="822960" y="4754880"/>
+            <a:ext cx="10515600" cy="1828800"/>
+          </a:xfrm>
+          <a:prstGeom prst="rect">
+            <a:avLst/>
+          </a:prstGeom>
+          <a:noFill/>
+        </p:spPr>
+        <p:txBody>
+          <a:bodyPr wrap="square">
+            <a:spAutoFit/>
+          </a:bodyPr>
+          <a:lstStyle/>
+          <a:p>
+            <a:pPr>
+              <a:spcAft>
+                <a:spcPts val="600"/>
+              </a:spcAft>
+              <a:defRPr sz="1500">
+                <a:solidFill>
+                  <a:srgbClr val="645A54"/>
+                </a:solidFill>
+              </a:defRPr>
+            </a:pPr>
+            <a:r>
+              <a:t>• Limitations:</a:t>
+            </a:r>
+          </a:p>
+          <a:p>
+            <a:pPr>
+              <a:spcAft>
+                <a:spcPts val="600"/>
+              </a:spcAft>
+              <a:defRPr sz="1500">
+                <a:solidFill>
+                  <a:srgbClr val="645A54"/>
+                </a:solidFill>
+              </a:defRPr>
+            </a:pPr>
+            <a:r>
+              <a:t>• Evaluation at 256×256 inflates absolute KITTI numbers vs leaderboards</a:t>
+            </a:r>
+          </a:p>
+          <a:p>
+            <a:pPr>
+              <a:spcAft>
+                <a:spcPts val="600"/>
+              </a:spcAft>
+              <a:defRPr sz="1500">
+                <a:solidFill>
+                  <a:srgbClr val="645A54"/>
+                </a:solidFill>
+              </a:defRPr>
+            </a:pPr>
+            <a:r>
+              <a:t>• Cross-domain test is a single OOD distribution</a:t>
+            </a:r>
+          </a:p>
+          <a:p>
+            <a:pPr>
+              <a:spcAft>
+                <a:spcPts val="600"/>
+              </a:spcAft>
+              <a:defRPr sz="1500">
+                <a:solidFill>
+                  <a:srgbClr val="645A54"/>
+                </a:solidFill>
+              </a:defRPr>
+            </a:pPr>
+            <a:r>
+              <a:t>• Single GPU, single seed per grid point; no variance estimate</a:t>
+            </a:r>
+          </a:p>
+        </p:txBody>
+      </p:sp>
+    </p:spTree>
+  </p:cSld>
+  <p:clrMapOvr>
+    <a:masterClrMapping/>
+  </p:clrMapOvr>
+</p:sld>
+</file>
+
+<file path=ppt/slides/slide18.xml><?xml version="1.0" encoding="utf-8"?>
+<p:sld xmlns:a="http://schemas.openxmlformats.org/drawingml/2006/main" xmlns:p="http://schemas.openxmlformats.org/presentationml/2006/main" xmlns:r="http://schemas.openxmlformats.org/officeDocument/2006/relationships">
+  <p:cSld>
+    <p:bg>
+      <p:bgPr>
+        <a:solidFill>
+          <a:srgbClr val="F7F0E5"/>
+        </a:solidFill>
+        <a:effectLst/>
+      </p:bgPr>
+    </p:bg>
+    <p:spTree>
+      <p:nvGrpSpPr>
+        <p:cNvPr id="1" name=""/>
+        <p:cNvGrpSpPr/>
+        <p:nvPr/>
+      </p:nvGrpSpPr>
+      <p:grpSpPr/>
+      <p:sp>
+        <p:nvSpPr>
+          <p:cNvPr id="2" name="TextBox 1"/>
+          <p:cNvSpPr txBox="1"/>
+          <p:nvPr/>
+        </p:nvSpPr>
+        <p:spPr>
+          <a:xfrm>
+            <a:off x="502920" y="0"/>
+            <a:ext cx="11155680" cy="320040"/>
+          </a:xfrm>
+          <a:prstGeom prst="rect">
+            <a:avLst/>
+          </a:prstGeom>
+          <a:noFill/>
+        </p:spPr>
+        <p:txBody>
+          <a:bodyPr wrap="none">
+            <a:spAutoFit/>
+          </a:bodyPr>
+          <a:lstStyle/>
+          <a:p>
+            <a:pPr>
+              <a:defRPr sz="1100" b="1">
+                <a:solidFill>
+                  <a:srgbClr val="A84425"/>
+                </a:solidFill>
+              </a:defRPr>
+            </a:pPr>
+            <a:r>
+              <a:t>CONCLUSION</a:t>
+            </a:r>
+          </a:p>
+        </p:txBody>
+      </p:sp>
+      <p:sp>
+        <p:nvSpPr>
+          <p:cNvPr id="3" name="TextBox 2"/>
+          <p:cNvSpPr txBox="1"/>
+          <p:nvPr/>
+        </p:nvSpPr>
+        <p:spPr>
+          <a:xfrm>
+            <a:off x="502920" y="274320"/>
+            <a:ext cx="11155680" cy="914400"/>
+          </a:xfrm>
+          <a:prstGeom prst="rect">
+            <a:avLst/>
+          </a:prstGeom>
+          <a:noFill/>
+        </p:spPr>
+        <p:txBody>
+          <a:bodyPr wrap="square">
+            <a:spAutoFit/>
+          </a:bodyPr>
+          <a:lstStyle/>
+          <a:p>
+            <a:r>
+              <a:rPr sz="3000" b="1">
+                <a:solidFill>
+                  <a:srgbClr val="1F1A17"/>
+                </a:solidFill>
+              </a:rPr>
+              <a:t>Conclusion</a:t>
+            </a:r>
+          </a:p>
+        </p:txBody>
+      </p:sp>
+      <p:sp>
+        <p:nvSpPr>
+          <p:cNvPr id="4" name="TextBox 3"/>
+          <p:cNvSpPr txBox="1"/>
+          <p:nvPr/>
+        </p:nvSpPr>
+        <p:spPr>
+          <a:xfrm>
+            <a:off x="822960" y="1371600"/>
+            <a:ext cx="10515600" cy="4114800"/>
+          </a:xfrm>
+          <a:prstGeom prst="rect">
+            <a:avLst/>
+          </a:prstGeom>
+          <a:noFill/>
+        </p:spPr>
+        <p:txBody>
+          <a:bodyPr wrap="square">
+            <a:spAutoFit/>
+          </a:bodyPr>
+          <a:lstStyle/>
+          <a:p>
+            <a:pPr>
+              <a:spcAft>
+                <a:spcPts val="600"/>
+              </a:spcAft>
+              <a:defRPr sz="1800">
+                <a:solidFill>
+                  <a:srgbClr val="1F1A17"/>
+                </a:solidFill>
+              </a:defRPr>
+            </a:pPr>
+            <a:r>
+              <a:t>• Built clean open-source pipeline: Depth Anything Small student + Large teacher</a:t>
+            </a:r>
+          </a:p>
+          <a:p>
+            <a:pPr>
+              <a:spcAft>
+                <a:spcPts val="600"/>
+              </a:spcAft>
+              <a:defRPr sz="1800">
+                <a:solidFill>
+                  <a:srgbClr val="1F1A17"/>
+                </a:solidFill>
+              </a:defRPr>
+            </a:pPr>
+            <a:r>
+              <a:t>• Three losses: affine-invariant base, affine-invariant distill, multi-scale gradient</a:t>
+            </a:r>
+          </a:p>
+          <a:p>
+            <a:pPr>
+              <a:spcAft>
+                <a:spcPts val="600"/>
+              </a:spcAft>
+              <a:defRPr sz="1800">
+                <a:solidFill>
+                  <a:srgbClr val="1F1A17"/>
+                </a:solidFill>
+              </a:defRPr>
+            </a:pPr>
+            <a:r>
+              <a:t>• Three-axis sweep: α (distill weight), β (grad weight), learning rate</a:t>
+            </a:r>
+          </a:p>
+          <a:p>
+            <a:pPr>
+              <a:spcAft>
+                <a:spcPts val="600"/>
+              </a:spcAft>
+              <a:defRPr sz="1800">
+                <a:solidFill>
+                  <a:srgbClr val="1F1A17"/>
+                </a:solidFill>
+              </a:defRPr>
+            </a:pPr>
+            <a:r>
+              <a:t>• Empirically tuned config slightly beats pretrained zero-shot on NYU-v2</a:t>
+            </a:r>
+          </a:p>
+          <a:p>
+            <a:pPr>
+              <a:spcAft>
+                <a:spcPts val="600"/>
+              </a:spcAft>
+              <a:defRPr sz="1800">
+                <a:solidFill>
+                  <a:srgbClr val="1F1A17"/>
+                </a:solidFill>
+              </a:defRPr>
+            </a:pPr>
+            <a:r>
+              <a:t>• No cross-domain transfer to KITTI at our conservative learning rate</a:t>
+            </a:r>
+          </a:p>
+          <a:p>
+            <a:pPr>
+              <a:spcAft>
+                <a:spcPts val="600"/>
+              </a:spcAft>
+              <a:defRPr sz="1800">
+                <a:solidFill>
+                  <a:srgbClr val="1F1A17"/>
+                </a:solidFill>
+              </a:defRPr>
+            </a:pPr>
+            <a:r>
+              <a:t>• Headline finding: lr-sensitivity, not loss balance, dominates small-data distillation</a:t>
+            </a:r>
+          </a:p>
+        </p:txBody>
+      </p:sp>
+      <p:sp>
+        <p:nvSpPr>
+          <p:cNvPr id="5" name="TextBox 4"/>
+          <p:cNvSpPr txBox="1"/>
+          <p:nvPr/>
+        </p:nvSpPr>
+        <p:spPr>
+          <a:xfrm>
+            <a:off x="822960" y="5486400"/>
+            <a:ext cx="10515600" cy="1097280"/>
+          </a:xfrm>
+          <a:prstGeom prst="rect">
+            <a:avLst/>
+          </a:prstGeom>
+          <a:noFill/>
+        </p:spPr>
+        <p:txBody>
+          <a:bodyPr wrap="square">
+            <a:spAutoFit/>
+          </a:bodyPr>
+          <a:lstStyle/>
+          <a:p>
+            <a:pPr>
+              <a:spcAft>
+                <a:spcPts val="600"/>
+              </a:spcAft>
+              <a:defRPr sz="1600">
+                <a:solidFill>
+                  <a:srgbClr val="A84425"/>
+                </a:solidFill>
+              </a:defRPr>
+            </a:pPr>
+            <a:r>
+              <a:t>• GitHub: https://github.com/arassal/depth-project</a:t>
+            </a:r>
+          </a:p>
+          <a:p>
+            <a:pPr>
+              <a:spcAft>
+                <a:spcPts val="600"/>
+              </a:spcAft>
+              <a:defRPr sz="1600">
+                <a:solidFill>
+                  <a:srgbClr val="A84425"/>
+                </a:solidFill>
+              </a:defRPr>
+            </a:pPr>
+            <a:r>
+              <a:t>• Demo: ./run_upload_demo.sh  →  http://127.0.0.1:8000</a:t>
+            </a:r>
+          </a:p>
+        </p:txBody>
+      </p:sp>
+    </p:spTree>
+  </p:cSld>
+  <p:clrMapOvr>
+    <a:masterClrMapping/>
+  </p:clrMapOvr>
+</p:sld>
+</file>
+
+<file path=ppt/slides/slide19.xml><?xml version="1.0" encoding="utf-8"?>
+<p:sld xmlns:a="http://schemas.openxmlformats.org/drawingml/2006/main" xmlns:p="http://schemas.openxmlformats.org/presentationml/2006/main" xmlns:r="http://schemas.openxmlformats.org/officeDocument/2006/relationships">
+  <p:cSld>
+    <p:bg>
+      <p:bgPr>
+        <a:solidFill>
+          <a:srgbClr val="F7F0E5"/>
+        </a:solidFill>
+        <a:effectLst/>
+      </p:bgPr>
+    </p:bg>
+    <p:spTree>
+      <p:nvGrpSpPr>
+        <p:cNvPr id="1" name=""/>
+        <p:cNvGrpSpPr/>
+        <p:nvPr/>
+      </p:nvGrpSpPr>
+      <p:grpSpPr/>
+      <p:sp>
+        <p:nvSpPr>
+          <p:cNvPr id="2" name="TextBox 1"/>
+          <p:cNvSpPr txBox="1"/>
+          <p:nvPr/>
+        </p:nvSpPr>
+        <p:spPr>
+          <a:xfrm>
+            <a:off x="502920" y="0"/>
+            <a:ext cx="11155680" cy="320040"/>
+          </a:xfrm>
+          <a:prstGeom prst="rect">
+            <a:avLst/>
+          </a:prstGeom>
+          <a:noFill/>
+        </p:spPr>
+        <p:txBody>
+          <a:bodyPr wrap="none">
+            <a:spAutoFit/>
+          </a:bodyPr>
+          <a:lstStyle/>
+          <a:p>
+            <a:pPr>
+              <a:defRPr sz="1100" b="1">
+                <a:solidFill>
+                  <a:srgbClr val="A84425"/>
+                </a:solidFill>
+              </a:defRPr>
+            </a:pPr>
+            <a:r>
+              <a:t>ACKNOWLEDGEMENTS</a:t>
+            </a:r>
+          </a:p>
+        </p:txBody>
+      </p:sp>
+      <p:sp>
+        <p:nvSpPr>
+          <p:cNvPr id="3" name="TextBox 2"/>
+          <p:cNvSpPr txBox="1"/>
+          <p:nvPr/>
+        </p:nvSpPr>
+        <p:spPr>
+          <a:xfrm>
+            <a:off x="502920" y="274320"/>
+            <a:ext cx="11155680" cy="914400"/>
+          </a:xfrm>
+          <a:prstGeom prst="rect">
+            <a:avLst/>
+          </a:prstGeom>
+          <a:noFill/>
+        </p:spPr>
+        <p:txBody>
+          <a:bodyPr wrap="square">
+            <a:spAutoFit/>
+          </a:bodyPr>
+          <a:lstStyle/>
+          <a:p>
+            <a:r>
+              <a:rPr sz="3000" b="1">
+                <a:solidFill>
+                  <a:srgbClr val="1F1A17"/>
+                </a:solidFill>
+              </a:rPr>
+              <a:t>Contributions  &amp;  Thanks</a:t>
+            </a:r>
+          </a:p>
+        </p:txBody>
+      </p:sp>
+      <p:sp>
+        <p:nvSpPr>
+          <p:cNvPr id="4" name="TextBox 3"/>
+          <p:cNvSpPr txBox="1"/>
+          <p:nvPr/>
+        </p:nvSpPr>
+        <p:spPr>
+          <a:xfrm>
+            <a:off x="822960" y="1371600"/>
+            <a:ext cx="10515600" cy="2103120"/>
+          </a:xfrm>
+          <a:prstGeom prst="rect">
+            <a:avLst/>
+          </a:prstGeom>
+          <a:noFill/>
+        </p:spPr>
+        <p:txBody>
+          <a:bodyPr wrap="square">
+            <a:spAutoFit/>
+          </a:bodyPr>
+          <a:lstStyle/>
+          <a:p>
+            <a:pPr>
+              <a:spcAft>
+                <a:spcPts val="600"/>
+              </a:spcAft>
+              <a:defRPr sz="1800">
+                <a:solidFill>
+                  <a:srgbClr val="1F1A17"/>
+                </a:solidFill>
+              </a:defRPr>
+            </a:pPr>
+            <a:r>
+              <a:t>• Alexander Assal: pipeline implementation, distillation hook, gradient loss, sweep harness, web demo, analysis</a:t>
+            </a:r>
+          </a:p>
+          <a:p>
+            <a:pPr>
+              <a:spcAft>
+                <a:spcPts val="600"/>
+              </a:spcAft>
+              <a:defRPr sz="1800">
+                <a:solidFill>
+                  <a:srgbClr val="1F1A17"/>
+                </a:solidFill>
+              </a:defRPr>
+            </a:pPr>
+            <a:r>
+              <a:t>• Parsa Ghasemi: literature survey, dataset preparation, qualitative analysis, figures, manuscript drafting</a:t>
+            </a:r>
+          </a:p>
+          <a:p>
+            <a:pPr>
+              <a:spcAft>
+                <a:spcPts val="600"/>
+              </a:spcAft>
+              <a:defRPr sz="1800">
+                <a:solidFill>
+                  <a:srgbClr val="1F1A17"/>
+                </a:solidFill>
+              </a:defRPr>
+            </a:pPr>
+            <a:r>
+              <a:t>• Both authors: manuscript &amp; presentation</a:t>
+            </a:r>
+          </a:p>
+        </p:txBody>
+      </p:sp>
+      <p:sp>
+        <p:nvSpPr>
+          <p:cNvPr id="5" name="TextBox 4"/>
+          <p:cNvSpPr txBox="1"/>
+          <p:nvPr/>
+        </p:nvSpPr>
+        <p:spPr>
+          <a:xfrm>
+            <a:off x="822960" y="3749039"/>
+            <a:ext cx="10515600" cy="2926080"/>
+          </a:xfrm>
+          <a:prstGeom prst="rect">
+            <a:avLst/>
+          </a:prstGeom>
+          <a:noFill/>
+        </p:spPr>
+        <p:txBody>
+          <a:bodyPr wrap="square">
+            <a:spAutoFit/>
+          </a:bodyPr>
+          <a:lstStyle/>
+          <a:p>
+            <a:pPr>
+              <a:spcAft>
+                <a:spcPts val="600"/>
+              </a:spcAft>
+              <a:defRPr sz="1500">
+                <a:solidFill>
+                  <a:srgbClr val="645A54"/>
+                </a:solidFill>
+              </a:defRPr>
+            </a:pPr>
+            <a:r>
+              <a:t>• References we depend on:</a:t>
+            </a:r>
+          </a:p>
+          <a:p>
+            <a:pPr>
+              <a:spcAft>
+                <a:spcPts val="600"/>
+              </a:spcAft>
+              <a:defRPr sz="1500">
+                <a:solidFill>
+                  <a:srgbClr val="645A54"/>
+                </a:solidFill>
+              </a:defRPr>
+            </a:pPr>
+            <a:r>
+              <a:t>• Depth Anything — Yang et al., CVPR 2024</a:t>
+            </a:r>
+          </a:p>
+          <a:p>
+            <a:pPr>
+              <a:spcAft>
+                <a:spcPts val="600"/>
+              </a:spcAft>
+              <a:defRPr sz="1500">
+                <a:solidFill>
+                  <a:srgbClr val="645A54"/>
+                </a:solidFill>
+              </a:defRPr>
+            </a:pPr>
+            <a:r>
+              <a:t>• Distill-Any-Depth — He et al., arXiv 2025</a:t>
+            </a:r>
+          </a:p>
+          <a:p>
+            <a:pPr>
+              <a:spcAft>
+                <a:spcPts val="600"/>
+              </a:spcAft>
+              <a:defRPr sz="1500">
+                <a:solidFill>
+                  <a:srgbClr val="645A54"/>
+                </a:solidFill>
+              </a:defRPr>
+            </a:pPr>
+            <a:r>
+              <a:t>• ZoeDepth — Bhat et al., arXiv 2023</a:t>
+            </a:r>
+          </a:p>
+          <a:p>
+            <a:pPr>
+              <a:spcAft>
+                <a:spcPts val="600"/>
+              </a:spcAft>
+              <a:defRPr sz="1500">
+                <a:solidFill>
+                  <a:srgbClr val="645A54"/>
+                </a:solidFill>
+              </a:defRPr>
+            </a:pPr>
+            <a:r>
+              <a:t>• DPT — Ranftl et al., ICCV 2021</a:t>
+            </a:r>
+          </a:p>
+          <a:p>
+            <a:pPr>
+              <a:spcAft>
+                <a:spcPts val="600"/>
+              </a:spcAft>
+              <a:defRPr sz="1500">
+                <a:solidFill>
+                  <a:srgbClr val="645A54"/>
+                </a:solidFill>
+              </a:defRPr>
+            </a:pPr>
+            <a:r>
+              <a:t>• DINOv2 — Oquab et al., arXiv 2023</a:t>
+            </a:r>
+          </a:p>
+          <a:p>
+            <a:pPr>
+              <a:spcAft>
+                <a:spcPts val="600"/>
+              </a:spcAft>
+              <a:defRPr sz="1500">
+                <a:solidFill>
+                  <a:srgbClr val="645A54"/>
+                </a:solidFill>
+              </a:defRPr>
+            </a:pPr>
+            <a:r>
+              <a:t>• NYU-v2 — Silberman et al., ECCV 2012   •   KITTI — Geiger et al., IJRR 2013</a:t>
             </a:r>
           </a:p>
         </p:txBody>
@@ -3804,8 +6784,8 @@
         </p:nvSpPr>
         <p:spPr>
           <a:xfrm>
-            <a:off x="502920" y="274320"/>
-            <a:ext cx="11155680" cy="914400"/>
+            <a:off x="502920" y="0"/>
+            <a:ext cx="11155680" cy="320040"/>
           </a:xfrm>
           <a:prstGeom prst="rect">
             <a:avLst/>
@@ -3818,13 +6798,15 @@
           </a:bodyPr>
           <a:lstStyle/>
           <a:p>
-            <a:r>
-              <a:rPr sz="2800" b="1">
-                <a:solidFill>
-                  <a:srgbClr val="1F1A17"/>
-                </a:solidFill>
-              </a:rPr>
-              <a:t>What Model Was Used</a:t>
+            <a:pPr>
+              <a:defRPr sz="1100" b="1">
+                <a:solidFill>
+                  <a:srgbClr val="A84425"/>
+                </a:solidFill>
+              </a:defRPr>
+            </a:pPr>
+            <a:r>
+              <a:t>OUTLINE</a:t>
             </a:r>
           </a:p>
         </p:txBody>
@@ -3837,8 +6819,8 @@
         </p:nvSpPr>
         <p:spPr>
           <a:xfrm>
-            <a:off x="731520" y="1097280"/>
-            <a:ext cx="5577840" cy="3657600"/>
+            <a:off x="502920" y="274320"/>
+            <a:ext cx="11155680" cy="914400"/>
           </a:xfrm>
           <a:prstGeom prst="rect">
             <a:avLst/>
@@ -3851,63 +6833,13 @@
           </a:bodyPr>
           <a:lstStyle/>
           <a:p>
-            <a:pPr>
-              <a:spcAft>
-                <a:spcPts val="800"/>
-              </a:spcAft>
-              <a:defRPr sz="2000">
-                <a:solidFill>
-                  <a:srgbClr val="1F1A17"/>
-                </a:solidFill>
-              </a:defRPr>
-            </a:pPr>
-            <a:r>
-              <a:t>Pretrained model: LiheYoung/depth-anything-small-hf</a:t>
-            </a:r>
-          </a:p>
-          <a:p>
-            <a:pPr>
-              <a:spcAft>
-                <a:spcPts val="800"/>
-              </a:spcAft>
-              <a:defRPr sz="2000">
-                <a:solidFill>
-                  <a:srgbClr val="1F1A17"/>
-                </a:solidFill>
-              </a:defRPr>
-            </a:pPr>
-            <a:r>
-              <a:t>Architecture family: Depth Anything / DPT-style monocular depth estimation</a:t>
-            </a:r>
-          </a:p>
-          <a:p>
-            <a:pPr>
-              <a:spcAft>
-                <a:spcPts val="800"/>
-              </a:spcAft>
-              <a:defRPr sz="2000">
-                <a:solidFill>
-                  <a:srgbClr val="1F1A17"/>
-                </a:solidFill>
-              </a:defRPr>
-            </a:pPr>
-            <a:r>
-              <a:t>Strength: strong zero-shot relative depth structure from a single RGB image</a:t>
-            </a:r>
-          </a:p>
-          <a:p>
-            <a:pPr>
-              <a:spcAft>
-                <a:spcPts val="800"/>
-              </a:spcAft>
-              <a:defRPr sz="2000">
-                <a:solidFill>
-                  <a:srgbClr val="1F1A17"/>
-                </a:solidFill>
-              </a:defRPr>
-            </a:pPr>
-            <a:r>
-              <a:t>Limitation: not guaranteed metric-accurate real-world distance from one image alone</a:t>
+            <a:r>
+              <a:rPr sz="3000" b="1">
+                <a:solidFill>
+                  <a:srgbClr val="1F1A17"/>
+                </a:solidFill>
+              </a:rPr>
+              <a:t>Outline</a:t>
             </a:r>
           </a:p>
         </p:txBody>
@@ -3920,8 +6852,8 @@
         </p:nvSpPr>
         <p:spPr>
           <a:xfrm>
-            <a:off x="6400800" y="1463040"/>
-            <a:ext cx="4754880" cy="2743200"/>
+            <a:off x="822960" y="1371600"/>
+            <a:ext cx="10515600" cy="4572000"/>
           </a:xfrm>
           <a:prstGeom prst="rect">
             <a:avLst/>
@@ -3936,46 +6868,210 @@
           <a:p>
             <a:pPr>
               <a:spcAft>
-                <a:spcPts val="800"/>
-              </a:spcAft>
-              <a:defRPr sz="1800">
-                <a:solidFill>
-                  <a:srgbClr val="1F1A17"/>
-                </a:solidFill>
-              </a:defRPr>
-            </a:pPr>
-            <a:r>
-              <a:t>This system is best interpreted as a relative-depth model</a:t>
-            </a:r>
-          </a:p>
-          <a:p>
-            <a:pPr>
-              <a:spcAft>
-                <a:spcPts val="800"/>
-              </a:spcAft>
-              <a:defRPr sz="1800">
-                <a:solidFill>
-                  <a:srgbClr val="1F1A17"/>
-                </a:solidFill>
-              </a:defRPr>
-            </a:pPr>
-            <a:r>
-              <a:t>It can tell what is nearer and farther</a:t>
-            </a:r>
-          </a:p>
-          <a:p>
-            <a:pPr>
-              <a:spcAft>
-                <a:spcPts val="800"/>
-              </a:spcAft>
-              <a:defRPr sz="1800">
-                <a:solidFill>
-                  <a:srgbClr val="1F1A17"/>
-                </a:solidFill>
-              </a:defRPr>
-            </a:pPr>
-            <a:r>
-              <a:t>It should not be sold as exact distance measurement without calibration</a:t>
+                <a:spcPts val="600"/>
+              </a:spcAft>
+              <a:defRPr sz="2000">
+                <a:solidFill>
+                  <a:srgbClr val="1F1A17"/>
+                </a:solidFill>
+              </a:defRPr>
+            </a:pPr>
+            <a:r>
+              <a:t>• Problem: monocular relative depth from a single RGB image</a:t>
+            </a:r>
+          </a:p>
+          <a:p>
+            <a:pPr>
+              <a:spcAft>
+                <a:spcPts val="600"/>
+              </a:spcAft>
+              <a:defRPr sz="2000">
+                <a:solidFill>
+                  <a:srgbClr val="1F1A17"/>
+                </a:solidFill>
+              </a:defRPr>
+            </a:pPr>
+            <a:r>
+              <a:t>• Approach: distill Depth Anything Large → Small + multi-scale gradient loss</a:t>
+            </a:r>
+          </a:p>
+          <a:p>
+            <a:pPr>
+              <a:spcAft>
+                <a:spcPts val="600"/>
+              </a:spcAft>
+              <a:defRPr sz="2000">
+                <a:solidFill>
+                  <a:srgbClr val="1F1A17"/>
+                </a:solidFill>
+              </a:defRPr>
+            </a:pPr>
+            <a:r>
+              <a:t>• Datasets: NYU-v2 (indoor) and KITTI eigen subset (outdoor)</a:t>
+            </a:r>
+          </a:p>
+          <a:p>
+            <a:pPr>
+              <a:spcAft>
+                <a:spcPts val="600"/>
+              </a:spcAft>
+              <a:defRPr sz="2000">
+                <a:solidFill>
+                  <a:srgbClr val="1F1A17"/>
+                </a:solidFill>
+              </a:defRPr>
+            </a:pPr>
+            <a:r>
+              <a:t>• Three-axis hyperparameter sweep: distillation α, gradient β, learning rate</a:t>
+            </a:r>
+          </a:p>
+          <a:p>
+            <a:pPr>
+              <a:spcAft>
+                <a:spcPts val="600"/>
+              </a:spcAft>
+              <a:defRPr sz="2000">
+                <a:solidFill>
+                  <a:srgbClr val="1F1A17"/>
+                </a:solidFill>
+              </a:defRPr>
+            </a:pPr>
+            <a:r>
+              <a:t>• Main finding: learning rate is the dominant hyperparameter</a:t>
+            </a:r>
+          </a:p>
+          <a:p>
+            <a:pPr>
+              <a:spcAft>
+                <a:spcPts val="600"/>
+              </a:spcAft>
+              <a:defRPr sz="2000">
+                <a:solidFill>
+                  <a:srgbClr val="1F1A17"/>
+                </a:solidFill>
+              </a:defRPr>
+            </a:pPr>
+            <a:r>
+              <a:t>• Best stable config slightly beats zero-shot; aggressive lr collapses the student</a:t>
+            </a:r>
+          </a:p>
+          <a:p>
+            <a:pPr>
+              <a:spcAft>
+                <a:spcPts val="600"/>
+              </a:spcAft>
+              <a:defRPr sz="2000">
+                <a:solidFill>
+                  <a:srgbClr val="1F1A17"/>
+                </a:solidFill>
+              </a:defRPr>
+            </a:pPr>
+            <a:r>
+              <a:t>• Live demo: local upload-and-predict web app</a:t>
+            </a:r>
+          </a:p>
+        </p:txBody>
+      </p:sp>
+    </p:spTree>
+  </p:cSld>
+  <p:clrMapOvr>
+    <a:masterClrMapping/>
+  </p:clrMapOvr>
+</p:sld>
+</file>
+
+<file path=ppt/slides/slide20.xml><?xml version="1.0" encoding="utf-8"?>
+<p:sld xmlns:a="http://schemas.openxmlformats.org/drawingml/2006/main" xmlns:p="http://schemas.openxmlformats.org/presentationml/2006/main" xmlns:r="http://schemas.openxmlformats.org/officeDocument/2006/relationships">
+  <p:cSld>
+    <p:bg>
+      <p:bgPr>
+        <a:solidFill>
+          <a:srgbClr val="F7F0E5"/>
+        </a:solidFill>
+        <a:effectLst/>
+      </p:bgPr>
+    </p:bg>
+    <p:spTree>
+      <p:nvGrpSpPr>
+        <p:cNvPr id="1" name=""/>
+        <p:cNvGrpSpPr/>
+        <p:nvPr/>
+      </p:nvGrpSpPr>
+      <p:grpSpPr/>
+      <p:sp>
+        <p:nvSpPr>
+          <p:cNvPr id="2" name="TextBox 1"/>
+          <p:cNvSpPr txBox="1"/>
+          <p:nvPr/>
+        </p:nvSpPr>
+        <p:spPr>
+          <a:xfrm>
+            <a:off x="502920" y="274320"/>
+            <a:ext cx="11155680" cy="914400"/>
+          </a:xfrm>
+          <a:prstGeom prst="rect">
+            <a:avLst/>
+          </a:prstGeom>
+          <a:noFill/>
+        </p:spPr>
+        <p:txBody>
+          <a:bodyPr wrap="square">
+            <a:spAutoFit/>
+          </a:bodyPr>
+          <a:lstStyle/>
+          <a:p>
+            <a:r>
+              <a:rPr sz="3000" b="1">
+                <a:solidFill>
+                  <a:srgbClr val="1F1A17"/>
+                </a:solidFill>
+              </a:rPr>
+              <a:t>Questions?</a:t>
+            </a:r>
+          </a:p>
+          <a:p>
+            <a:r>
+              <a:rPr sz="1400">
+                <a:solidFill>
+                  <a:srgbClr val="645A54"/>
+                </a:solidFill>
+              </a:rPr>
+              <a:t>Alexander Assal  •  Parsa Ghasemi</a:t>
+            </a:r>
+          </a:p>
+        </p:txBody>
+      </p:sp>
+      <p:sp>
+        <p:nvSpPr>
+          <p:cNvPr id="3" name="TextBox 2"/>
+          <p:cNvSpPr txBox="1"/>
+          <p:nvPr/>
+        </p:nvSpPr>
+        <p:spPr>
+          <a:xfrm>
+            <a:off x="822960" y="3200400"/>
+            <a:ext cx="10515600" cy="1828800"/>
+          </a:xfrm>
+          <a:prstGeom prst="rect">
+            <a:avLst/>
+          </a:prstGeom>
+          <a:noFill/>
+        </p:spPr>
+        <p:txBody>
+          <a:bodyPr wrap="none">
+            <a:spAutoFit/>
+          </a:bodyPr>
+          <a:lstStyle/>
+          <a:p>
+            <a:pPr algn="ctr">
+              <a:defRPr sz="2800" b="1">
+                <a:solidFill>
+                  <a:srgbClr val="A84425"/>
+                </a:solidFill>
+              </a:defRPr>
+            </a:pPr>
+            <a:r>
+              <a:t>https://github.com/arassal/depth-project</a:t>
             </a:r>
           </a:p>
         </p:txBody>
@@ -4014,8 +7110,8 @@
         </p:nvSpPr>
         <p:spPr>
           <a:xfrm>
-            <a:off x="502920" y="274320"/>
-            <a:ext cx="11155680" cy="914400"/>
+            <a:off x="502920" y="0"/>
+            <a:ext cx="11155680" cy="320040"/>
           </a:xfrm>
           <a:prstGeom prst="rect">
             <a:avLst/>
@@ -4028,291 +7124,29 @@
           </a:bodyPr>
           <a:lstStyle/>
           <a:p>
-            <a:r>
-              <a:rPr sz="2800" b="1">
-                <a:solidFill>
-                  <a:srgbClr val="1F1A17"/>
-                </a:solidFill>
-              </a:rPr>
-              <a:t>Dataset and Training Setup</a:t>
-            </a:r>
-          </a:p>
-        </p:txBody>
-      </p:sp>
-      <p:sp>
-        <p:nvSpPr>
-          <p:cNvPr id="3" name="Rectangle 2"/>
-          <p:cNvSpPr/>
-          <p:nvPr/>
-        </p:nvSpPr>
-        <p:spPr>
-          <a:xfrm>
-            <a:off x="731520" y="1097280"/>
-            <a:ext cx="2011680" cy="1143000"/>
-          </a:xfrm>
-          <a:prstGeom prst="rect">
-            <a:avLst/>
-          </a:prstGeom>
-          <a:solidFill>
-            <a:srgbClr val="FFFAF1"/>
-          </a:solidFill>
-          <a:ln>
-            <a:solidFill>
-              <a:srgbClr val="DCCDC0"/>
-            </a:solidFill>
-          </a:ln>
-        </p:spPr>
-        <p:style>
-          <a:lnRef idx="1">
-            <a:schemeClr val="accent1"/>
-          </a:lnRef>
-          <a:fillRef idx="3">
-            <a:schemeClr val="accent1"/>
-          </a:fillRef>
-          <a:effectRef idx="2">
-            <a:schemeClr val="accent1"/>
-          </a:effectRef>
-          <a:fontRef idx="minor">
-            <a:schemeClr val="lt1"/>
-          </a:fontRef>
-        </p:style>
-        <p:txBody>
-          <a:bodyPr rtlCol="0" anchor="ctr"/>
-          <a:lstStyle/>
-          <a:p>
-            <a:pPr algn="ctr">
-              <a:defRPr sz="1300">
-                <a:solidFill>
-                  <a:srgbClr val="645A54"/>
-                </a:solidFill>
-              </a:defRPr>
-            </a:pPr>
-            <a:r>
-              <a:t>Train</a:t>
-            </a:r>
-          </a:p>
-          <a:p>
-            <a:pPr>
-              <a:defRPr sz="2400" b="1">
+            <a:pPr>
+              <a:defRPr sz="1100" b="1">
                 <a:solidFill>
                   <a:srgbClr val="A84425"/>
                 </a:solidFill>
               </a:defRPr>
             </a:pPr>
             <a:r>
-              <a:t>450</a:t>
-            </a:r>
-          </a:p>
-        </p:txBody>
-      </p:sp>
-      <p:sp>
-        <p:nvSpPr>
-          <p:cNvPr id="4" name="Rectangle 3"/>
-          <p:cNvSpPr/>
-          <p:nvPr/>
-        </p:nvSpPr>
-        <p:spPr>
-          <a:xfrm>
-            <a:off x="2971800" y="1097280"/>
-            <a:ext cx="2011680" cy="1143000"/>
-          </a:xfrm>
-          <a:prstGeom prst="rect">
-            <a:avLst/>
-          </a:prstGeom>
-          <a:solidFill>
-            <a:srgbClr val="FFFAF1"/>
-          </a:solidFill>
-          <a:ln>
-            <a:solidFill>
-              <a:srgbClr val="DCCDC0"/>
-            </a:solidFill>
-          </a:ln>
-        </p:spPr>
-        <p:style>
-          <a:lnRef idx="1">
-            <a:schemeClr val="accent1"/>
-          </a:lnRef>
-          <a:fillRef idx="3">
-            <a:schemeClr val="accent1"/>
-          </a:fillRef>
-          <a:effectRef idx="2">
-            <a:schemeClr val="accent1"/>
-          </a:effectRef>
-          <a:fontRef idx="minor">
-            <a:schemeClr val="lt1"/>
-          </a:fontRef>
-        </p:style>
-        <p:txBody>
-          <a:bodyPr rtlCol="0" anchor="ctr"/>
-          <a:lstStyle/>
-          <a:p>
-            <a:pPr algn="ctr">
-              <a:defRPr sz="1300">
-                <a:solidFill>
-                  <a:srgbClr val="645A54"/>
-                </a:solidFill>
-              </a:defRPr>
-            </a:pPr>
-            <a:r>
-              <a:t>Val</a:t>
-            </a:r>
-          </a:p>
-          <a:p>
-            <a:pPr>
-              <a:defRPr sz="2400" b="1">
-                <a:solidFill>
-                  <a:srgbClr val="A84425"/>
-                </a:solidFill>
-              </a:defRPr>
-            </a:pPr>
-            <a:r>
-              <a:t>60</a:t>
-            </a:r>
-          </a:p>
-        </p:txBody>
-      </p:sp>
-      <p:sp>
-        <p:nvSpPr>
-          <p:cNvPr id="5" name="Rectangle 4"/>
-          <p:cNvSpPr/>
-          <p:nvPr/>
-        </p:nvSpPr>
-        <p:spPr>
-          <a:xfrm>
-            <a:off x="5212080" y="1097280"/>
-            <a:ext cx="2011680" cy="1143000"/>
-          </a:xfrm>
-          <a:prstGeom prst="rect">
-            <a:avLst/>
-          </a:prstGeom>
-          <a:solidFill>
-            <a:srgbClr val="FFFAF1"/>
-          </a:solidFill>
-          <a:ln>
-            <a:solidFill>
-              <a:srgbClr val="DCCDC0"/>
-            </a:solidFill>
-          </a:ln>
-        </p:spPr>
-        <p:style>
-          <a:lnRef idx="1">
-            <a:schemeClr val="accent1"/>
-          </a:lnRef>
-          <a:fillRef idx="3">
-            <a:schemeClr val="accent1"/>
-          </a:fillRef>
-          <a:effectRef idx="2">
-            <a:schemeClr val="accent1"/>
-          </a:effectRef>
-          <a:fontRef idx="minor">
-            <a:schemeClr val="lt1"/>
-          </a:fontRef>
-        </p:style>
-        <p:txBody>
-          <a:bodyPr rtlCol="0" anchor="ctr"/>
-          <a:lstStyle/>
-          <a:p>
-            <a:pPr algn="ctr">
-              <a:defRPr sz="1300">
-                <a:solidFill>
-                  <a:srgbClr val="645A54"/>
-                </a:solidFill>
-              </a:defRPr>
-            </a:pPr>
-            <a:r>
-              <a:t>Test</a:t>
-            </a:r>
-          </a:p>
-          <a:p>
-            <a:pPr>
-              <a:defRPr sz="2400" b="1">
-                <a:solidFill>
-                  <a:srgbClr val="A84425"/>
-                </a:solidFill>
-              </a:defRPr>
-            </a:pPr>
-            <a:r>
-              <a:t>59</a:t>
-            </a:r>
-          </a:p>
-        </p:txBody>
-      </p:sp>
-      <p:sp>
-        <p:nvSpPr>
-          <p:cNvPr id="6" name="Rectangle 5"/>
-          <p:cNvSpPr/>
-          <p:nvPr/>
-        </p:nvSpPr>
-        <p:spPr>
-          <a:xfrm>
-            <a:off x="7452360" y="1097280"/>
-            <a:ext cx="2011680" cy="1143000"/>
-          </a:xfrm>
-          <a:prstGeom prst="rect">
-            <a:avLst/>
-          </a:prstGeom>
-          <a:solidFill>
-            <a:srgbClr val="FFFAF1"/>
-          </a:solidFill>
-          <a:ln>
-            <a:solidFill>
-              <a:srgbClr val="DCCDC0"/>
-            </a:solidFill>
-          </a:ln>
-        </p:spPr>
-        <p:style>
-          <a:lnRef idx="1">
-            <a:schemeClr val="accent1"/>
-          </a:lnRef>
-          <a:fillRef idx="3">
-            <a:schemeClr val="accent1"/>
-          </a:fillRef>
-          <a:effectRef idx="2">
-            <a:schemeClr val="accent1"/>
-          </a:effectRef>
-          <a:fontRef idx="minor">
-            <a:schemeClr val="lt1"/>
-          </a:fontRef>
-        </p:style>
-        <p:txBody>
-          <a:bodyPr rtlCol="0" anchor="ctr"/>
-          <a:lstStyle/>
-          <a:p>
-            <a:pPr algn="ctr">
-              <a:defRPr sz="1300">
-                <a:solidFill>
-                  <a:srgbClr val="645A54"/>
-                </a:solidFill>
-              </a:defRPr>
-            </a:pPr>
-            <a:r>
-              <a:t>Epochs</a:t>
-            </a:r>
-          </a:p>
-          <a:p>
-            <a:pPr>
-              <a:defRPr sz="2400" b="1">
-                <a:solidFill>
-                  <a:srgbClr val="A84425"/>
-                </a:solidFill>
-              </a:defRPr>
-            </a:pPr>
-            <a:r>
-              <a:t>2</a:t>
-            </a:r>
-          </a:p>
-        </p:txBody>
-      </p:sp>
-      <p:sp>
-        <p:nvSpPr>
-          <p:cNvPr id="7" name="TextBox 6"/>
+              <a:t>BACKGROUND</a:t>
+            </a:r>
+          </a:p>
+        </p:txBody>
+      </p:sp>
+      <p:sp>
+        <p:nvSpPr>
+          <p:cNvPr id="3" name="TextBox 2"/>
           <p:cNvSpPr txBox="1"/>
           <p:nvPr/>
         </p:nvSpPr>
         <p:spPr>
           <a:xfrm>
-            <a:off x="731520" y="2743200"/>
-            <a:ext cx="4572000" cy="3108960"/>
+            <a:off x="502920" y="274320"/>
+            <a:ext cx="11155680" cy="914400"/>
           </a:xfrm>
           <a:prstGeom prst="rect">
             <a:avLst/>
@@ -4325,107 +7159,27 @@
           </a:bodyPr>
           <a:lstStyle/>
           <a:p>
-            <a:pPr>
-              <a:spcAft>
-                <a:spcPts val="800"/>
-              </a:spcAft>
-              <a:defRPr sz="2000">
-                <a:solidFill>
-                  <a:srgbClr val="1F1A17"/>
-                </a:solidFill>
-              </a:defRPr>
-            </a:pPr>
-            <a:r>
-              <a:t>Image size: 256x256</a:t>
-            </a:r>
-          </a:p>
-          <a:p>
-            <a:pPr>
-              <a:spcAft>
-                <a:spcPts val="800"/>
-              </a:spcAft>
-              <a:defRPr sz="2000">
-                <a:solidFill>
-                  <a:srgbClr val="1F1A17"/>
-                </a:solidFill>
-              </a:defRPr>
-            </a:pPr>
-            <a:r>
-              <a:t>Batch size: 1</a:t>
-            </a:r>
-          </a:p>
-          <a:p>
-            <a:pPr>
-              <a:spcAft>
-                <a:spcPts val="800"/>
-              </a:spcAft>
-              <a:defRPr sz="2000">
-                <a:solidFill>
-                  <a:srgbClr val="1F1A17"/>
-                </a:solidFill>
-              </a:defRPr>
-            </a:pPr>
-            <a:r>
-              <a:t>Optimizer: AdamW</a:t>
-            </a:r>
-          </a:p>
-          <a:p>
-            <a:pPr>
-              <a:spcAft>
-                <a:spcPts val="800"/>
-              </a:spcAft>
-              <a:defRPr sz="2000">
-                <a:solidFill>
-                  <a:srgbClr val="1F1A17"/>
-                </a:solidFill>
-              </a:defRPr>
-            </a:pPr>
-            <a:r>
-              <a:t>Learning rate: 1e-5</a:t>
-            </a:r>
-          </a:p>
-          <a:p>
-            <a:pPr>
-              <a:spcAft>
-                <a:spcPts val="800"/>
-              </a:spcAft>
-              <a:defRPr sz="2000">
-                <a:solidFill>
-                  <a:srgbClr val="1F1A17"/>
-                </a:solidFill>
-              </a:defRPr>
-            </a:pPr>
-            <a:r>
-              <a:t>Loss: affine-invariant relative depth loss</a:t>
-            </a:r>
-          </a:p>
-          <a:p>
-            <a:pPr>
-              <a:spcAft>
-                <a:spcPts val="800"/>
-              </a:spcAft>
-              <a:defRPr sz="2000">
-                <a:solidFill>
-                  <a:srgbClr val="1F1A17"/>
-                </a:solidFill>
-              </a:defRPr>
-            </a:pPr>
-            <a:r>
-              <a:t>Evaluation metrics: AbsRel and delta1</a:t>
-            </a:r>
-          </a:p>
-        </p:txBody>
-      </p:sp>
-      <p:sp>
-        <p:nvSpPr>
-          <p:cNvPr id="8" name="TextBox 7"/>
+            <a:r>
+              <a:rPr sz="3000" b="1">
+                <a:solidFill>
+                  <a:srgbClr val="1F1A17"/>
+                </a:solidFill>
+              </a:rPr>
+              <a:t>Monocular Depth is Ill-Posed</a:t>
+            </a:r>
+          </a:p>
+        </p:txBody>
+      </p:sp>
+      <p:sp>
+        <p:nvSpPr>
+          <p:cNvPr id="4" name="TextBox 3"/>
           <p:cNvSpPr txBox="1"/>
           <p:nvPr/>
         </p:nvSpPr>
         <p:spPr>
           <a:xfrm>
-            <a:off x="5760720" y="2743200"/>
-            <a:ext cx="5303520" cy="3108960"/>
+            <a:off x="822960" y="1371600"/>
+            <a:ext cx="6858000" cy="4114800"/>
           </a:xfrm>
           <a:prstGeom prst="rect">
             <a:avLst/>
@@ -4440,46 +7194,159 @@
           <a:p>
             <a:pPr>
               <a:spcAft>
-                <a:spcPts val="800"/>
-              </a:spcAft>
-              <a:defRPr sz="1800">
-                <a:solidFill>
-                  <a:srgbClr val="1F1A17"/>
-                </a:solidFill>
-              </a:defRPr>
-            </a:pPr>
-            <a:r>
-              <a:t>Zero-shot baseline was measured before fine-tuning</a:t>
-            </a:r>
-          </a:p>
-          <a:p>
-            <a:pPr>
-              <a:spcAft>
-                <a:spcPts val="800"/>
-              </a:spcAft>
-              <a:defRPr sz="1800">
-                <a:solidFill>
-                  <a:srgbClr val="1F1A17"/>
-                </a:solidFill>
-              </a:defRPr>
-            </a:pPr>
-            <a:r>
-              <a:t>Fine-tuned checkpoint was selected using validation AbsRel</a:t>
-            </a:r>
-          </a:p>
-          <a:p>
-            <a:pPr>
-              <a:spcAft>
-                <a:spcPts val="800"/>
-              </a:spcAft>
-              <a:defRPr sz="1800">
-                <a:solidFill>
-                  <a:srgbClr val="1F1A17"/>
-                </a:solidFill>
-              </a:defRPr>
-            </a:pPr>
-            <a:r>
-              <a:t>This was intentionally a small PoC run, not a full paper-scale replication</a:t>
+                <a:spcPts val="600"/>
+              </a:spcAft>
+              <a:defRPr sz="2000">
+                <a:solidFill>
+                  <a:srgbClr val="1F1A17"/>
+                </a:solidFill>
+              </a:defRPr>
+            </a:pPr>
+            <a:r>
+              <a:t>• A single image is consistent with infinitely many world geometries</a:t>
+            </a:r>
+          </a:p>
+          <a:p>
+            <a:pPr>
+              <a:spcAft>
+                <a:spcPts val="600"/>
+              </a:spcAft>
+              <a:defRPr sz="2000">
+                <a:solidFill>
+                  <a:srgbClr val="1F1A17"/>
+                </a:solidFill>
+              </a:defRPr>
+            </a:pPr>
+            <a:r>
+              <a:t>• Recovery is up to scale + shift unless extra information is supplied</a:t>
+            </a:r>
+          </a:p>
+          <a:p>
+            <a:pPr>
+              <a:spcAft>
+                <a:spcPts val="600"/>
+              </a:spcAft>
+              <a:defRPr sz="2000">
+                <a:solidFill>
+                  <a:srgbClr val="1F1A17"/>
+                </a:solidFill>
+              </a:defRPr>
+            </a:pPr>
+            <a:r>
+              <a:t>• Modern systems train for relative depth, align scale + shift at eval</a:t>
+            </a:r>
+          </a:p>
+          <a:p>
+            <a:pPr>
+              <a:spcAft>
+                <a:spcPts val="600"/>
+              </a:spcAft>
+              <a:defRPr sz="2000">
+                <a:solidFill>
+                  <a:srgbClr val="1F1A17"/>
+                </a:solidFill>
+              </a:defRPr>
+            </a:pPr>
+            <a:r>
+              <a:t>• Backbone: DPT head (Ranftl 2021) on DINOv2 ViT encoder (Oquab 2023)</a:t>
+            </a:r>
+          </a:p>
+          <a:p>
+            <a:pPr>
+              <a:spcAft>
+                <a:spcPts val="600"/>
+              </a:spcAft>
+              <a:defRPr sz="2000">
+                <a:solidFill>
+                  <a:srgbClr val="1F1A17"/>
+                </a:solidFill>
+              </a:defRPr>
+            </a:pPr>
+            <a:r>
+              <a:t>• Foundation: Depth Anything (Yang 2024): scale + pseudo-labeled data</a:t>
+            </a:r>
+          </a:p>
+        </p:txBody>
+      </p:sp>
+      <p:sp>
+        <p:nvSpPr>
+          <p:cNvPr id="5" name="TextBox 4"/>
+          <p:cNvSpPr txBox="1"/>
+          <p:nvPr/>
+        </p:nvSpPr>
+        <p:spPr>
+          <a:xfrm>
+            <a:off x="7863840" y="1554480"/>
+            <a:ext cx="3931920" cy="3657600"/>
+          </a:xfrm>
+          <a:prstGeom prst="rect">
+            <a:avLst/>
+          </a:prstGeom>
+          <a:noFill/>
+        </p:spPr>
+        <p:txBody>
+          <a:bodyPr wrap="square">
+            <a:spAutoFit/>
+          </a:bodyPr>
+          <a:lstStyle/>
+          <a:p>
+            <a:pPr>
+              <a:spcAft>
+                <a:spcPts val="600"/>
+              </a:spcAft>
+              <a:defRPr sz="1600">
+                <a:solidFill>
+                  <a:srgbClr val="1F1A17"/>
+                </a:solidFill>
+              </a:defRPr>
+            </a:pPr>
+            <a:r>
+              <a:t>• Why this matters here:</a:t>
+            </a:r>
+          </a:p>
+          <a:p>
+            <a:pPr>
+              <a:spcAft>
+                <a:spcPts val="600"/>
+              </a:spcAft>
+              <a:defRPr sz="1600">
+                <a:solidFill>
+                  <a:srgbClr val="1F1A17"/>
+                </a:solidFill>
+              </a:defRPr>
+            </a:pPr>
+            <a:r>
+              <a:t>• Depth Anything Small fits a 4 GB laptop GPU</a:t>
+            </a:r>
+          </a:p>
+          <a:p>
+            <a:pPr>
+              <a:spcAft>
+                <a:spcPts val="600"/>
+              </a:spcAft>
+              <a:defRPr sz="1600">
+                <a:solidFill>
+                  <a:srgbClr val="1F1A17"/>
+                </a:solidFill>
+              </a:defRPr>
+            </a:pPr>
+            <a:r>
+              <a:t>• Depth Anything Large is the right teacher for distillation</a:t>
+            </a:r>
+          </a:p>
+          <a:p>
+            <a:pPr>
+              <a:spcAft>
+                <a:spcPts val="600"/>
+              </a:spcAft>
+              <a:defRPr sz="1600">
+                <a:solidFill>
+                  <a:srgbClr val="1F1A17"/>
+                </a:solidFill>
+              </a:defRPr>
+            </a:pPr>
+            <a:r>
+              <a:t>• We want to push the Small student above its own pretrained baseline</a:t>
             </a:r>
           </a:p>
         </p:txBody>
@@ -4518,8 +7385,8 @@
         </p:nvSpPr>
         <p:spPr>
           <a:xfrm>
-            <a:off x="502920" y="274320"/>
-            <a:ext cx="11155680" cy="914400"/>
+            <a:off x="502920" y="0"/>
+            <a:ext cx="11155680" cy="320040"/>
           </a:xfrm>
           <a:prstGeom prst="rect">
             <a:avLst/>
@@ -4532,99 +7399,29 @@
           </a:bodyPr>
           <a:lstStyle/>
           <a:p>
-            <a:r>
-              <a:rPr sz="2800" b="1">
-                <a:solidFill>
-                  <a:srgbClr val="1F1A17"/>
-                </a:solidFill>
-              </a:rPr>
-              <a:t>Training Outcome</a:t>
-            </a:r>
-          </a:p>
-        </p:txBody>
-      </p:sp>
-      <p:pic>
-        <p:nvPicPr>
-          <p:cNvPr id="3" name="Picture 2" descr="loss_vs_epoch.png"/>
-          <p:cNvPicPr>
-            <a:picLocks noChangeAspect="1"/>
-          </p:cNvPicPr>
-          <p:nvPr/>
-        </p:nvPicPr>
-        <p:blipFill>
-          <a:blip r:embed="rId2"/>
-          <a:stretch>
-            <a:fillRect/>
-          </a:stretch>
-        </p:blipFill>
-        <p:spPr>
-          <a:xfrm>
-            <a:off x="640080" y="1188720"/>
-            <a:ext cx="3657600" cy="2438400"/>
-          </a:xfrm>
-          <a:prstGeom prst="rect">
-            <a:avLst/>
-          </a:prstGeom>
-        </p:spPr>
-      </p:pic>
-      <p:pic>
-        <p:nvPicPr>
-          <p:cNvPr id="4" name="Picture 3" descr="val_absrel_vs_epoch.png"/>
-          <p:cNvPicPr>
-            <a:picLocks noChangeAspect="1"/>
-          </p:cNvPicPr>
-          <p:nvPr/>
-        </p:nvPicPr>
-        <p:blipFill>
-          <a:blip r:embed="rId3"/>
-          <a:stretch>
-            <a:fillRect/>
-          </a:stretch>
-        </p:blipFill>
-        <p:spPr>
-          <a:xfrm>
-            <a:off x="4343400" y="1188720"/>
-            <a:ext cx="3657600" cy="2438400"/>
-          </a:xfrm>
-          <a:prstGeom prst="rect">
-            <a:avLst/>
-          </a:prstGeom>
-        </p:spPr>
-      </p:pic>
-      <p:pic>
-        <p:nvPicPr>
-          <p:cNvPr id="5" name="Picture 4" descr="val_delta1_vs_epoch.png"/>
-          <p:cNvPicPr>
-            <a:picLocks noChangeAspect="1"/>
-          </p:cNvPicPr>
-          <p:nvPr/>
-        </p:nvPicPr>
-        <p:blipFill>
-          <a:blip r:embed="rId4"/>
-          <a:stretch>
-            <a:fillRect/>
-          </a:stretch>
-        </p:blipFill>
-        <p:spPr>
-          <a:xfrm>
-            <a:off x="8046720" y="1188720"/>
-            <a:ext cx="3657600" cy="2438400"/>
-          </a:xfrm>
-          <a:prstGeom prst="rect">
-            <a:avLst/>
-          </a:prstGeom>
-        </p:spPr>
-      </p:pic>
-      <p:sp>
-        <p:nvSpPr>
-          <p:cNvPr id="6" name="TextBox 5"/>
+            <a:pPr>
+              <a:defRPr sz="1100" b="1">
+                <a:solidFill>
+                  <a:srgbClr val="A84425"/>
+                </a:solidFill>
+              </a:defRPr>
+            </a:pPr>
+            <a:r>
+              <a:t>RELATED WORK</a:t>
+            </a:r>
+          </a:p>
+        </p:txBody>
+      </p:sp>
+      <p:sp>
+        <p:nvSpPr>
+          <p:cNvPr id="3" name="TextBox 2"/>
           <p:cNvSpPr txBox="1"/>
           <p:nvPr/>
         </p:nvSpPr>
         <p:spPr>
           <a:xfrm>
-            <a:off x="640080" y="4937760"/>
-            <a:ext cx="3657600" cy="457200"/>
+            <a:off x="502920" y="274320"/>
+            <a:ext cx="11155680" cy="914400"/>
           </a:xfrm>
           <a:prstGeom prst="rect">
             <a:avLst/>
@@ -4632,34 +7429,32 @@
           <a:noFill/>
         </p:spPr>
         <p:txBody>
-          <a:bodyPr wrap="none">
+          <a:bodyPr wrap="square">
             <a:spAutoFit/>
           </a:bodyPr>
           <a:lstStyle/>
           <a:p>
-            <a:pPr algn="ctr">
-              <a:defRPr sz="1200">
-                <a:solidFill>
-                  <a:srgbClr val="645A54"/>
-                </a:solidFill>
-              </a:defRPr>
-            </a:pPr>
-            <a:r>
-              <a:t>Loss vs epoch</a:t>
-            </a:r>
-          </a:p>
-        </p:txBody>
-      </p:sp>
-      <p:sp>
-        <p:nvSpPr>
-          <p:cNvPr id="7" name="TextBox 6"/>
+            <a:r>
+              <a:rPr sz="3000" b="1">
+                <a:solidFill>
+                  <a:srgbClr val="1F1A17"/>
+                </a:solidFill>
+              </a:rPr>
+              <a:t>Related Work</a:t>
+            </a:r>
+          </a:p>
+        </p:txBody>
+      </p:sp>
+      <p:sp>
+        <p:nvSpPr>
+          <p:cNvPr id="4" name="TextBox 3"/>
           <p:cNvSpPr txBox="1"/>
           <p:nvPr/>
         </p:nvSpPr>
         <p:spPr>
           <a:xfrm>
-            <a:off x="4343400" y="4937760"/>
-            <a:ext cx="3657600" cy="457200"/>
+            <a:off x="822960" y="1371600"/>
+            <a:ext cx="6949440" cy="4389120"/>
           </a:xfrm>
           <a:prstGeom prst="rect">
             <a:avLst/>
@@ -4667,34 +7462,127 @@
           <a:noFill/>
         </p:spPr>
         <p:txBody>
-          <a:bodyPr wrap="none">
+          <a:bodyPr wrap="square">
             <a:spAutoFit/>
           </a:bodyPr>
           <a:lstStyle/>
           <a:p>
-            <a:pPr algn="ctr">
-              <a:defRPr sz="1200">
-                <a:solidFill>
-                  <a:srgbClr val="645A54"/>
-                </a:solidFill>
-              </a:defRPr>
-            </a:pPr>
-            <a:r>
-              <a:t>Validation AbsRel vs epoch</a:t>
-            </a:r>
-          </a:p>
-        </p:txBody>
-      </p:sp>
-      <p:sp>
-        <p:nvSpPr>
-          <p:cNvPr id="8" name="TextBox 7"/>
+            <a:pPr>
+              <a:spcAft>
+                <a:spcPts val="600"/>
+              </a:spcAft>
+              <a:defRPr sz="1800">
+                <a:solidFill>
+                  <a:srgbClr val="1F1A17"/>
+                </a:solidFill>
+              </a:defRPr>
+            </a:pPr>
+            <a:r>
+              <a:t>• Monocular depth (Eigen 2014, MiDaS 2022, ZoeDepth 2023)</a:t>
+            </a:r>
+          </a:p>
+          <a:p>
+            <a:pPr>
+              <a:spcAft>
+                <a:spcPts val="600"/>
+              </a:spcAft>
+              <a:defRPr sz="1800">
+                <a:solidFill>
+                  <a:srgbClr val="1F1A17"/>
+                </a:solidFill>
+              </a:defRPr>
+            </a:pPr>
+            <a:r>
+              <a:t>• DPT dense prediction head (Ranftl 2021)</a:t>
+            </a:r>
+          </a:p>
+          <a:p>
+            <a:pPr>
+              <a:spcAft>
+                <a:spcPts val="600"/>
+              </a:spcAft>
+              <a:defRPr sz="1800">
+                <a:solidFill>
+                  <a:srgbClr val="1F1A17"/>
+                </a:solidFill>
+              </a:defRPr>
+            </a:pPr>
+            <a:r>
+              <a:t>• Depth Anything v1/v2 (Yang 2024): 1.5M labeled + 62M pseudo-labeled</a:t>
+            </a:r>
+          </a:p>
+          <a:p>
+            <a:pPr>
+              <a:spcAft>
+                <a:spcPts val="600"/>
+              </a:spcAft>
+              <a:defRPr sz="1800">
+                <a:solidFill>
+                  <a:srgbClr val="1F1A17"/>
+                </a:solidFill>
+              </a:defRPr>
+            </a:pPr>
+            <a:r>
+              <a:t>• DINOv2 backbone (Oquab 2023)</a:t>
+            </a:r>
+          </a:p>
+          <a:p>
+            <a:pPr>
+              <a:spcAft>
+                <a:spcPts val="600"/>
+              </a:spcAft>
+              <a:defRPr sz="1800">
+                <a:solidFill>
+                  <a:srgbClr val="1F1A17"/>
+                </a:solidFill>
+              </a:defRPr>
+            </a:pPr>
+            <a:r>
+              <a:t>• Knowledge distillation (Hinton 2015)</a:t>
+            </a:r>
+          </a:p>
+          <a:p>
+            <a:pPr>
+              <a:spcAft>
+                <a:spcPts val="600"/>
+              </a:spcAft>
+              <a:defRPr sz="1800">
+                <a:solidFill>
+                  <a:srgbClr val="1F1A17"/>
+                </a:solidFill>
+              </a:defRPr>
+            </a:pPr>
+            <a:r>
+              <a:t>• Distill-Any-Depth (He 2025): affine-invariant output-level distillation</a:t>
+            </a:r>
+          </a:p>
+          <a:p>
+            <a:pPr>
+              <a:spcAft>
+                <a:spcPts val="600"/>
+              </a:spcAft>
+              <a:defRPr sz="1800">
+                <a:solidFill>
+                  <a:srgbClr val="1F1A17"/>
+                </a:solidFill>
+              </a:defRPr>
+            </a:pPr>
+            <a:r>
+              <a:t>• ZoeDepth multi-scale gradient L1 (Bhat 2023)</a:t>
+            </a:r>
+          </a:p>
+        </p:txBody>
+      </p:sp>
+      <p:sp>
+        <p:nvSpPr>
+          <p:cNvPr id="5" name="TextBox 4"/>
           <p:cNvSpPr txBox="1"/>
           <p:nvPr/>
         </p:nvSpPr>
         <p:spPr>
           <a:xfrm>
-            <a:off x="8046720" y="4937760"/>
-            <a:ext cx="3657600" cy="457200"/>
+            <a:off x="7955279" y="1371600"/>
+            <a:ext cx="3840480" cy="4572000"/>
           </a:xfrm>
           <a:prstGeom prst="rect">
             <a:avLst/>
@@ -4702,20 +7590,113 @@
           <a:noFill/>
         </p:spPr>
         <p:txBody>
-          <a:bodyPr wrap="none">
+          <a:bodyPr wrap="square">
             <a:spAutoFit/>
           </a:bodyPr>
           <a:lstStyle/>
           <a:p>
-            <a:pPr algn="ctr">
-              <a:defRPr sz="1200">
-                <a:solidFill>
-                  <a:srgbClr val="645A54"/>
-                </a:solidFill>
-              </a:defRPr>
-            </a:pPr>
-            <a:r>
-              <a:t>Validation delta1 vs epoch</a:t>
+            <a:pPr>
+              <a:spcAft>
+                <a:spcPts val="600"/>
+              </a:spcAft>
+              <a:defRPr sz="1400">
+                <a:solidFill>
+                  <a:srgbClr val="1F1A17"/>
+                </a:solidFill>
+              </a:defRPr>
+            </a:pPr>
+            <a:r>
+              <a:t>• What we lift:</a:t>
+            </a:r>
+          </a:p>
+          <a:p>
+            <a:pPr>
+              <a:spcAft>
+                <a:spcPts val="600"/>
+              </a:spcAft>
+              <a:defRPr sz="1400">
+                <a:solidFill>
+                  <a:srgbClr val="1F1A17"/>
+                </a:solidFill>
+              </a:defRPr>
+            </a:pPr>
+            <a:r>
+              <a:t>• Affine-invariant output-level distillation → He 2025</a:t>
+            </a:r>
+          </a:p>
+          <a:p>
+            <a:pPr>
+              <a:spcAft>
+                <a:spcPts val="600"/>
+              </a:spcAft>
+              <a:defRPr sz="1400">
+                <a:solidFill>
+                  <a:srgbClr val="1F1A17"/>
+                </a:solidFill>
+              </a:defRPr>
+            </a:pPr>
+            <a:r>
+              <a:t>• Multi-scale gradient L1 → Bhat 2023</a:t>
+            </a:r>
+          </a:p>
+          <a:p>
+            <a:pPr>
+              <a:spcAft>
+                <a:spcPts val="600"/>
+              </a:spcAft>
+              <a:defRPr sz="1400">
+                <a:solidFill>
+                  <a:srgbClr val="1F1A17"/>
+                </a:solidFill>
+              </a:defRPr>
+            </a:pPr>
+            <a:r>
+              <a:t>• Pretrained checkpoints → Yang 2024 (HuggingFace)</a:t>
+            </a:r>
+          </a:p>
+          <a:p>
+            <a:pPr>
+              <a:spcAft>
+                <a:spcPts val="600"/>
+              </a:spcAft>
+              <a:defRPr sz="1400">
+                <a:solidFill>
+                  <a:srgbClr val="1F1A17"/>
+                </a:solidFill>
+              </a:defRPr>
+            </a:pPr>
+            <a:r>
+              <a:t>• What we build new:</a:t>
+            </a:r>
+          </a:p>
+          <a:p>
+            <a:pPr>
+              <a:spcAft>
+                <a:spcPts val="600"/>
+              </a:spcAft>
+              <a:defRPr sz="1400">
+                <a:solidFill>
+                  <a:srgbClr val="1F1A17"/>
+                </a:solidFill>
+              </a:defRPr>
+            </a:pPr>
+            <a:r>
+              <a:t>• Sweep harness, isolation, configs</a:t>
+            </a:r>
+          </a:p>
+          <a:p>
+            <a:pPr>
+              <a:spcAft>
+                <a:spcPts val="600"/>
+              </a:spcAft>
+              <a:defRPr sz="1400">
+                <a:solidFill>
+                  <a:srgbClr val="1F1A17"/>
+                </a:solidFill>
+              </a:defRPr>
+            </a:pPr>
+            <a:r>
+              <a:t>• Three-axis controlled study (α, β, lr)</a:t>
             </a:r>
           </a:p>
         </p:txBody>
@@ -4754,8 +7735,8 @@
         </p:nvSpPr>
         <p:spPr>
           <a:xfrm>
-            <a:off x="502920" y="274320"/>
-            <a:ext cx="11155680" cy="914400"/>
+            <a:off x="502920" y="0"/>
+            <a:ext cx="11155680" cy="320040"/>
           </a:xfrm>
           <a:prstGeom prst="rect">
             <a:avLst/>
@@ -4768,291 +7749,29 @@
           </a:bodyPr>
           <a:lstStyle/>
           <a:p>
-            <a:r>
-              <a:rPr sz="2800" b="1">
-                <a:solidFill>
-                  <a:srgbClr val="1F1A17"/>
-                </a:solidFill>
-              </a:rPr>
-              <a:t>Test Results</a:t>
-            </a:r>
-          </a:p>
-        </p:txBody>
-      </p:sp>
-      <p:sp>
-        <p:nvSpPr>
-          <p:cNvPr id="3" name="Rectangle 2"/>
-          <p:cNvSpPr/>
-          <p:nvPr/>
-        </p:nvSpPr>
-        <p:spPr>
-          <a:xfrm>
-            <a:off x="731520" y="1097280"/>
-            <a:ext cx="2011680" cy="1143000"/>
-          </a:xfrm>
-          <a:prstGeom prst="rect">
-            <a:avLst/>
-          </a:prstGeom>
-          <a:solidFill>
-            <a:srgbClr val="FFFAF1"/>
-          </a:solidFill>
-          <a:ln>
-            <a:solidFill>
-              <a:srgbClr val="DCCDC0"/>
-            </a:solidFill>
-          </a:ln>
-        </p:spPr>
-        <p:style>
-          <a:lnRef idx="1">
-            <a:schemeClr val="accent1"/>
-          </a:lnRef>
-          <a:fillRef idx="3">
-            <a:schemeClr val="accent1"/>
-          </a:fillRef>
-          <a:effectRef idx="2">
-            <a:schemeClr val="accent1"/>
-          </a:effectRef>
-          <a:fontRef idx="minor">
-            <a:schemeClr val="lt1"/>
-          </a:fontRef>
-        </p:style>
-        <p:txBody>
-          <a:bodyPr rtlCol="0" anchor="ctr"/>
-          <a:lstStyle/>
-          <a:p>
-            <a:pPr algn="ctr">
-              <a:defRPr sz="1300">
-                <a:solidFill>
-                  <a:srgbClr val="645A54"/>
-                </a:solidFill>
-              </a:defRPr>
-            </a:pPr>
-            <a:r>
-              <a:t>Zero-shot AbsRel</a:t>
-            </a:r>
-          </a:p>
-          <a:p>
-            <a:pPr>
-              <a:defRPr sz="2400" b="1">
+            <a:pPr>
+              <a:defRPr sz="1100" b="1">
                 <a:solidFill>
                   <a:srgbClr val="A84425"/>
                 </a:solidFill>
               </a:defRPr>
             </a:pPr>
             <a:r>
-              <a:t>0.1467</a:t>
-            </a:r>
-          </a:p>
-        </p:txBody>
-      </p:sp>
-      <p:sp>
-        <p:nvSpPr>
-          <p:cNvPr id="4" name="Rectangle 3"/>
-          <p:cNvSpPr/>
-          <p:nvPr/>
-        </p:nvSpPr>
-        <p:spPr>
-          <a:xfrm>
-            <a:off x="2971800" y="1097280"/>
-            <a:ext cx="2011680" cy="1143000"/>
-          </a:xfrm>
-          <a:prstGeom prst="rect">
-            <a:avLst/>
-          </a:prstGeom>
-          <a:solidFill>
-            <a:srgbClr val="FFFAF1"/>
-          </a:solidFill>
-          <a:ln>
-            <a:solidFill>
-              <a:srgbClr val="DCCDC0"/>
-            </a:solidFill>
-          </a:ln>
-        </p:spPr>
-        <p:style>
-          <a:lnRef idx="1">
-            <a:schemeClr val="accent1"/>
-          </a:lnRef>
-          <a:fillRef idx="3">
-            <a:schemeClr val="accent1"/>
-          </a:fillRef>
-          <a:effectRef idx="2">
-            <a:schemeClr val="accent1"/>
-          </a:effectRef>
-          <a:fontRef idx="minor">
-            <a:schemeClr val="lt1"/>
-          </a:fontRef>
-        </p:style>
-        <p:txBody>
-          <a:bodyPr rtlCol="0" anchor="ctr"/>
-          <a:lstStyle/>
-          <a:p>
-            <a:pPr algn="ctr">
-              <a:defRPr sz="1300">
-                <a:solidFill>
-                  <a:srgbClr val="645A54"/>
-                </a:solidFill>
-              </a:defRPr>
-            </a:pPr>
-            <a:r>
-              <a:t>Zero-shot delta1</a:t>
-            </a:r>
-          </a:p>
-          <a:p>
-            <a:pPr>
-              <a:defRPr sz="2400" b="1">
-                <a:solidFill>
-                  <a:srgbClr val="A84425"/>
-                </a:solidFill>
-              </a:defRPr>
-            </a:pPr>
-            <a:r>
-              <a:t>0.8381</a:t>
-            </a:r>
-          </a:p>
-        </p:txBody>
-      </p:sp>
-      <p:sp>
-        <p:nvSpPr>
-          <p:cNvPr id="5" name="Rectangle 4"/>
-          <p:cNvSpPr/>
-          <p:nvPr/>
-        </p:nvSpPr>
-        <p:spPr>
-          <a:xfrm>
-            <a:off x="5212080" y="1097280"/>
-            <a:ext cx="2011680" cy="1143000"/>
-          </a:xfrm>
-          <a:prstGeom prst="rect">
-            <a:avLst/>
-          </a:prstGeom>
-          <a:solidFill>
-            <a:srgbClr val="FFFAF1"/>
-          </a:solidFill>
-          <a:ln>
-            <a:solidFill>
-              <a:srgbClr val="DCCDC0"/>
-            </a:solidFill>
-          </a:ln>
-        </p:spPr>
-        <p:style>
-          <a:lnRef idx="1">
-            <a:schemeClr val="accent1"/>
-          </a:lnRef>
-          <a:fillRef idx="3">
-            <a:schemeClr val="accent1"/>
-          </a:fillRef>
-          <a:effectRef idx="2">
-            <a:schemeClr val="accent1"/>
-          </a:effectRef>
-          <a:fontRef idx="minor">
-            <a:schemeClr val="lt1"/>
-          </a:fontRef>
-        </p:style>
-        <p:txBody>
-          <a:bodyPr rtlCol="0" anchor="ctr"/>
-          <a:lstStyle/>
-          <a:p>
-            <a:pPr algn="ctr">
-              <a:defRPr sz="1300">
-                <a:solidFill>
-                  <a:srgbClr val="645A54"/>
-                </a:solidFill>
-              </a:defRPr>
-            </a:pPr>
-            <a:r>
-              <a:t>Fine-tuned AbsRel</a:t>
-            </a:r>
-          </a:p>
-          <a:p>
-            <a:pPr>
-              <a:defRPr sz="2400" b="1">
-                <a:solidFill>
-                  <a:srgbClr val="A84425"/>
-                </a:solidFill>
-              </a:defRPr>
-            </a:pPr>
-            <a:r>
-              <a:t>0.1810</a:t>
-            </a:r>
-          </a:p>
-        </p:txBody>
-      </p:sp>
-      <p:sp>
-        <p:nvSpPr>
-          <p:cNvPr id="6" name="Rectangle 5"/>
-          <p:cNvSpPr/>
-          <p:nvPr/>
-        </p:nvSpPr>
-        <p:spPr>
-          <a:xfrm>
-            <a:off x="7452360" y="1097280"/>
-            <a:ext cx="2011680" cy="1143000"/>
-          </a:xfrm>
-          <a:prstGeom prst="rect">
-            <a:avLst/>
-          </a:prstGeom>
-          <a:solidFill>
-            <a:srgbClr val="FFFAF1"/>
-          </a:solidFill>
-          <a:ln>
-            <a:solidFill>
-              <a:srgbClr val="DCCDC0"/>
-            </a:solidFill>
-          </a:ln>
-        </p:spPr>
-        <p:style>
-          <a:lnRef idx="1">
-            <a:schemeClr val="accent1"/>
-          </a:lnRef>
-          <a:fillRef idx="3">
-            <a:schemeClr val="accent1"/>
-          </a:fillRef>
-          <a:effectRef idx="2">
-            <a:schemeClr val="accent1"/>
-          </a:effectRef>
-          <a:fontRef idx="minor">
-            <a:schemeClr val="lt1"/>
-          </a:fontRef>
-        </p:style>
-        <p:txBody>
-          <a:bodyPr rtlCol="0" anchor="ctr"/>
-          <a:lstStyle/>
-          <a:p>
-            <a:pPr algn="ctr">
-              <a:defRPr sz="1300">
-                <a:solidFill>
-                  <a:srgbClr val="645A54"/>
-                </a:solidFill>
-              </a:defRPr>
-            </a:pPr>
-            <a:r>
-              <a:t>Fine-tuned delta1</a:t>
-            </a:r>
-          </a:p>
-          <a:p>
-            <a:pPr>
-              <a:defRPr sz="2400" b="1">
-                <a:solidFill>
-                  <a:srgbClr val="A84425"/>
-                </a:solidFill>
-              </a:defRPr>
-            </a:pPr>
-            <a:r>
-              <a:t>0.7163</a:t>
-            </a:r>
-          </a:p>
-        </p:txBody>
-      </p:sp>
-      <p:sp>
-        <p:nvSpPr>
-          <p:cNvPr id="7" name="TextBox 6"/>
+              <a:t>PROPOSED APPROACH</a:t>
+            </a:r>
+          </a:p>
+        </p:txBody>
+      </p:sp>
+      <p:sp>
+        <p:nvSpPr>
+          <p:cNvPr id="3" name="TextBox 2"/>
           <p:cNvSpPr txBox="1"/>
           <p:nvPr/>
         </p:nvSpPr>
         <p:spPr>
           <a:xfrm>
-            <a:off x="731520" y="2743200"/>
-            <a:ext cx="6583680" cy="1828800"/>
+            <a:off x="502920" y="274320"/>
+            <a:ext cx="11155680" cy="914400"/>
           </a:xfrm>
           <a:prstGeom prst="rect">
             <a:avLst/>
@@ -5065,76 +7784,208 @@
           </a:bodyPr>
           <a:lstStyle/>
           <a:p>
-            <a:pPr>
-              <a:spcAft>
-                <a:spcPts val="800"/>
-              </a:spcAft>
-              <a:defRPr sz="2000">
-                <a:solidFill>
-                  <a:srgbClr val="1F1A17"/>
-                </a:solidFill>
-              </a:defRPr>
-            </a:pPr>
-            <a:r>
-              <a:t>AbsRel changed by +0.0343 (higher is worse here)</a:t>
-            </a:r>
-          </a:p>
-          <a:p>
-            <a:pPr>
-              <a:spcAft>
-                <a:spcPts val="800"/>
-              </a:spcAft>
-              <a:defRPr sz="2000">
-                <a:solidFill>
-                  <a:srgbClr val="1F1A17"/>
-                </a:solidFill>
-              </a:defRPr>
-            </a:pPr>
-            <a:r>
-              <a:t>delta1 changed by -0.1218 (lower is worse here)</a:t>
-            </a:r>
-          </a:p>
-          <a:p>
-            <a:pPr>
-              <a:spcAft>
-                <a:spcPts val="800"/>
-              </a:spcAft>
-              <a:defRPr sz="2000">
-                <a:solidFill>
-                  <a:srgbClr val="1F1A17"/>
-                </a:solidFill>
-              </a:defRPr>
-            </a:pPr>
-            <a:r>
-              <a:t>Conclusion: the small fine-tune overfit the PoC subset and hurt held-out test performance</a:t>
-            </a:r>
-          </a:p>
-        </p:txBody>
-      </p:sp>
-      <p:pic>
-        <p:nvPicPr>
-          <p:cNvPr id="8" name="Picture 7" descr="test_absrel_histogram.png"/>
-          <p:cNvPicPr>
-            <a:picLocks noChangeAspect="1"/>
-          </p:cNvPicPr>
-          <p:nvPr/>
-        </p:nvPicPr>
-        <p:blipFill>
-          <a:blip r:embed="rId2"/>
-          <a:stretch>
-            <a:fillRect/>
-          </a:stretch>
-        </p:blipFill>
-        <p:spPr>
-          <a:xfrm>
-            <a:off x="7315200" y="2560320"/>
-            <a:ext cx="4114800" cy="2743200"/>
-          </a:xfrm>
-          <a:prstGeom prst="rect">
-            <a:avLst/>
-          </a:prstGeom>
-        </p:spPr>
-      </p:pic>
+            <a:r>
+              <a:rPr sz="3000" b="1">
+                <a:solidFill>
+                  <a:srgbClr val="1F1A17"/>
+                </a:solidFill>
+              </a:rPr>
+              <a:t>Architecture</a:t>
+            </a:r>
+          </a:p>
+          <a:p>
+            <a:r>
+              <a:rPr sz="1400">
+                <a:solidFill>
+                  <a:srgbClr val="645A54"/>
+                </a:solidFill>
+              </a:rPr>
+              <a:t>Student Depth Anything Small  +  frozen Depth Anything Large teacher</a:t>
+            </a:r>
+          </a:p>
+        </p:txBody>
+      </p:sp>
+      <p:sp>
+        <p:nvSpPr>
+          <p:cNvPr id="4" name="TextBox 3"/>
+          <p:cNvSpPr txBox="1"/>
+          <p:nvPr/>
+        </p:nvSpPr>
+        <p:spPr>
+          <a:xfrm>
+            <a:off x="822960" y="1554480"/>
+            <a:ext cx="10515600" cy="2743200"/>
+          </a:xfrm>
+          <a:prstGeom prst="rect">
+            <a:avLst/>
+          </a:prstGeom>
+          <a:noFill/>
+        </p:spPr>
+        <p:txBody>
+          <a:bodyPr wrap="square">
+            <a:spAutoFit/>
+          </a:bodyPr>
+          <a:lstStyle/>
+          <a:p>
+            <a:pPr>
+              <a:spcAft>
+                <a:spcPts val="600"/>
+              </a:spcAft>
+              <a:defRPr sz="1800">
+                <a:solidFill>
+                  <a:srgbClr val="1F1A17"/>
+                </a:solidFill>
+              </a:defRPr>
+            </a:pPr>
+            <a:r>
+              <a:t>• Student: DINOv2 ViT-S/14 + DPT head, ~25M params, trainable</a:t>
+            </a:r>
+          </a:p>
+          <a:p>
+            <a:pPr>
+              <a:spcAft>
+                <a:spcPts val="600"/>
+              </a:spcAft>
+              <a:defRPr sz="1800">
+                <a:solidFill>
+                  <a:srgbClr val="1F1A17"/>
+                </a:solidFill>
+              </a:defRPr>
+            </a:pPr>
+            <a:r>
+              <a:t>• Teacher: DINOv2 ViT-L/14 + DPT head, ~335M params, frozen</a:t>
+            </a:r>
+          </a:p>
+          <a:p>
+            <a:pPr>
+              <a:spcAft>
+                <a:spcPts val="600"/>
+              </a:spcAft>
+              <a:defRPr sz="1800">
+                <a:solidFill>
+                  <a:srgbClr val="1F1A17"/>
+                </a:solidFill>
+              </a:defRPr>
+            </a:pPr>
+            <a:r>
+              <a:t>• Input: RGB 256×256, ImageNet mean/std normalization</a:t>
+            </a:r>
+          </a:p>
+          <a:p>
+            <a:pPr>
+              <a:spcAft>
+                <a:spcPts val="600"/>
+              </a:spcAft>
+              <a:defRPr sz="1800">
+                <a:solidFill>
+                  <a:srgbClr val="1F1A17"/>
+                </a:solidFill>
+              </a:defRPr>
+            </a:pPr>
+            <a:r>
+              <a:t>• Output: relative depth, bilinearly upsampled to GT size</a:t>
+            </a:r>
+          </a:p>
+          <a:p>
+            <a:pPr>
+              <a:spcAft>
+                <a:spcPts val="600"/>
+              </a:spcAft>
+              <a:defRPr sz="1800">
+                <a:solidFill>
+                  <a:srgbClr val="1F1A17"/>
+                </a:solidFill>
+              </a:defRPr>
+            </a:pPr>
+            <a:r>
+              <a:t>• All loss terms computed on aligned spatial size</a:t>
+            </a:r>
+          </a:p>
+        </p:txBody>
+      </p:sp>
+      <p:sp>
+        <p:nvSpPr>
+          <p:cNvPr id="5" name="TextBox 4"/>
+          <p:cNvSpPr txBox="1"/>
+          <p:nvPr/>
+        </p:nvSpPr>
+        <p:spPr>
+          <a:xfrm>
+            <a:off x="822960" y="4480560"/>
+            <a:ext cx="10515600" cy="1828800"/>
+          </a:xfrm>
+          <a:prstGeom prst="rect">
+            <a:avLst/>
+          </a:prstGeom>
+          <a:noFill/>
+        </p:spPr>
+        <p:txBody>
+          <a:bodyPr wrap="square">
+            <a:spAutoFit/>
+          </a:bodyPr>
+          <a:lstStyle/>
+          <a:p>
+            <a:pPr>
+              <a:spcAft>
+                <a:spcPts val="600"/>
+              </a:spcAft>
+              <a:defRPr sz="1600">
+                <a:solidFill>
+                  <a:srgbClr val="645A54"/>
+                </a:solidFill>
+              </a:defRPr>
+            </a:pPr>
+            <a:r>
+              <a:t>• Why two models in parallel?</a:t>
+            </a:r>
+          </a:p>
+          <a:p>
+            <a:pPr>
+              <a:spcAft>
+                <a:spcPts val="600"/>
+              </a:spcAft>
+              <a:defRPr sz="1600">
+                <a:solidFill>
+                  <a:srgbClr val="645A54"/>
+                </a:solidFill>
+              </a:defRPr>
+            </a:pPr>
+            <a:r>
+              <a:t>• The teacher provides a dense, low-noise per-pixel target on every training image</a:t>
+            </a:r>
+          </a:p>
+          <a:p>
+            <a:pPr>
+              <a:spcAft>
+                <a:spcPts val="600"/>
+              </a:spcAft>
+              <a:defRPr sz="1600">
+                <a:solidFill>
+                  <a:srgbClr val="645A54"/>
+                </a:solidFill>
+              </a:defRPr>
+            </a:pPr>
+            <a:r>
+              <a:t>• Ground truth is sparse and noisy for far-field pixels; teacher complements it</a:t>
+            </a:r>
+          </a:p>
+          <a:p>
+            <a:pPr>
+              <a:spcAft>
+                <a:spcPts val="600"/>
+              </a:spcAft>
+              <a:defRPr sz="1600">
+                <a:solidFill>
+                  <a:srgbClr val="645A54"/>
+                </a:solidFill>
+              </a:defRPr>
+            </a:pPr>
+            <a:r>
+              <a:t>• Frozen weights → deterministic supervision, no co-adaptation</a:t>
+            </a:r>
+          </a:p>
+        </p:txBody>
+      </p:sp>
     </p:spTree>
   </p:cSld>
   <p:clrMapOvr>
@@ -5169,8 +8020,8 @@
         </p:nvSpPr>
         <p:spPr>
           <a:xfrm>
-            <a:off x="502920" y="274320"/>
-            <a:ext cx="11155680" cy="914400"/>
+            <a:off x="502920" y="0"/>
+            <a:ext cx="11155680" cy="320040"/>
           </a:xfrm>
           <a:prstGeom prst="rect">
             <a:avLst/>
@@ -5183,41 +8034,52 @@
           </a:bodyPr>
           <a:lstStyle/>
           <a:p>
-            <a:r>
-              <a:rPr sz="2800" b="1">
+            <a:pPr>
+              <a:defRPr sz="1100" b="1">
+                <a:solidFill>
+                  <a:srgbClr val="A84425"/>
+                </a:solidFill>
+              </a:defRPr>
+            </a:pPr>
+            <a:r>
+              <a:t>PROPOSED APPROACH</a:t>
+            </a:r>
+          </a:p>
+        </p:txBody>
+      </p:sp>
+      <p:sp>
+        <p:nvSpPr>
+          <p:cNvPr id="3" name="TextBox 2"/>
+          <p:cNvSpPr txBox="1"/>
+          <p:nvPr/>
+        </p:nvSpPr>
+        <p:spPr>
+          <a:xfrm>
+            <a:off x="502920" y="274320"/>
+            <a:ext cx="11155680" cy="914400"/>
+          </a:xfrm>
+          <a:prstGeom prst="rect">
+            <a:avLst/>
+          </a:prstGeom>
+          <a:noFill/>
+        </p:spPr>
+        <p:txBody>
+          <a:bodyPr wrap="square">
+            <a:spAutoFit/>
+          </a:bodyPr>
+          <a:lstStyle/>
+          <a:p>
+            <a:r>
+              <a:rPr sz="3000" b="1">
                 <a:solidFill>
                   <a:srgbClr val="1F1A17"/>
                 </a:solidFill>
               </a:rPr>
-              <a:t>Qualitative Example: Before Fine-Tuning</a:t>
-            </a:r>
-          </a:p>
-        </p:txBody>
-      </p:sp>
-      <p:pic>
-        <p:nvPicPr>
-          <p:cNvPr id="3" name="Picture 2" descr="000000.png"/>
-          <p:cNvPicPr>
-            <a:picLocks noChangeAspect="1"/>
-          </p:cNvPicPr>
-          <p:nvPr/>
-        </p:nvPicPr>
-        <p:blipFill>
-          <a:blip r:embed="rId2"/>
-          <a:stretch>
-            <a:fillRect/>
-          </a:stretch>
-        </p:blipFill>
-        <p:spPr>
-          <a:xfrm>
-            <a:off x="411480" y="1005840"/>
-            <a:ext cx="11338560" cy="3239589"/>
-          </a:xfrm>
-          <a:prstGeom prst="rect">
-            <a:avLst/>
-          </a:prstGeom>
-        </p:spPr>
-      </p:pic>
+              <a:t>Loss Function</a:t>
+            </a:r>
+          </a:p>
+        </p:txBody>
+      </p:sp>
       <p:sp>
         <p:nvSpPr>
           <p:cNvPr id="4" name="TextBox 3"/>
@@ -5226,8 +8088,8 @@
         </p:nvSpPr>
         <p:spPr>
           <a:xfrm>
-            <a:off x="457200" y="6126480"/>
-            <a:ext cx="11155680" cy="457200"/>
+            <a:off x="822960" y="1371600"/>
+            <a:ext cx="10515600" cy="914400"/>
           </a:xfrm>
           <a:prstGeom prst="rect">
             <a:avLst/>
@@ -5241,14 +8103,142 @@
           <a:lstStyle/>
           <a:p>
             <a:pPr algn="ctr">
-              <a:defRPr sz="1200">
-                <a:solidFill>
-                  <a:srgbClr val="645A54"/>
-                </a:solidFill>
-              </a:defRPr>
-            </a:pPr>
-            <a:r>
-              <a:t>Zero-shot prediction panel: RGB | ground truth | predicted depth | error</a:t>
+              <a:defRPr sz="2000" b="1">
+                <a:solidFill>
+                  <a:srgbClr val="A84425"/>
+                </a:solidFill>
+              </a:defRPr>
+            </a:pPr>
+            <a:r>
+              <a:t>L_total = (1 – α) · L_base(student, GT)  +  α · L_distill(student, teacher)  +  β · L_grad(student, GT)</a:t>
+            </a:r>
+          </a:p>
+        </p:txBody>
+      </p:sp>
+      <p:sp>
+        <p:nvSpPr>
+          <p:cNvPr id="5" name="TextBox 4"/>
+          <p:cNvSpPr txBox="1"/>
+          <p:nvPr/>
+        </p:nvSpPr>
+        <p:spPr>
+          <a:xfrm>
+            <a:off x="822960" y="2468880"/>
+            <a:ext cx="10515600" cy="3840480"/>
+          </a:xfrm>
+          <a:prstGeom prst="rect">
+            <a:avLst/>
+          </a:prstGeom>
+          <a:noFill/>
+        </p:spPr>
+        <p:txBody>
+          <a:bodyPr wrap="square">
+            <a:spAutoFit/>
+          </a:bodyPr>
+          <a:lstStyle/>
+          <a:p>
+            <a:pPr>
+              <a:spcAft>
+                <a:spcPts val="600"/>
+              </a:spcAft>
+              <a:defRPr sz="1800">
+                <a:solidFill>
+                  <a:srgbClr val="1F1A17"/>
+                </a:solidFill>
+              </a:defRPr>
+            </a:pPr>
+            <a:r>
+              <a:t>• L_base: affine-invariant L1 against NYU-v2 ground truth</a:t>
+            </a:r>
+          </a:p>
+          <a:p>
+            <a:pPr>
+              <a:spcAft>
+                <a:spcPts val="600"/>
+              </a:spcAft>
+              <a:defRPr sz="1800">
+                <a:solidFill>
+                  <a:srgbClr val="1F1A17"/>
+                </a:solidFill>
+              </a:defRPr>
+            </a:pPr>
+            <a:r>
+              <a:t>• L_distill: affine-invariant L1 against frozen teacher prediction</a:t>
+            </a:r>
+          </a:p>
+          <a:p>
+            <a:pPr>
+              <a:spcAft>
+                <a:spcPts val="600"/>
+              </a:spcAft>
+              <a:defRPr sz="1800">
+                <a:solidFill>
+                  <a:srgbClr val="1F1A17"/>
+                </a:solidFill>
+              </a:defRPr>
+            </a:pPr>
+            <a:r>
+              <a:t>• L_grad: multi-scale Sobel-style gradient L1 (scales 1, 2, 4)</a:t>
+            </a:r>
+          </a:p>
+          <a:p>
+            <a:pPr>
+              <a:spcAft>
+                <a:spcPts val="600"/>
+              </a:spcAft>
+              <a:defRPr sz="1800">
+                <a:solidFill>
+                  <a:srgbClr val="1F1A17"/>
+                </a:solidFill>
+              </a:defRPr>
+            </a:pPr>
+            <a:r>
+              <a:t>• Robust normalization: per-sample median + MAD before L1</a:t>
+            </a:r>
+          </a:p>
+          <a:p>
+            <a:pPr>
+              <a:spcAft>
+                <a:spcPts val="600"/>
+              </a:spcAft>
+              <a:defRPr sz="1800">
+                <a:solidFill>
+                  <a:srgbClr val="1F1A17"/>
+                </a:solidFill>
+              </a:defRPr>
+            </a:pPr>
+            <a:r>
+              <a:t>• Why MAD instead of std: stable under specular highlights, near-foreground outliers</a:t>
+            </a:r>
+          </a:p>
+          <a:p>
+            <a:pPr>
+              <a:spcAft>
+                <a:spcPts val="600"/>
+              </a:spcAft>
+              <a:defRPr sz="1800">
+                <a:solidFill>
+                  <a:srgbClr val="1F1A17"/>
+                </a:solidFill>
+              </a:defRPr>
+            </a:pPr>
+            <a:r>
+              <a:t>• α = 0 → pure supervised fine-tune     α = 1 → pure distillation</a:t>
+            </a:r>
+          </a:p>
+          <a:p>
+            <a:pPr>
+              <a:spcAft>
+                <a:spcPts val="600"/>
+              </a:spcAft>
+              <a:defRPr sz="1800">
+                <a:solidFill>
+                  <a:srgbClr val="1F1A17"/>
+                </a:solidFill>
+              </a:defRPr>
+            </a:pPr>
+            <a:r>
+              <a:t>• β controls boundary sharpness without affecting overall regression</a:t>
             </a:r>
           </a:p>
         </p:txBody>
@@ -5287,8 +8277,8 @@
         </p:nvSpPr>
         <p:spPr>
           <a:xfrm>
-            <a:off x="502920" y="274320"/>
-            <a:ext cx="11155680" cy="914400"/>
+            <a:off x="502920" y="0"/>
+            <a:ext cx="11155680" cy="320040"/>
           </a:xfrm>
           <a:prstGeom prst="rect">
             <a:avLst/>
@@ -5301,41 +8291,52 @@
           </a:bodyPr>
           <a:lstStyle/>
           <a:p>
-            <a:r>
-              <a:rPr sz="2800" b="1">
+            <a:pPr>
+              <a:defRPr sz="1100" b="1">
+                <a:solidFill>
+                  <a:srgbClr val="A84425"/>
+                </a:solidFill>
+              </a:defRPr>
+            </a:pPr>
+            <a:r>
+              <a:t>PROPOSED APPROACH</a:t>
+            </a:r>
+          </a:p>
+        </p:txBody>
+      </p:sp>
+      <p:sp>
+        <p:nvSpPr>
+          <p:cNvPr id="3" name="TextBox 2"/>
+          <p:cNvSpPr txBox="1"/>
+          <p:nvPr/>
+        </p:nvSpPr>
+        <p:spPr>
+          <a:xfrm>
+            <a:off x="502920" y="274320"/>
+            <a:ext cx="11155680" cy="914400"/>
+          </a:xfrm>
+          <a:prstGeom prst="rect">
+            <a:avLst/>
+          </a:prstGeom>
+          <a:noFill/>
+        </p:spPr>
+        <p:txBody>
+          <a:bodyPr wrap="square">
+            <a:spAutoFit/>
+          </a:bodyPr>
+          <a:lstStyle/>
+          <a:p>
+            <a:r>
+              <a:rPr sz="3000" b="1">
                 <a:solidFill>
                   <a:srgbClr val="1F1A17"/>
                 </a:solidFill>
               </a:rPr>
-              <a:t>Qualitative Example: After Fine-Tuning</a:t>
-            </a:r>
-          </a:p>
-        </p:txBody>
-      </p:sp>
-      <p:pic>
-        <p:nvPicPr>
-          <p:cNvPr id="3" name="Picture 2" descr="000000.png"/>
-          <p:cNvPicPr>
-            <a:picLocks noChangeAspect="1"/>
-          </p:cNvPicPr>
-          <p:nvPr/>
-        </p:nvPicPr>
-        <p:blipFill>
-          <a:blip r:embed="rId2"/>
-          <a:stretch>
-            <a:fillRect/>
-          </a:stretch>
-        </p:blipFill>
-        <p:spPr>
-          <a:xfrm>
-            <a:off x="411480" y="1005840"/>
-            <a:ext cx="11338560" cy="3239589"/>
-          </a:xfrm>
-          <a:prstGeom prst="rect">
-            <a:avLst/>
-          </a:prstGeom>
-        </p:spPr>
-      </p:pic>
+              <a:t>Training Procedure</a:t>
+            </a:r>
+          </a:p>
+        </p:txBody>
+      </p:sp>
       <p:sp>
         <p:nvSpPr>
           <p:cNvPr id="4" name="TextBox 3"/>
@@ -5344,8 +8345,8 @@
         </p:nvSpPr>
         <p:spPr>
           <a:xfrm>
-            <a:off x="457200" y="6126480"/>
-            <a:ext cx="11155680" cy="457200"/>
+            <a:off x="822960" y="1371600"/>
+            <a:ext cx="7132320" cy="4114800"/>
           </a:xfrm>
           <a:prstGeom prst="rect">
             <a:avLst/>
@@ -5353,20 +8354,196 @@
           <a:noFill/>
         </p:spPr>
         <p:txBody>
-          <a:bodyPr wrap="none">
+          <a:bodyPr wrap="square">
             <a:spAutoFit/>
           </a:bodyPr>
           <a:lstStyle/>
           <a:p>
-            <a:pPr algn="ctr">
-              <a:defRPr sz="1200">
-                <a:solidFill>
-                  <a:srgbClr val="645A54"/>
-                </a:solidFill>
-              </a:defRPr>
-            </a:pPr>
-            <a:r>
-              <a:t>Fine-tuned prediction panel for the same sample</a:t>
+            <a:pPr>
+              <a:spcAft>
+                <a:spcPts val="600"/>
+              </a:spcAft>
+              <a:defRPr sz="1800">
+                <a:solidFill>
+                  <a:srgbClr val="1F1A17"/>
+                </a:solidFill>
+              </a:defRPr>
+            </a:pPr>
+            <a:r>
+              <a:t>• Optimizer: AdamW, weight decay 1e-4, grad clip @ L2 norm 1.0</a:t>
+            </a:r>
+          </a:p>
+          <a:p>
+            <a:pPr>
+              <a:spcAft>
+                <a:spcPts val="600"/>
+              </a:spcAft>
+              <a:defRPr sz="1800">
+                <a:solidFill>
+                  <a:srgbClr val="1F1A17"/>
+                </a:solidFill>
+              </a:defRPr>
+            </a:pPr>
+            <a:r>
+              <a:t>• Batch size: 1 (image_size=256 to fit 4 GB GPU)</a:t>
+            </a:r>
+          </a:p>
+          <a:p>
+            <a:pPr>
+              <a:spcAft>
+                <a:spcPts val="600"/>
+              </a:spcAft>
+              <a:defRPr sz="1800">
+                <a:solidFill>
+                  <a:srgbClr val="1F1A17"/>
+                </a:solidFill>
+              </a:defRPr>
+            </a:pPr>
+            <a:r>
+              <a:t>• Epochs: 2 (small-data PoC regime)</a:t>
+            </a:r>
+          </a:p>
+          <a:p>
+            <a:pPr>
+              <a:spcAft>
+                <a:spcPts val="600"/>
+              </a:spcAft>
+              <a:defRPr sz="1800">
+                <a:solidFill>
+                  <a:srgbClr val="1F1A17"/>
+                </a:solidFill>
+              </a:defRPr>
+            </a:pPr>
+            <a:r>
+              <a:t>• AMP mixed precision when CUDA available</a:t>
+            </a:r>
+          </a:p>
+          <a:p>
+            <a:pPr>
+              <a:spcAft>
+                <a:spcPts val="600"/>
+              </a:spcAft>
+              <a:defRPr sz="1800">
+                <a:solidFill>
+                  <a:srgbClr val="1F1A17"/>
+                </a:solidFill>
+              </a:defRPr>
+            </a:pPr>
+            <a:r>
+              <a:t>• Teacher loaded once, frozen, never updated</a:t>
+            </a:r>
+          </a:p>
+          <a:p>
+            <a:pPr>
+              <a:spcAft>
+                <a:spcPts val="600"/>
+              </a:spcAft>
+              <a:defRPr sz="1800">
+                <a:solidFill>
+                  <a:srgbClr val="1F1A17"/>
+                </a:solidFill>
+              </a:defRPr>
+            </a:pPr>
+            <a:r>
+              <a:t>• Validation AbsRel selects the best checkpoint</a:t>
+            </a:r>
+          </a:p>
+        </p:txBody>
+      </p:sp>
+      <p:sp>
+        <p:nvSpPr>
+          <p:cNvPr id="5" name="TextBox 4"/>
+          <p:cNvSpPr txBox="1"/>
+          <p:nvPr/>
+        </p:nvSpPr>
+        <p:spPr>
+          <a:xfrm>
+            <a:off x="8138160" y="1554480"/>
+            <a:ext cx="3657600" cy="3657600"/>
+          </a:xfrm>
+          <a:prstGeom prst="rect">
+            <a:avLst/>
+          </a:prstGeom>
+          <a:noFill/>
+        </p:spPr>
+        <p:txBody>
+          <a:bodyPr wrap="square">
+            <a:spAutoFit/>
+          </a:bodyPr>
+          <a:lstStyle/>
+          <a:p>
+            <a:pPr>
+              <a:spcAft>
+                <a:spcPts val="600"/>
+              </a:spcAft>
+              <a:defRPr sz="1500">
+                <a:solidFill>
+                  <a:srgbClr val="1F1A17"/>
+                </a:solidFill>
+              </a:defRPr>
+            </a:pPr>
+            <a:r>
+              <a:t>• Sweep harness:</a:t>
+            </a:r>
+          </a:p>
+          <a:p>
+            <a:pPr>
+              <a:spcAft>
+                <a:spcPts val="600"/>
+              </a:spcAft>
+              <a:defRPr sz="1500">
+                <a:solidFill>
+                  <a:srgbClr val="1F1A17"/>
+                </a:solidFill>
+              </a:defRPr>
+            </a:pPr>
+            <a:r>
+              <a:t>• YAML grid → cartesian product</a:t>
+            </a:r>
+          </a:p>
+          <a:p>
+            <a:pPr>
+              <a:spcAft>
+                <a:spcPts val="600"/>
+              </a:spcAft>
+              <a:defRPr sz="1500">
+                <a:solidFill>
+                  <a:srgbClr val="1F1A17"/>
+                </a:solidFill>
+              </a:defRPr>
+            </a:pPr>
+            <a:r>
+              <a:t>• Per-run isolated artifact folders</a:t>
+            </a:r>
+          </a:p>
+          <a:p>
+            <a:pPr>
+              <a:spcAft>
+                <a:spcPts val="600"/>
+              </a:spcAft>
+              <a:defRPr sz="1500">
+                <a:solidFill>
+                  <a:srgbClr val="1F1A17"/>
+                </a:solidFill>
+              </a:defRPr>
+            </a:pPr>
+            <a:r>
+              <a:t>• Train + eval subprocesses</a:t>
+            </a:r>
+          </a:p>
+          <a:p>
+            <a:pPr>
+              <a:spcAft>
+                <a:spcPts val="600"/>
+              </a:spcAft>
+              <a:defRPr sz="1500">
+                <a:solidFill>
+                  <a:srgbClr val="1F1A17"/>
+                </a:solidFill>
+              </a:defRPr>
+            </a:pPr>
+            <a:r>
+              <a:t>• Results aggregated to JSON</a:t>
             </a:r>
           </a:p>
         </p:txBody>
@@ -5405,8 +8582,8 @@
         </p:nvSpPr>
         <p:spPr>
           <a:xfrm>
-            <a:off x="502920" y="274320"/>
-            <a:ext cx="11155680" cy="914400"/>
+            <a:off x="502920" y="0"/>
+            <a:ext cx="11155680" cy="320040"/>
           </a:xfrm>
           <a:prstGeom prst="rect">
             <a:avLst/>
@@ -5419,75 +8596,29 @@
           </a:bodyPr>
           <a:lstStyle/>
           <a:p>
-            <a:r>
-              <a:rPr sz="2800" b="1">
-                <a:solidFill>
-                  <a:srgbClr val="1F1A17"/>
-                </a:solidFill>
-              </a:rPr>
-              <a:t>Second Qualitative Example</a:t>
-            </a:r>
-          </a:p>
-        </p:txBody>
-      </p:sp>
-      <p:pic>
-        <p:nvPicPr>
-          <p:cNvPr id="3" name="Picture 2" descr="000004.png"/>
-          <p:cNvPicPr>
-            <a:picLocks noChangeAspect="1"/>
-          </p:cNvPicPr>
-          <p:nvPr/>
-        </p:nvPicPr>
-        <p:blipFill>
-          <a:blip r:embed="rId2"/>
-          <a:stretch>
-            <a:fillRect/>
-          </a:stretch>
-        </p:blipFill>
-        <p:spPr>
-          <a:xfrm>
-            <a:off x="502920" y="1234440"/>
-            <a:ext cx="5394960" cy="1541417"/>
-          </a:xfrm>
-          <a:prstGeom prst="rect">
-            <a:avLst/>
-          </a:prstGeom>
-        </p:spPr>
-      </p:pic>
-      <p:pic>
-        <p:nvPicPr>
-          <p:cNvPr id="4" name="Picture 3" descr="000004.png"/>
-          <p:cNvPicPr>
-            <a:picLocks noChangeAspect="1"/>
-          </p:cNvPicPr>
-          <p:nvPr/>
-        </p:nvPicPr>
-        <p:blipFill>
-          <a:blip r:embed="rId3"/>
-          <a:stretch>
-            <a:fillRect/>
-          </a:stretch>
-        </p:blipFill>
-        <p:spPr>
-          <a:xfrm>
-            <a:off x="6263640" y="1234440"/>
-            <a:ext cx="5394960" cy="1541417"/>
-          </a:xfrm>
-          <a:prstGeom prst="rect">
-            <a:avLst/>
-          </a:prstGeom>
-        </p:spPr>
-      </p:pic>
-      <p:sp>
-        <p:nvSpPr>
-          <p:cNvPr id="5" name="TextBox 4"/>
+            <a:pPr>
+              <a:defRPr sz="1100" b="1">
+                <a:solidFill>
+                  <a:srgbClr val="A84425"/>
+                </a:solidFill>
+              </a:defRPr>
+            </a:pPr>
+            <a:r>
+              <a:t>EXPERIMENTS</a:t>
+            </a:r>
+          </a:p>
+        </p:txBody>
+      </p:sp>
+      <p:sp>
+        <p:nvSpPr>
+          <p:cNvPr id="3" name="TextBox 2"/>
           <p:cNvSpPr txBox="1"/>
           <p:nvPr/>
         </p:nvSpPr>
         <p:spPr>
           <a:xfrm>
-            <a:off x="502920" y="6126480"/>
-            <a:ext cx="5394960" cy="457200"/>
+            <a:off x="502920" y="274320"/>
+            <a:ext cx="11155680" cy="914400"/>
           </a:xfrm>
           <a:prstGeom prst="rect">
             <a:avLst/>
@@ -5495,11 +8626,63 @@
           <a:noFill/>
         </p:spPr>
         <p:txBody>
-          <a:bodyPr wrap="none">
+          <a:bodyPr wrap="square">
             <a:spAutoFit/>
           </a:bodyPr>
           <a:lstStyle/>
           <a:p>
+            <a:r>
+              <a:rPr sz="3000" b="1">
+                <a:solidFill>
+                  <a:srgbClr val="1F1A17"/>
+                </a:solidFill>
+              </a:rPr>
+              <a:t>Datasets</a:t>
+            </a:r>
+          </a:p>
+        </p:txBody>
+      </p:sp>
+      <p:sp>
+        <p:nvSpPr>
+          <p:cNvPr id="4" name="Rectangle 3"/>
+          <p:cNvSpPr/>
+          <p:nvPr/>
+        </p:nvSpPr>
+        <p:spPr>
+          <a:xfrm>
+            <a:off x="731520" y="1097280"/>
+            <a:ext cx="2377440" cy="1143000"/>
+          </a:xfrm>
+          <a:prstGeom prst="rect">
+            <a:avLst/>
+          </a:prstGeom>
+          <a:solidFill>
+            <a:srgbClr val="FFFAF1"/>
+          </a:solidFill>
+          <a:ln>
+            <a:solidFill>
+              <a:srgbClr val="DCCDC0"/>
+            </a:solidFill>
+          </a:ln>
+        </p:spPr>
+        <p:style>
+          <a:lnRef idx="1">
+            <a:schemeClr val="accent1"/>
+          </a:lnRef>
+          <a:fillRef idx="3">
+            <a:schemeClr val="accent1"/>
+          </a:fillRef>
+          <a:effectRef idx="2">
+            <a:schemeClr val="accent1"/>
+          </a:effectRef>
+          <a:fontRef idx="minor">
+            <a:schemeClr val="lt1"/>
+          </a:fontRef>
+        </p:style>
+        <p:txBody>
+          <a:bodyPr rtlCol="0" anchor="ctr" wrap="square"/>
+          <a:lstStyle/>
+          <a:p>
             <a:pPr algn="ctr">
               <a:defRPr sz="1200">
                 <a:solidFill>
@@ -5508,21 +8691,231 @@
               </a:defRPr>
             </a:pPr>
             <a:r>
-              <a:t>Zero-shot panel, sample 000004</a:t>
-            </a:r>
-          </a:p>
-        </p:txBody>
-      </p:sp>
-      <p:sp>
-        <p:nvSpPr>
-          <p:cNvPr id="6" name="TextBox 5"/>
+              <a:t>NYU-v2 train</a:t>
+            </a:r>
+          </a:p>
+          <a:p>
+            <a:pPr algn="ctr">
+              <a:defRPr sz="2600" b="1">
+                <a:solidFill>
+                  <a:srgbClr val="A84425"/>
+                </a:solidFill>
+              </a:defRPr>
+            </a:pPr>
+            <a:r>
+              <a:t>450</a:t>
+            </a:r>
+          </a:p>
+        </p:txBody>
+      </p:sp>
+      <p:sp>
+        <p:nvSpPr>
+          <p:cNvPr id="5" name="Rectangle 4"/>
+          <p:cNvSpPr/>
+          <p:nvPr/>
+        </p:nvSpPr>
+        <p:spPr>
+          <a:xfrm>
+            <a:off x="3291840" y="1097280"/>
+            <a:ext cx="2377440" cy="1143000"/>
+          </a:xfrm>
+          <a:prstGeom prst="rect">
+            <a:avLst/>
+          </a:prstGeom>
+          <a:solidFill>
+            <a:srgbClr val="FFFAF1"/>
+          </a:solidFill>
+          <a:ln>
+            <a:solidFill>
+              <a:srgbClr val="DCCDC0"/>
+            </a:solidFill>
+          </a:ln>
+        </p:spPr>
+        <p:style>
+          <a:lnRef idx="1">
+            <a:schemeClr val="accent1"/>
+          </a:lnRef>
+          <a:fillRef idx="3">
+            <a:schemeClr val="accent1"/>
+          </a:fillRef>
+          <a:effectRef idx="2">
+            <a:schemeClr val="accent1"/>
+          </a:effectRef>
+          <a:fontRef idx="minor">
+            <a:schemeClr val="lt1"/>
+          </a:fontRef>
+        </p:style>
+        <p:txBody>
+          <a:bodyPr rtlCol="0" anchor="ctr" wrap="square"/>
+          <a:lstStyle/>
+          <a:p>
+            <a:pPr algn="ctr">
+              <a:defRPr sz="1200">
+                <a:solidFill>
+                  <a:srgbClr val="645A54"/>
+                </a:solidFill>
+              </a:defRPr>
+            </a:pPr>
+            <a:r>
+              <a:t>NYU-v2 val</a:t>
+            </a:r>
+          </a:p>
+          <a:p>
+            <a:pPr algn="ctr">
+              <a:defRPr sz="2600" b="1">
+                <a:solidFill>
+                  <a:srgbClr val="A84425"/>
+                </a:solidFill>
+              </a:defRPr>
+            </a:pPr>
+            <a:r>
+              <a:t>60</a:t>
+            </a:r>
+          </a:p>
+        </p:txBody>
+      </p:sp>
+      <p:sp>
+        <p:nvSpPr>
+          <p:cNvPr id="6" name="Rectangle 5"/>
+          <p:cNvSpPr/>
+          <p:nvPr/>
+        </p:nvSpPr>
+        <p:spPr>
+          <a:xfrm>
+            <a:off x="5852160" y="1097280"/>
+            <a:ext cx="2377440" cy="1143000"/>
+          </a:xfrm>
+          <a:prstGeom prst="rect">
+            <a:avLst/>
+          </a:prstGeom>
+          <a:solidFill>
+            <a:srgbClr val="FFFAF1"/>
+          </a:solidFill>
+          <a:ln>
+            <a:solidFill>
+              <a:srgbClr val="DCCDC0"/>
+            </a:solidFill>
+          </a:ln>
+        </p:spPr>
+        <p:style>
+          <a:lnRef idx="1">
+            <a:schemeClr val="accent1"/>
+          </a:lnRef>
+          <a:fillRef idx="3">
+            <a:schemeClr val="accent1"/>
+          </a:fillRef>
+          <a:effectRef idx="2">
+            <a:schemeClr val="accent1"/>
+          </a:effectRef>
+          <a:fontRef idx="minor">
+            <a:schemeClr val="lt1"/>
+          </a:fontRef>
+        </p:style>
+        <p:txBody>
+          <a:bodyPr rtlCol="0" anchor="ctr" wrap="square"/>
+          <a:lstStyle/>
+          <a:p>
+            <a:pPr algn="ctr">
+              <a:defRPr sz="1200">
+                <a:solidFill>
+                  <a:srgbClr val="645A54"/>
+                </a:solidFill>
+              </a:defRPr>
+            </a:pPr>
+            <a:r>
+              <a:t>NYU-v2 test</a:t>
+            </a:r>
+          </a:p>
+          <a:p>
+            <a:pPr algn="ctr">
+              <a:defRPr sz="2600" b="1">
+                <a:solidFill>
+                  <a:srgbClr val="A84425"/>
+                </a:solidFill>
+              </a:defRPr>
+            </a:pPr>
+            <a:r>
+              <a:t>59</a:t>
+            </a:r>
+          </a:p>
+        </p:txBody>
+      </p:sp>
+      <p:sp>
+        <p:nvSpPr>
+          <p:cNvPr id="7" name="Rectangle 6"/>
+          <p:cNvSpPr/>
+          <p:nvPr/>
+        </p:nvSpPr>
+        <p:spPr>
+          <a:xfrm>
+            <a:off x="8412480" y="1097280"/>
+            <a:ext cx="2377440" cy="1143000"/>
+          </a:xfrm>
+          <a:prstGeom prst="rect">
+            <a:avLst/>
+          </a:prstGeom>
+          <a:solidFill>
+            <a:srgbClr val="FFFAF1"/>
+          </a:solidFill>
+          <a:ln>
+            <a:solidFill>
+              <a:srgbClr val="DCCDC0"/>
+            </a:solidFill>
+          </a:ln>
+        </p:spPr>
+        <p:style>
+          <a:lnRef idx="1">
+            <a:schemeClr val="accent1"/>
+          </a:lnRef>
+          <a:fillRef idx="3">
+            <a:schemeClr val="accent1"/>
+          </a:fillRef>
+          <a:effectRef idx="2">
+            <a:schemeClr val="accent1"/>
+          </a:effectRef>
+          <a:fontRef idx="minor">
+            <a:schemeClr val="lt1"/>
+          </a:fontRef>
+        </p:style>
+        <p:txBody>
+          <a:bodyPr rtlCol="0" anchor="ctr" wrap="square"/>
+          <a:lstStyle/>
+          <a:p>
+            <a:pPr algn="ctr">
+              <a:defRPr sz="1200">
+                <a:solidFill>
+                  <a:srgbClr val="645A54"/>
+                </a:solidFill>
+              </a:defRPr>
+            </a:pPr>
+            <a:r>
+              <a:t>KITTI test</a:t>
+            </a:r>
+          </a:p>
+          <a:p>
+            <a:pPr algn="ctr">
+              <a:defRPr sz="2600" b="1">
+                <a:solidFill>
+                  <a:srgbClr val="A84425"/>
+                </a:solidFill>
+              </a:defRPr>
+            </a:pPr>
+            <a:r>
+              <a:t>100</a:t>
+            </a:r>
+          </a:p>
+        </p:txBody>
+      </p:sp>
+      <p:sp>
+        <p:nvSpPr>
+          <p:cNvPr id="8" name="TextBox 7"/>
           <p:cNvSpPr txBox="1"/>
           <p:nvPr/>
         </p:nvSpPr>
         <p:spPr>
           <a:xfrm>
-            <a:off x="6263640" y="6126480"/>
-            <a:ext cx="5394960" cy="457200"/>
+            <a:off x="822960" y="2743200"/>
+            <a:ext cx="10515600" cy="3657600"/>
           </a:xfrm>
           <a:prstGeom prst="rect">
             <a:avLst/>
@@ -5530,20 +8923,98 @@
           <a:noFill/>
         </p:spPr>
         <p:txBody>
-          <a:bodyPr wrap="none">
+          <a:bodyPr wrap="square">
             <a:spAutoFit/>
           </a:bodyPr>
           <a:lstStyle/>
           <a:p>
-            <a:pPr algn="ctr">
-              <a:defRPr sz="1200">
-                <a:solidFill>
-                  <a:srgbClr val="645A54"/>
-                </a:solidFill>
-              </a:defRPr>
-            </a:pPr>
-            <a:r>
-              <a:t>Fine-tuned panel, sample 000004</a:t>
+            <a:pPr>
+              <a:spcAft>
+                <a:spcPts val="600"/>
+              </a:spcAft>
+              <a:defRPr sz="1800">
+                <a:solidFill>
+                  <a:srgbClr val="1F1A17"/>
+                </a:solidFill>
+              </a:defRPr>
+            </a:pPr>
+            <a:r>
+              <a:t>• NYU-v2 PoC subset from sayakpaul/nyu_depth_v2 (Hugging Face)</a:t>
+            </a:r>
+          </a:p>
+          <a:p>
+            <a:pPr>
+              <a:spcAft>
+                <a:spcPts val="600"/>
+              </a:spcAft>
+              <a:defRPr sz="1800">
+                <a:solidFill>
+                  <a:srgbClr val="1F1A17"/>
+                </a:solidFill>
+              </a:defRPr>
+            </a:pPr>
+            <a:r>
+              <a:t>• Float32 .npy depth in meters, range [0.001, 10.0] m</a:t>
+            </a:r>
+          </a:p>
+          <a:p>
+            <a:pPr>
+              <a:spcAft>
+                <a:spcPts val="600"/>
+              </a:spcAft>
+              <a:defRPr sz="1800">
+                <a:solidFill>
+                  <a:srgbClr val="1F1A17"/>
+                </a:solidFill>
+              </a:defRPr>
+            </a:pPr>
+            <a:r>
+              <a:t>• KITTI eigen subset from exander/kitti-depth-gt (Hugging Face)</a:t>
+            </a:r>
+          </a:p>
+          <a:p>
+            <a:pPr>
+              <a:spcAft>
+                <a:spcPts val="600"/>
+              </a:spcAft>
+              <a:defRPr sz="1800">
+                <a:solidFill>
+                  <a:srgbClr val="1F1A17"/>
+                </a:solidFill>
+              </a:defRPr>
+            </a:pPr>
+            <a:r>
+              <a:t>• Float32 .npy depth in meters, range [0.001, 80.0] m</a:t>
+            </a:r>
+          </a:p>
+          <a:p>
+            <a:pPr>
+              <a:spcAft>
+                <a:spcPts val="600"/>
+              </a:spcAft>
+              <a:defRPr sz="1800">
+                <a:solidFill>
+                  <a:srgbClr val="1F1A17"/>
+                </a:solidFill>
+              </a:defRPr>
+            </a:pPr>
+            <a:r>
+              <a:t>• Both evaluated at 256×256 for internal comparability</a:t>
+            </a:r>
+          </a:p>
+          <a:p>
+            <a:pPr>
+              <a:spcAft>
+                <a:spcPts val="600"/>
+              </a:spcAft>
+              <a:defRPr sz="1800">
+                <a:solidFill>
+                  <a:srgbClr val="1F1A17"/>
+                </a:solidFill>
+              </a:defRPr>
+            </a:pPr>
+            <a:r>
+              <a:t>• Test split sample IDs frozen across all runs</a:t>
             </a:r>
           </a:p>
         </p:txBody>
@@ -5582,8 +9053,8 @@
         </p:nvSpPr>
         <p:spPr>
           <a:xfrm>
-            <a:off x="502920" y="274320"/>
-            <a:ext cx="11155680" cy="914400"/>
+            <a:off x="502920" y="0"/>
+            <a:ext cx="11155680" cy="320040"/>
           </a:xfrm>
           <a:prstGeom prst="rect">
             <a:avLst/>
@@ -5596,13 +9067,15 @@
           </a:bodyPr>
           <a:lstStyle/>
           <a:p>
-            <a:r>
-              <a:rPr sz="2800" b="1">
-                <a:solidFill>
-                  <a:srgbClr val="1F1A17"/>
-                </a:solidFill>
-              </a:rPr>
-              <a:t>System Assessment</a:t>
+            <a:pPr>
+              <a:defRPr sz="1100" b="1">
+                <a:solidFill>
+                  <a:srgbClr val="A84425"/>
+                </a:solidFill>
+              </a:defRPr>
+            </a:pPr>
+            <a:r>
+              <a:t>EXPERIMENTS</a:t>
             </a:r>
           </a:p>
         </p:txBody>
@@ -5615,8 +9088,8 @@
         </p:nvSpPr>
         <p:spPr>
           <a:xfrm>
-            <a:off x="731520" y="1280160"/>
-            <a:ext cx="10698480" cy="3291840"/>
+            <a:off x="502920" y="274320"/>
+            <a:ext cx="11155680" cy="914400"/>
           </a:xfrm>
           <a:prstGeom prst="rect">
             <a:avLst/>
@@ -5629,78 +9102,13 @@
           </a:bodyPr>
           <a:lstStyle/>
           <a:p>
-            <a:pPr>
-              <a:spcAft>
-                <a:spcPts val="800"/>
-              </a:spcAft>
-              <a:defRPr sz="2000">
-                <a:solidFill>
-                  <a:srgbClr val="1F1A17"/>
-                </a:solidFill>
-              </a:defRPr>
-            </a:pPr>
-            <a:r>
-              <a:t>Yes, this is a real and functioning depth-estimation system</a:t>
-            </a:r>
-          </a:p>
-          <a:p>
-            <a:pPr>
-              <a:spcAft>
-                <a:spcPts val="800"/>
-              </a:spcAft>
-              <a:defRPr sz="2000">
-                <a:solidFill>
-                  <a:srgbClr val="1F1A17"/>
-                </a:solidFill>
-              </a:defRPr>
-            </a:pPr>
-            <a:r>
-              <a:t>The pretrained zero-shot model produces plausible relative depth maps</a:t>
-            </a:r>
-          </a:p>
-          <a:p>
-            <a:pPr>
-              <a:spcAft>
-                <a:spcPts val="800"/>
-              </a:spcAft>
-              <a:defRPr sz="2000">
-                <a:solidFill>
-                  <a:srgbClr val="1F1A17"/>
-                </a:solidFill>
-              </a:defRPr>
-            </a:pPr>
-            <a:r>
-              <a:t>The system is accurate enough to demonstrate scene layout and nearer/farther structure</a:t>
-            </a:r>
-          </a:p>
-          <a:p>
-            <a:pPr>
-              <a:spcAft>
-                <a:spcPts val="800"/>
-              </a:spcAft>
-              <a:defRPr sz="2000">
-                <a:solidFill>
-                  <a:srgbClr val="1F1A17"/>
-                </a:solidFill>
-              </a:defRPr>
-            </a:pPr>
-            <a:r>
-              <a:t>The small supervised fine-tune did not improve it on held-out test data</a:t>
-            </a:r>
-          </a:p>
-          <a:p>
-            <a:pPr>
-              <a:spcAft>
-                <a:spcPts val="800"/>
-              </a:spcAft>
-              <a:defRPr sz="2000">
-                <a:solidFill>
-                  <a:srgbClr val="1F1A17"/>
-                </a:solidFill>
-              </a:defRPr>
-            </a:pPr>
-            <a:r>
-              <a:t>So the system works, but the training recipe needs improvement before claiming a better adapted model</a:t>
+            <a:r>
+              <a:rPr sz="3000" b="1">
+                <a:solidFill>
+                  <a:srgbClr val="1F1A17"/>
+                </a:solidFill>
+              </a:rPr>
+              <a:t>Metrics</a:t>
             </a:r>
           </a:p>
         </p:txBody>
@@ -5713,8 +9121,8 @@
         </p:nvSpPr>
         <p:spPr>
           <a:xfrm>
-            <a:off x="914400" y="4937760"/>
-            <a:ext cx="7315200" cy="1097280"/>
+            <a:off x="822960" y="1371600"/>
+            <a:ext cx="10515600" cy="4572000"/>
           </a:xfrm>
           <a:prstGeom prst="rect">
             <a:avLst/>
@@ -5729,31 +9137,106 @@
           <a:p>
             <a:pPr>
               <a:spcAft>
-                <a:spcPts val="800"/>
-              </a:spcAft>
-              <a:defRPr sz="2200">
-                <a:solidFill>
-                  <a:srgbClr val="1F1A17"/>
-                </a:solidFill>
-              </a:defRPr>
-            </a:pPr>
-            <a:r>
-              <a:t>Best claim: accurate relative depth proof of concept</a:t>
-            </a:r>
-          </a:p>
-          <a:p>
-            <a:pPr>
-              <a:spcAft>
-                <a:spcPts val="800"/>
-              </a:spcAft>
-              <a:defRPr sz="2200">
-                <a:solidFill>
-                  <a:srgbClr val="1F1A17"/>
-                </a:solidFill>
-              </a:defRPr>
-            </a:pPr>
-            <a:r>
-              <a:t>Not a strong claim: precise metric distance measurement</a:t>
+                <a:spcPts val="600"/>
+              </a:spcAft>
+              <a:defRPr sz="1800">
+                <a:solidFill>
+                  <a:srgbClr val="1F1A17"/>
+                </a:solidFill>
+              </a:defRPr>
+            </a:pPr>
+            <a:r>
+              <a:t>• All metrics after per-image least-squares scale + shift alignment</a:t>
+            </a:r>
+          </a:p>
+          <a:p>
+            <a:pPr>
+              <a:spcAft>
+                <a:spcPts val="600"/>
+              </a:spcAft>
+              <a:defRPr sz="1800">
+                <a:solidFill>
+                  <a:srgbClr val="1F1A17"/>
+                </a:solidFill>
+              </a:defRPr>
+            </a:pPr>
+            <a:r>
+              <a:t>• AbsRel  = mean(|pred – gt| / gt)     [↓ lower better]</a:t>
+            </a:r>
+          </a:p>
+          <a:p>
+            <a:pPr>
+              <a:spcAft>
+                <a:spcPts val="600"/>
+              </a:spcAft>
+              <a:defRPr sz="1800">
+                <a:solidFill>
+                  <a:srgbClr val="1F1A17"/>
+                </a:solidFill>
+              </a:defRPr>
+            </a:pPr>
+            <a:r>
+              <a:t>• RMSE     = sqrt(mean((pred – gt)²))   [↓ lower better]</a:t>
+            </a:r>
+          </a:p>
+          <a:p>
+            <a:pPr>
+              <a:spcAft>
+                <a:spcPts val="600"/>
+              </a:spcAft>
+              <a:defRPr sz="1800">
+                <a:solidFill>
+                  <a:srgbClr val="1F1A17"/>
+                </a:solidFill>
+              </a:defRPr>
+            </a:pPr>
+            <a:r>
+              <a:t>• RMSE_log = sqrt(mean((log pred – log gt)²))     [↓ lower better]</a:t>
+            </a:r>
+          </a:p>
+          <a:p>
+            <a:pPr>
+              <a:spcAft>
+                <a:spcPts val="600"/>
+              </a:spcAft>
+              <a:defRPr sz="1800">
+                <a:solidFill>
+                  <a:srgbClr val="1F1A17"/>
+                </a:solidFill>
+              </a:defRPr>
+            </a:pPr>
+            <a:r>
+              <a:t>• log10    = mean(|log10 pred – log10 gt|)         [↓ lower better]</a:t>
+            </a:r>
+          </a:p>
+          <a:p>
+            <a:pPr>
+              <a:spcAft>
+                <a:spcPts val="600"/>
+              </a:spcAft>
+              <a:defRPr sz="1800">
+                <a:solidFill>
+                  <a:srgbClr val="1F1A17"/>
+                </a:solidFill>
+              </a:defRPr>
+            </a:pPr>
+            <a:r>
+              <a:t>• δ_1, δ_2, δ_3 = fraction with max(p/t, t/p) &lt; 1.25^n   [↑ higher better]</a:t>
+            </a:r>
+          </a:p>
+          <a:p>
+            <a:pPr>
+              <a:spcAft>
+                <a:spcPts val="600"/>
+              </a:spcAft>
+              <a:defRPr sz="1800">
+                <a:solidFill>
+                  <a:srgbClr val="1F1A17"/>
+                </a:solidFill>
+              </a:defRPr>
+            </a:pPr>
+            <a:r>
+              <a:t>• Headline numbers reported: AbsRel and δ_1 (per Depth Anything paper)</a:t>
             </a:r>
           </a:p>
         </p:txBody>
